--- a/MiniMax_前瞻_DCF_竞争格局.pptx
+++ b/MiniMax_前瞻_DCF_竞争格局.pptx
@@ -21,6 +21,8 @@
     <p:sldId id="269" r:id="rId20"/>
     <p:sldId id="270" r:id="rId21"/>
     <p:sldId id="271" r:id="rId22"/>
+    <p:sldId id="272" r:id="rId23"/>
+    <p:sldId id="273" r:id="rId24"/>
   </p:sldIdLst>
   <p:sldSz cx="12191695" cy="6858000" type="screen4x3"/>
   <p:notesSz cx="6858000" cy="9144000"/>
@@ -683,7 +685,7 @@
                   <c:v>3</c:v>
                 </c:pt>
                 <c:pt idx="1">
-                  <c:v>3</c:v>
+                  <c:v>2</c:v>
                 </c:pt>
                 <c:pt idx="2">
                   <c:v>4</c:v>
@@ -3846,8 +3848,8 @@
         </p:nvSpPr>
         <p:spPr>
           <a:xfrm>
-            <a:off x="731520" y="2103120"/>
-            <a:ext cx="10698480" cy="2011680"/>
+            <a:off x="731520" y="2011680"/>
+            <a:ext cx="10698480" cy="2103120"/>
           </a:xfrm>
           <a:prstGeom prst="rect">
             <a:avLst/>
@@ -3874,13 +3876,13 @@
           <a:p>
             <a:pPr algn="l"/>
             <a:r>
-              <a:rPr sz="2400" b="1">
+              <a:rPr sz="2300" b="1">
                 <a:solidFill>
                   <a:srgbClr val="2E86C1"/>
                 </a:solidFill>
                 <a:latin typeface="Microsoft YaHei"/>
               </a:rPr>
-              <a:t>财报前瞻假设 · DCF 估值 · 大模型竞争格局</a:t>
+              <a:t>财报前瞻 · 10 年 DCF 估值 · 大模型“六小龙”竞争格局</a:t>
             </a:r>
           </a:p>
         </p:txBody>
@@ -3915,7 +3917,7 @@
                 </a:solidFill>
                 <a:latin typeface="Microsoft YaHei"/>
               </a:rPr>
-              <a:t>2026-01-09 港交所上市 · 全球最快上市 AI 公司 · 阿里/腾讯/米哈游加持</a:t>
+              <a:t>2026-01-09 港交所上市 · 含 智谱 / Kimi / 阶跃星辰 横评</a:t>
             </a:r>
           </a:p>
           <a:p>
@@ -3927,7 +3929,7 @@
                 </a:solidFill>
                 <a:latin typeface="Microsoft YaHei"/>
               </a:rPr>
-              <a:t>演示版 · 来源：港交所招股书、QuestMobile、券商研报、公开报道 · 2026-06 · 不构成投资建议</a:t>
+              <a:t>演示版 · 来源：各家招股书、QuestMobile、券商研报、公开报道 · 2026-06 · 不构成投资建议</a:t>
             </a:r>
           </a:p>
         </p:txBody>
@@ -4001,7 +4003,7 @@
         </p:nvSpPr>
         <p:spPr>
           <a:xfrm>
-            <a:off x="457200" y="237744"/>
+            <a:off x="457200" y="219456"/>
             <a:ext cx="11338560" cy="914400"/>
           </a:xfrm>
           <a:prstGeom prst="rect">
@@ -4017,7 +4019,7 @@
           <a:p>
             <a:pPr algn="l"/>
             <a:r>
-              <a:rPr sz="2600" b="1">
+              <a:rPr sz="2500" b="1">
                 <a:solidFill>
                   <a:srgbClr val="16213E"/>
                 </a:solidFill>
@@ -4029,7 +4031,7 @@
           <a:p>
             <a:pPr algn="l"/>
             <a:r>
-              <a:rPr sz="1400" b="0">
+              <a:rPr sz="1350" b="0">
                 <a:solidFill>
                   <a:srgbClr val="6B707B"/>
                 </a:solidFill>
@@ -4048,8 +4050,8 @@
         </p:nvSpPr>
         <p:spPr>
           <a:xfrm>
-            <a:off x="10058400" y="274320"/>
-            <a:ext cx="1828800" cy="411480"/>
+            <a:off x="10104120" y="274320"/>
+            <a:ext cx="1783080" cy="384048"/>
           </a:xfrm>
           <a:prstGeom prst="rect">
             <a:avLst/>
@@ -4134,7 +4136,7 @@
           <a:p>
             <a:pPr algn="l">
               <a:spcAft>
-                <a:spcPts val="800"/>
+                <a:spcPts val="700"/>
               </a:spcAft>
             </a:pPr>
             <a:r>
@@ -4150,7 +4152,7 @@
           <a:p>
             <a:pPr algn="l">
               <a:spcAft>
-                <a:spcPts val="800"/>
+                <a:spcPts val="700"/>
               </a:spcAft>
             </a:pPr>
             <a:r>
@@ -4166,7 +4168,7 @@
           <a:p>
             <a:pPr algn="l">
               <a:spcAft>
-                <a:spcPts val="800"/>
+                <a:spcPts val="700"/>
               </a:spcAft>
             </a:pPr>
             <a:r>
@@ -4182,7 +4184,7 @@
           <a:p>
             <a:pPr algn="l">
               <a:spcAft>
-                <a:spcPts val="800"/>
+                <a:spcPts val="700"/>
               </a:spcAft>
             </a:pPr>
             <a:r>
@@ -4192,7 +4194,7 @@
                 </a:solidFill>
                 <a:latin typeface="Microsoft YaHei"/>
               </a:rPr>
-              <a:t>• MiniMax 国内 MAU 不占优 → 它的牌不在国内流量，而在海外 To C + 多模态</a:t>
+              <a:t>• MiniMax 国内 MAU 不占优 → 牌不在国内流量，而在海外 To C + 多模态</a:t>
             </a:r>
           </a:p>
         </p:txBody>
@@ -4205,7 +4207,7 @@
         </p:nvSpPr>
         <p:spPr>
           <a:xfrm>
-            <a:off x="457200" y="6437376"/>
+            <a:off x="457200" y="6455664"/>
             <a:ext cx="11338560" cy="365760"/>
           </a:xfrm>
           <a:prstGeom prst="rect">
@@ -4301,7 +4303,7 @@
         </p:nvSpPr>
         <p:spPr>
           <a:xfrm>
-            <a:off x="457200" y="237744"/>
+            <a:off x="457200" y="219456"/>
             <a:ext cx="11338560" cy="914400"/>
           </a:xfrm>
           <a:prstGeom prst="rect">
@@ -4317,13 +4319,13 @@
           <a:p>
             <a:pPr algn="l"/>
             <a:r>
-              <a:rPr sz="2600" b="1">
+              <a:rPr sz="2500" b="1">
                 <a:solidFill>
                   <a:srgbClr val="16213E"/>
                 </a:solidFill>
                 <a:latin typeface="Microsoft YaHei"/>
               </a:rPr>
-              <a:t>【竞争格局】MiniMax 的差异化打法：避开国内流量战，打海外多模态</a:t>
+              <a:t>【竞争格局】MiniMax 差异化打法：避开国内流量战，打海外多模态</a:t>
             </a:r>
           </a:p>
         </p:txBody>
@@ -4336,8 +4338,8 @@
         </p:nvSpPr>
         <p:spPr>
           <a:xfrm>
-            <a:off x="10058400" y="274320"/>
-            <a:ext cx="1828800" cy="411480"/>
+            <a:off x="10104120" y="274320"/>
+            <a:ext cx="1783080" cy="384048"/>
           </a:xfrm>
           <a:prstGeom prst="rect">
             <a:avLst/>
@@ -4388,8 +4390,8 @@
         </p:nvSpPr>
         <p:spPr>
           <a:xfrm>
-            <a:off x="457200" y="1691640"/>
-            <a:ext cx="5486400" cy="457200"/>
+            <a:off x="457200" y="1645920"/>
+            <a:ext cx="5486400" cy="438912"/>
           </a:xfrm>
           <a:prstGeom prst="rect">
             <a:avLst/>
@@ -4440,7 +4442,7 @@
         </p:nvSpPr>
         <p:spPr>
           <a:xfrm>
-            <a:off x="502920" y="2194560"/>
+            <a:off x="502920" y="2121408"/>
             <a:ext cx="5394960" cy="1554480"/>
           </a:xfrm>
           <a:prstGeom prst="rect">
@@ -4456,7 +4458,7 @@
           <a:p>
             <a:pPr algn="l">
               <a:spcAft>
-                <a:spcPts val="500"/>
+                <a:spcPts val="400"/>
               </a:spcAft>
             </a:pPr>
             <a:r>
@@ -4472,7 +4474,7 @@
           <a:p>
             <a:pPr algn="l">
               <a:spcAft>
-                <a:spcPts val="500"/>
+                <a:spcPts val="400"/>
               </a:spcAft>
             </a:pPr>
             <a:r>
@@ -4488,7 +4490,7 @@
           <a:p>
             <a:pPr algn="l">
               <a:spcAft>
-                <a:spcPts val="500"/>
+                <a:spcPts val="400"/>
               </a:spcAft>
             </a:pPr>
             <a:r>
@@ -4511,8 +4513,8 @@
         </p:nvSpPr>
         <p:spPr>
           <a:xfrm>
-            <a:off x="6309360" y="1691640"/>
-            <a:ext cx="5486400" cy="457200"/>
+            <a:off x="6309360" y="1645920"/>
+            <a:ext cx="5486400" cy="438912"/>
           </a:xfrm>
           <a:prstGeom prst="rect">
             <a:avLst/>
@@ -4563,7 +4565,7 @@
         </p:nvSpPr>
         <p:spPr>
           <a:xfrm>
-            <a:off x="6355080" y="2194560"/>
+            <a:off x="6355080" y="2121408"/>
             <a:ext cx="5394960" cy="1554480"/>
           </a:xfrm>
           <a:prstGeom prst="rect">
@@ -4579,7 +4581,7 @@
           <a:p>
             <a:pPr algn="l">
               <a:spcAft>
-                <a:spcPts val="500"/>
+                <a:spcPts val="400"/>
               </a:spcAft>
             </a:pPr>
             <a:r>
@@ -4595,7 +4597,7 @@
           <a:p>
             <a:pPr algn="l">
               <a:spcAft>
-                <a:spcPts val="500"/>
+                <a:spcPts val="400"/>
               </a:spcAft>
             </a:pPr>
             <a:r>
@@ -4611,7 +4613,7 @@
           <a:p>
             <a:pPr algn="l">
               <a:spcAft>
-                <a:spcPts val="500"/>
+                <a:spcPts val="400"/>
               </a:spcAft>
             </a:pPr>
             <a:r>
@@ -4634,8 +4636,8 @@
         </p:nvSpPr>
         <p:spPr>
           <a:xfrm>
-            <a:off x="457200" y="3886200"/>
-            <a:ext cx="5486400" cy="457200"/>
+            <a:off x="457200" y="3840480"/>
+            <a:ext cx="5486400" cy="438912"/>
           </a:xfrm>
           <a:prstGeom prst="rect">
             <a:avLst/>
@@ -4686,7 +4688,7 @@
         </p:nvSpPr>
         <p:spPr>
           <a:xfrm>
-            <a:off x="502920" y="4389120"/>
+            <a:off x="502920" y="4315968"/>
             <a:ext cx="5394960" cy="1554480"/>
           </a:xfrm>
           <a:prstGeom prst="rect">
@@ -4702,7 +4704,7 @@
           <a:p>
             <a:pPr algn="l">
               <a:spcAft>
-                <a:spcPts val="500"/>
+                <a:spcPts val="400"/>
               </a:spcAft>
             </a:pPr>
             <a:r>
@@ -4718,7 +4720,7 @@
           <a:p>
             <a:pPr algn="l">
               <a:spcAft>
-                <a:spcPts val="500"/>
+                <a:spcPts val="400"/>
               </a:spcAft>
             </a:pPr>
             <a:r>
@@ -4734,7 +4736,7 @@
           <a:p>
             <a:pPr algn="l">
               <a:spcAft>
-                <a:spcPts val="500"/>
+                <a:spcPts val="400"/>
               </a:spcAft>
             </a:pPr>
             <a:r>
@@ -4757,8 +4759,8 @@
         </p:nvSpPr>
         <p:spPr>
           <a:xfrm>
-            <a:off x="6309360" y="3886200"/>
-            <a:ext cx="5486400" cy="457200"/>
+            <a:off x="6309360" y="3840480"/>
+            <a:ext cx="5486400" cy="438912"/>
           </a:xfrm>
           <a:prstGeom prst="rect">
             <a:avLst/>
@@ -4809,7 +4811,7 @@
         </p:nvSpPr>
         <p:spPr>
           <a:xfrm>
-            <a:off x="6355080" y="4389120"/>
+            <a:off x="6355080" y="4315968"/>
             <a:ext cx="5394960" cy="1554480"/>
           </a:xfrm>
           <a:prstGeom prst="rect">
@@ -4825,7 +4827,7 @@
           <a:p>
             <a:pPr algn="l">
               <a:spcAft>
-                <a:spcPts val="500"/>
+                <a:spcPts val="400"/>
               </a:spcAft>
             </a:pPr>
             <a:r>
@@ -4841,7 +4843,7 @@
           <a:p>
             <a:pPr algn="l">
               <a:spcAft>
-                <a:spcPts val="500"/>
+                <a:spcPts val="400"/>
               </a:spcAft>
             </a:pPr>
             <a:r>
@@ -4857,7 +4859,7 @@
           <a:p>
             <a:pPr algn="l">
               <a:spcAft>
-                <a:spcPts val="500"/>
+                <a:spcPts val="400"/>
               </a:spcAft>
             </a:pPr>
             <a:r>
@@ -4880,7 +4882,7 @@
         </p:nvSpPr>
         <p:spPr>
           <a:xfrm>
-            <a:off x="457200" y="6437376"/>
+            <a:off x="457200" y="6455664"/>
             <a:ext cx="11338560" cy="365760"/>
           </a:xfrm>
           <a:prstGeom prst="rect">
@@ -4976,7 +4978,7 @@
         </p:nvSpPr>
         <p:spPr>
           <a:xfrm>
-            <a:off x="457200" y="237744"/>
+            <a:off x="457200" y="219456"/>
             <a:ext cx="11338560" cy="914400"/>
           </a:xfrm>
           <a:prstGeom prst="rect">
@@ -4992,13 +4994,13 @@
           <a:p>
             <a:pPr algn="l"/>
             <a:r>
-              <a:rPr sz="2600" b="1">
+              <a:rPr sz="2500" b="1">
                 <a:solidFill>
                   <a:srgbClr val="16213E"/>
                 </a:solidFill>
                 <a:latin typeface="Microsoft YaHei"/>
               </a:rPr>
-              <a:t>【竞争格局】主要对手对比：流量、模式、上市状态各异</a:t>
+              <a:t>【竞争格局】主要对手对比：大厂 + 六小龙，模式与上市路径各异</a:t>
             </a:r>
           </a:p>
         </p:txBody>
@@ -5011,8 +5013,8 @@
         </p:nvSpPr>
         <p:spPr>
           <a:xfrm>
-            <a:off x="10058400" y="274320"/>
-            <a:ext cx="1828800" cy="411480"/>
+            <a:off x="10104120" y="274320"/>
+            <a:ext cx="1783080" cy="384048"/>
           </a:xfrm>
           <a:prstGeom prst="rect">
             <a:avLst/>
@@ -5065,7 +5067,7 @@
         </p:nvGraphicFramePr>
         <p:xfrm>
           <a:off x="457200" y="1691640"/>
-          <a:ext cx="11247120" cy="3931920"/>
+          <a:ext cx="11247120" cy="4114800"/>
         </p:xfrm>
         <a:graphic>
           <a:graphicData uri="http://schemas.openxmlformats.org/drawingml/2006/table">
@@ -5075,20 +5077,20 @@
               </a:tblPr>
               <a:tblGrid>
                 <a:gridCol w="1737360"/>
-                <a:gridCol w="2743200"/>
-                <a:gridCol w="1371600"/>
-                <a:gridCol w="1828800"/>
-                <a:gridCol w="3566160"/>
+                <a:gridCol w="2926080"/>
+                <a:gridCol w="1325880"/>
+                <a:gridCol w="1965960"/>
+                <a:gridCol w="3291840"/>
               </a:tblGrid>
-              <a:tr h="655320">
-                <a:tc>
-                  <a:txBody>
-                    <a:bodyPr wrap="square"/>
-                    <a:lstStyle/>
-                    <a:p>
-                      <a:pPr algn="l"/>
-                      <a:r>
-                        <a:rPr sz="1150" b="1">
+              <a:tr h="587828">
+                <a:tc>
+                  <a:txBody>
+                    <a:bodyPr wrap="square"/>
+                    <a:lstStyle/>
+                    <a:p>
+                      <a:pPr algn="l"/>
+                      <a:r>
+                        <a:rPr sz="1100" b="1">
                           <a:solidFill>
                             <a:srgbClr val="FFFFFF"/>
                           </a:solidFill>
@@ -5098,7 +5100,7 @@
                       </a:r>
                     </a:p>
                   </a:txBody>
-                  <a:tcPr marL="64008" marR="64008" marT="18288" marB="18288" anchor="ctr">
+                  <a:tcPr marL="54864" marR="54864" marT="18288" marB="18288" anchor="ctr">
                     <a:solidFill>
                       <a:srgbClr val="16213E"/>
                     </a:solidFill>
@@ -5111,7 +5113,7 @@
                     <a:p>
                       <a:pPr algn="l"/>
                       <a:r>
-                        <a:rPr sz="1150" b="1">
+                        <a:rPr sz="1100" b="1">
                           <a:solidFill>
                             <a:srgbClr val="FFFFFF"/>
                           </a:solidFill>
@@ -5121,7 +5123,7 @@
                       </a:r>
                     </a:p>
                   </a:txBody>
-                  <a:tcPr marL="64008" marR="64008" marT="18288" marB="18288" anchor="ctr">
+                  <a:tcPr marL="54864" marR="54864" marT="18288" marB="18288" anchor="ctr">
                     <a:solidFill>
                       <a:srgbClr val="16213E"/>
                     </a:solidFill>
@@ -5134,7 +5136,7 @@
                     <a:p>
                       <a:pPr algn="l"/>
                       <a:r>
-                        <a:rPr sz="1150" b="1">
+                        <a:rPr sz="1100" b="1">
                           <a:solidFill>
                             <a:srgbClr val="FFFFFF"/>
                           </a:solidFill>
@@ -5144,7 +5146,7 @@
                       </a:r>
                     </a:p>
                   </a:txBody>
-                  <a:tcPr marL="64008" marR="64008" marT="18288" marB="18288" anchor="ctr">
+                  <a:tcPr marL="54864" marR="54864" marT="18288" marB="18288" anchor="ctr">
                     <a:solidFill>
                       <a:srgbClr val="16213E"/>
                     </a:solidFill>
@@ -5157,17 +5159,17 @@
                     <a:p>
                       <a:pPr algn="l"/>
                       <a:r>
-                        <a:rPr sz="1150" b="1">
+                        <a:rPr sz="1100" b="1">
                           <a:solidFill>
                             <a:srgbClr val="FFFFFF"/>
                           </a:solidFill>
                           <a:latin typeface="Microsoft YaHei"/>
                         </a:rPr>
-                        <a:t>商业化</a:t>
-                      </a:r>
-                    </a:p>
-                  </a:txBody>
-                  <a:tcPr marL="64008" marR="64008" marT="18288" marB="18288" anchor="ctr">
+                        <a:t>上市状态</a:t>
+                      </a:r>
+                    </a:p>
+                  </a:txBody>
+                  <a:tcPr marL="54864" marR="54864" marT="18288" marB="18288" anchor="ctr">
                     <a:solidFill>
                       <a:srgbClr val="16213E"/>
                     </a:solidFill>
@@ -5180,7 +5182,7 @@
                     <a:p>
                       <a:pPr algn="l"/>
                       <a:r>
-                        <a:rPr sz="1150" b="1">
+                        <a:rPr sz="1100" b="1">
                           <a:solidFill>
                             <a:srgbClr val="FFFFFF"/>
                           </a:solidFill>
@@ -5190,22 +5192,22 @@
                       </a:r>
                     </a:p>
                   </a:txBody>
-                  <a:tcPr marL="64008" marR="64008" marT="18288" marB="18288" anchor="ctr">
+                  <a:tcPr marL="54864" marR="54864" marT="18288" marB="18288" anchor="ctr">
                     <a:solidFill>
                       <a:srgbClr val="16213E"/>
                     </a:solidFill>
                   </a:tcPr>
                 </a:tc>
               </a:tr>
-              <a:tr h="655320">
-                <a:tc>
-                  <a:txBody>
-                    <a:bodyPr wrap="square"/>
-                    <a:lstStyle/>
-                    <a:p>
-                      <a:pPr algn="l"/>
-                      <a:r>
-                        <a:rPr sz="1150" b="0">
+              <a:tr h="587828">
+                <a:tc>
+                  <a:txBody>
+                    <a:bodyPr wrap="square"/>
+                    <a:lstStyle/>
+                    <a:p>
+                      <a:pPr algn="l"/>
+                      <a:r>
+                        <a:rPr sz="1100" b="0">
                           <a:solidFill>
                             <a:srgbClr val="16213E"/>
                           </a:solidFill>
@@ -5215,7 +5217,7 @@
                       </a:r>
                     </a:p>
                   </a:txBody>
-                  <a:tcPr marL="64008" marR="64008" marT="18288" marB="18288" anchor="ctr">
+                  <a:tcPr marL="54864" marR="54864" marT="18288" marB="18288" anchor="ctr">
                     <a:solidFill>
                       <a:srgbClr val="FFFFFF"/>
                     </a:solidFill>
@@ -5228,17 +5230,17 @@
                     <a:p>
                       <a:pPr algn="l"/>
                       <a:r>
-                        <a:rPr sz="1150" b="0">
-                          <a:solidFill>
-                            <a:srgbClr val="16213E"/>
-                          </a:solidFill>
-                          <a:latin typeface="Microsoft YaHei"/>
-                        </a:rPr>
-                        <a:t>闭源MoE，To B为主，火山引擎</a:t>
-                      </a:r>
-                    </a:p>
-                  </a:txBody>
-                  <a:tcPr marL="64008" marR="64008" marT="18288" marB="18288" anchor="ctr">
+                        <a:rPr sz="1100" b="0">
+                          <a:solidFill>
+                            <a:srgbClr val="16213E"/>
+                          </a:solidFill>
+                          <a:latin typeface="Microsoft YaHei"/>
+                        </a:rPr>
+                        <a:t>闭源MoE，To B，火山引擎</a:t>
+                      </a:r>
+                    </a:p>
+                  </a:txBody>
+                  <a:tcPr marL="54864" marR="54864" marT="18288" marB="18288" anchor="ctr">
                     <a:solidFill>
                       <a:srgbClr val="FFFFFF"/>
                     </a:solidFill>
@@ -5251,7 +5253,7 @@
                     <a:p>
                       <a:pPr algn="l"/>
                       <a:r>
-                        <a:rPr sz="1150" b="0">
+                        <a:rPr sz="1100" b="0">
                           <a:solidFill>
                             <a:srgbClr val="16213E"/>
                           </a:solidFill>
@@ -5261,7 +5263,7 @@
                       </a:r>
                     </a:p>
                   </a:txBody>
-                  <a:tcPr marL="64008" marR="64008" marT="18288" marB="18288" anchor="ctr">
+                  <a:tcPr marL="54864" marR="54864" marT="18288" marB="18288" anchor="ctr">
                     <a:solidFill>
                       <a:srgbClr val="FFFFFF"/>
                     </a:solidFill>
@@ -5274,17 +5276,17 @@
                     <a:p>
                       <a:pPr algn="l"/>
                       <a:r>
-                        <a:rPr sz="1150" b="0">
-                          <a:solidFill>
-                            <a:srgbClr val="16213E"/>
-                          </a:solidFill>
-                          <a:latin typeface="Microsoft YaHei"/>
-                        </a:rPr>
-                        <a:t>企业客户广</a:t>
-                      </a:r>
-                    </a:p>
-                  </a:txBody>
-                  <a:tcPr marL="64008" marR="64008" marT="18288" marB="18288" anchor="ctr">
+                        <a:rPr sz="1100" b="0">
+                          <a:solidFill>
+                            <a:srgbClr val="16213E"/>
+                          </a:solidFill>
+                          <a:latin typeface="Microsoft YaHei"/>
+                        </a:rPr>
+                        <a:t>大厂自有</a:t>
+                      </a:r>
+                    </a:p>
+                  </a:txBody>
+                  <a:tcPr marL="54864" marR="54864" marT="18288" marB="18288" anchor="ctr">
                     <a:solidFill>
                       <a:srgbClr val="FFFFFF"/>
                     </a:solidFill>
@@ -5297,7 +5299,7 @@
                     <a:p>
                       <a:pPr algn="l"/>
                       <a:r>
-                        <a:rPr sz="1150" b="0">
+                        <a:rPr sz="1100" b="0">
                           <a:solidFill>
                             <a:srgbClr val="16213E"/>
                           </a:solidFill>
@@ -5307,22 +5309,22 @@
                       </a:r>
                     </a:p>
                   </a:txBody>
-                  <a:tcPr marL="64008" marR="64008" marT="18288" marB="18288" anchor="ctr">
+                  <a:tcPr marL="54864" marR="54864" marT="18288" marB="18288" anchor="ctr">
                     <a:solidFill>
                       <a:srgbClr val="FFFFFF"/>
                     </a:solidFill>
                   </a:tcPr>
                 </a:tc>
               </a:tr>
-              <a:tr h="655320">
-                <a:tc>
-                  <a:txBody>
-                    <a:bodyPr wrap="square"/>
-                    <a:lstStyle/>
-                    <a:p>
-                      <a:pPr algn="l"/>
-                      <a:r>
-                        <a:rPr sz="1150" b="0">
+              <a:tr h="587828">
+                <a:tc>
+                  <a:txBody>
+                    <a:bodyPr wrap="square"/>
+                    <a:lstStyle/>
+                    <a:p>
+                      <a:pPr algn="l"/>
+                      <a:r>
+                        <a:rPr sz="1100" b="0">
                           <a:solidFill>
                             <a:srgbClr val="16213E"/>
                           </a:solidFill>
@@ -5332,7 +5334,7 @@
                       </a:r>
                     </a:p>
                   </a:txBody>
-                  <a:tcPr marL="64008" marR="64008" marT="18288" marB="18288" anchor="ctr">
+                  <a:tcPr marL="54864" marR="54864" marT="18288" marB="18288" anchor="ctr">
                     <a:solidFill>
                       <a:srgbClr val="E9EBEF"/>
                     </a:solidFill>
@@ -5345,7 +5347,7 @@
                     <a:p>
                       <a:pPr algn="l"/>
                       <a:r>
-                        <a:rPr sz="1150" b="0">
+                        <a:rPr sz="1100" b="0">
                           <a:solidFill>
                             <a:srgbClr val="16213E"/>
                           </a:solidFill>
@@ -5355,7 +5357,7 @@
                       </a:r>
                     </a:p>
                   </a:txBody>
-                  <a:tcPr marL="64008" marR="64008" marT="18288" marB="18288" anchor="ctr">
+                  <a:tcPr marL="54864" marR="54864" marT="18288" marB="18288" anchor="ctr">
                     <a:solidFill>
                       <a:srgbClr val="E9EBEF"/>
                     </a:solidFill>
@@ -5368,7 +5370,7 @@
                     <a:p>
                       <a:pPr algn="l"/>
                       <a:r>
-                        <a:rPr sz="1150" b="0">
+                        <a:rPr sz="1100" b="0">
                           <a:solidFill>
                             <a:srgbClr val="16213E"/>
                           </a:solidFill>
@@ -5378,7 +5380,7 @@
                       </a:r>
                     </a:p>
                   </a:txBody>
-                  <a:tcPr marL="64008" marR="64008" marT="18288" marB="18288" anchor="ctr">
+                  <a:tcPr marL="54864" marR="54864" marT="18288" marB="18288" anchor="ctr">
                     <a:solidFill>
                       <a:srgbClr val="E9EBEF"/>
                     </a:solidFill>
@@ -5391,17 +5393,17 @@
                     <a:p>
                       <a:pPr algn="l"/>
                       <a:r>
-                        <a:rPr sz="1150" b="0">
-                          <a:solidFill>
-                            <a:srgbClr val="16213E"/>
-                          </a:solidFill>
-                          <a:latin typeface="Microsoft YaHei"/>
-                        </a:rPr>
-                        <a:t>API/开源</a:t>
-                      </a:r>
-                    </a:p>
-                  </a:txBody>
-                  <a:tcPr marL="64008" marR="64008" marT="18288" marB="18288" anchor="ctr">
+                        <a:rPr sz="1100" b="0">
+                          <a:solidFill>
+                            <a:srgbClr val="16213E"/>
+                          </a:solidFill>
+                          <a:latin typeface="Microsoft YaHei"/>
+                        </a:rPr>
+                        <a:t>未上市</a:t>
+                      </a:r>
+                    </a:p>
+                  </a:txBody>
+                  <a:tcPr marL="54864" marR="54864" marT="18288" marB="18288" anchor="ctr">
                     <a:solidFill>
                       <a:srgbClr val="E9EBEF"/>
                     </a:solidFill>
@@ -5414,7 +5416,7 @@
                     <a:p>
                       <a:pPr algn="l"/>
                       <a:r>
-                        <a:rPr sz="1150" b="0">
+                        <a:rPr sz="1100" b="0">
                           <a:solidFill>
                             <a:srgbClr val="16213E"/>
                           </a:solidFill>
@@ -5424,22 +5426,22 @@
                       </a:r>
                     </a:p>
                   </a:txBody>
-                  <a:tcPr marL="64008" marR="64008" marT="18288" marB="18288" anchor="ctr">
+                  <a:tcPr marL="54864" marR="54864" marT="18288" marB="18288" anchor="ctr">
                     <a:solidFill>
                       <a:srgbClr val="E9EBEF"/>
                     </a:solidFill>
                   </a:tcPr>
                 </a:tc>
               </a:tr>
-              <a:tr h="655320">
-                <a:tc>
-                  <a:txBody>
-                    <a:bodyPr wrap="square"/>
-                    <a:lstStyle/>
-                    <a:p>
-                      <a:pPr algn="l"/>
-                      <a:r>
-                        <a:rPr sz="1150" b="0">
+              <a:tr h="587828">
+                <a:tc>
+                  <a:txBody>
+                    <a:bodyPr wrap="square"/>
+                    <a:lstStyle/>
+                    <a:p>
+                      <a:pPr algn="l"/>
+                      <a:r>
+                        <a:rPr sz="1100" b="0">
                           <a:solidFill>
                             <a:srgbClr val="16213E"/>
                           </a:solidFill>
@@ -5449,7 +5451,7 @@
                       </a:r>
                     </a:p>
                   </a:txBody>
-                  <a:tcPr marL="64008" marR="64008" marT="18288" marB="18288" anchor="ctr">
+                  <a:tcPr marL="54864" marR="54864" marT="18288" marB="18288" anchor="ctr">
                     <a:solidFill>
                       <a:srgbClr val="FFFFFF"/>
                     </a:solidFill>
@@ -5462,17 +5464,17 @@
                     <a:p>
                       <a:pPr algn="l"/>
                       <a:r>
-                        <a:rPr sz="1150" b="0">
-                          <a:solidFill>
-                            <a:srgbClr val="16213E"/>
-                          </a:solidFill>
-                          <a:latin typeface="Microsoft YaHei"/>
-                        </a:rPr>
-                        <a:t>To B，已港股IPO</a:t>
-                      </a:r>
-                    </a:p>
-                  </a:txBody>
-                  <a:tcPr marL="64008" marR="64008" marT="18288" marB="18288" anchor="ctr">
+                        <a:rPr sz="1100" b="0">
+                          <a:solidFill>
+                            <a:srgbClr val="16213E"/>
+                          </a:solidFill>
+                          <a:latin typeface="Microsoft YaHei"/>
+                        </a:rPr>
+                        <a:t>To B 本地化部署(84%)</a:t>
+                      </a:r>
+                    </a:p>
+                  </a:txBody>
+                  <a:tcPr marL="54864" marR="54864" marT="18288" marB="18288" anchor="ctr">
                     <a:solidFill>
                       <a:srgbClr val="FFFFFF"/>
                     </a:solidFill>
@@ -5485,7 +5487,7 @@
                     <a:p>
                       <a:pPr algn="l"/>
                       <a:r>
-                        <a:rPr sz="1150" b="0">
+                        <a:rPr sz="1100" b="0">
                           <a:solidFill>
                             <a:srgbClr val="16213E"/>
                           </a:solidFill>
@@ -5495,7 +5497,7 @@
                       </a:r>
                     </a:p>
                   </a:txBody>
-                  <a:tcPr marL="64008" marR="64008" marT="18288" marB="18288" anchor="ctr">
+                  <a:tcPr marL="54864" marR="54864" marT="18288" marB="18288" anchor="ctr">
                     <a:solidFill>
                       <a:srgbClr val="FFFFFF"/>
                     </a:solidFill>
@@ -5508,17 +5510,17 @@
                     <a:p>
                       <a:pPr algn="l"/>
                       <a:r>
-                        <a:rPr sz="1150" b="0">
-                          <a:solidFill>
-                            <a:srgbClr val="16213E"/>
-                          </a:solidFill>
-                          <a:latin typeface="Microsoft YaHei"/>
-                        </a:rPr>
-                        <a:t>政企/企业</a:t>
-                      </a:r>
-                    </a:p>
-                  </a:txBody>
-                  <a:tcPr marL="64008" marR="64008" marT="18288" marB="18288" anchor="ctr">
+                        <a:rPr sz="1100" b="0">
+                          <a:solidFill>
+                            <a:srgbClr val="16213E"/>
+                          </a:solidFill>
+                          <a:latin typeface="Microsoft YaHei"/>
+                        </a:rPr>
+                        <a:t>通过聆讯,冲第一股</a:t>
+                      </a:r>
+                    </a:p>
+                  </a:txBody>
+                  <a:tcPr marL="54864" marR="54864" marT="18288" marB="18288" anchor="ctr">
                     <a:solidFill>
                       <a:srgbClr val="FFFFFF"/>
                     </a:solidFill>
@@ -5531,7 +5533,7 @@
                     <a:p>
                       <a:pPr algn="l"/>
                       <a:r>
-                        <a:rPr sz="1150" b="0">
+                        <a:rPr sz="1100" b="0">
                           <a:solidFill>
                             <a:srgbClr val="16213E"/>
                           </a:solidFill>
@@ -5541,32 +5543,32 @@
                       </a:r>
                     </a:p>
                   </a:txBody>
-                  <a:tcPr marL="64008" marR="64008" marT="18288" marB="18288" anchor="ctr">
+                  <a:tcPr marL="54864" marR="54864" marT="18288" marB="18288" anchor="ctr">
                     <a:solidFill>
                       <a:srgbClr val="FFFFFF"/>
                     </a:solidFill>
                   </a:tcPr>
                 </a:tc>
               </a:tr>
-              <a:tr h="655320">
-                <a:tc>
-                  <a:txBody>
-                    <a:bodyPr wrap="square"/>
-                    <a:lstStyle/>
-                    <a:p>
-                      <a:pPr algn="l"/>
-                      <a:r>
-                        <a:rPr sz="1150" b="0">
-                          <a:solidFill>
-                            <a:srgbClr val="16213E"/>
-                          </a:solidFill>
-                          <a:latin typeface="Microsoft YaHei"/>
-                        </a:rPr>
-                        <a:t>Kimi(月之暗面)</a:t>
-                      </a:r>
-                    </a:p>
-                  </a:txBody>
-                  <a:tcPr marL="64008" marR="64008" marT="18288" marB="18288" anchor="ctr">
+              <a:tr h="587828">
+                <a:tc>
+                  <a:txBody>
+                    <a:bodyPr wrap="square"/>
+                    <a:lstStyle/>
+                    <a:p>
+                      <a:pPr algn="l"/>
+                      <a:r>
+                        <a:rPr sz="1100" b="0">
+                          <a:solidFill>
+                            <a:srgbClr val="16213E"/>
+                          </a:solidFill>
+                          <a:latin typeface="Microsoft YaHei"/>
+                        </a:rPr>
+                        <a:t>月之暗面(Kimi)</a:t>
+                      </a:r>
+                    </a:p>
+                  </a:txBody>
+                  <a:tcPr marL="54864" marR="54864" marT="18288" marB="18288" anchor="ctr">
                     <a:solidFill>
                       <a:srgbClr val="E9EBEF"/>
                     </a:solidFill>
@@ -5579,17 +5581,17 @@
                     <a:p>
                       <a:pPr algn="l"/>
                       <a:r>
-                        <a:rPr sz="1150" b="0">
-                          <a:solidFill>
-                            <a:srgbClr val="16213E"/>
-                          </a:solidFill>
-                          <a:latin typeface="Microsoft YaHei"/>
-                        </a:rPr>
-                        <a:t>Agent/深度研究，金融学术</a:t>
-                      </a:r>
-                    </a:p>
-                  </a:txBody>
-                  <a:tcPr marL="64008" marR="64008" marT="18288" marB="18288" anchor="ctr">
+                        <a:rPr sz="1100" b="0">
+                          <a:solidFill>
+                            <a:srgbClr val="16213E"/>
+                          </a:solidFill>
+                          <a:latin typeface="Microsoft YaHei"/>
+                        </a:rPr>
+                        <a:t>C端+Agent/深度研究</a:t>
+                      </a:r>
+                    </a:p>
+                  </a:txBody>
+                  <a:tcPr marL="54864" marR="54864" marT="18288" marB="18288" anchor="ctr">
                     <a:solidFill>
                       <a:srgbClr val="E9EBEF"/>
                     </a:solidFill>
@@ -5602,7 +5604,7 @@
                     <a:p>
                       <a:pPr algn="l"/>
                       <a:r>
-                        <a:rPr sz="1150" b="0">
+                        <a:rPr sz="1100" b="0">
                           <a:solidFill>
                             <a:srgbClr val="16213E"/>
                           </a:solidFill>
@@ -5612,7 +5614,7 @@
                       </a:r>
                     </a:p>
                   </a:txBody>
-                  <a:tcPr marL="64008" marR="64008" marT="18288" marB="18288" anchor="ctr">
+                  <a:tcPr marL="54864" marR="54864" marT="18288" marB="18288" anchor="ctr">
                     <a:solidFill>
                       <a:srgbClr val="E9EBEF"/>
                     </a:solidFill>
@@ -5625,17 +5627,17 @@
                     <a:p>
                       <a:pPr algn="l"/>
                       <a:r>
-                        <a:rPr sz="1150" b="0">
-                          <a:solidFill>
-                            <a:srgbClr val="16213E"/>
-                          </a:solidFill>
-                          <a:latin typeface="Microsoft YaHei"/>
-                        </a:rPr>
-                        <a:t>订阅/Agent</a:t>
-                      </a:r>
-                    </a:p>
-                  </a:txBody>
-                  <a:tcPr marL="64008" marR="64008" marT="18288" marB="18288" anchor="ctr">
+                        <a:rPr sz="1100" b="0">
+                          <a:solidFill>
+                            <a:srgbClr val="16213E"/>
+                          </a:solidFill>
+                          <a:latin typeface="Microsoft YaHei"/>
+                        </a:rPr>
+                        <a:t>未上市(估值飙升)</a:t>
+                      </a:r>
+                    </a:p>
+                  </a:txBody>
+                  <a:tcPr marL="54864" marR="54864" marT="18288" marB="18288" anchor="ctr">
                     <a:solidFill>
                       <a:srgbClr val="E9EBEF"/>
                     </a:solidFill>
@@ -5648,32 +5650,149 @@
                     <a:p>
                       <a:pPr algn="l"/>
                       <a:r>
-                        <a:rPr sz="1150" b="0">
-                          <a:solidFill>
-                            <a:srgbClr val="16213E"/>
-                          </a:solidFill>
-                          <a:latin typeface="Microsoft YaHei"/>
-                        </a:rPr>
-                        <a:t>同为六小龙，争“下一个DeepSeek”</a:t>
-                      </a:r>
-                    </a:p>
-                  </a:txBody>
-                  <a:tcPr marL="64008" marR="64008" marT="18288" marB="18288" anchor="ctr">
+                        <a:rPr sz="1100" b="0">
+                          <a:solidFill>
+                            <a:srgbClr val="16213E"/>
+                          </a:solidFill>
+                          <a:latin typeface="Microsoft YaHei"/>
+                        </a:rPr>
+                        <a:t>争“下一个DeepSeek”，Agent 卡位</a:t>
+                      </a:r>
+                    </a:p>
+                  </a:txBody>
+                  <a:tcPr marL="54864" marR="54864" marT="18288" marB="18288" anchor="ctr">
                     <a:solidFill>
                       <a:srgbClr val="E9EBEF"/>
                     </a:solidFill>
                   </a:tcPr>
                 </a:tc>
               </a:tr>
-              <a:tr h="655320">
-                <a:tc>
-                  <a:txBody>
-                    <a:bodyPr wrap="square"/>
-                    <a:lstStyle/>
-                    <a:p>
-                      <a:pPr algn="l"/>
-                      <a:r>
-                        <a:rPr sz="1150" b="0">
+              <a:tr h="587828">
+                <a:tc>
+                  <a:txBody>
+                    <a:bodyPr wrap="square"/>
+                    <a:lstStyle/>
+                    <a:p>
+                      <a:pPr algn="l"/>
+                      <a:r>
+                        <a:rPr sz="1100" b="0">
+                          <a:solidFill>
+                            <a:srgbClr val="16213E"/>
+                          </a:solidFill>
+                          <a:latin typeface="Microsoft YaHei"/>
+                        </a:rPr>
+                        <a:t>阶跃星辰</a:t>
+                      </a:r>
+                    </a:p>
+                  </a:txBody>
+                  <a:tcPr marL="54864" marR="54864" marT="18288" marB="18288" anchor="ctr">
+                    <a:solidFill>
+                      <a:srgbClr val="FFFFFF"/>
+                    </a:solidFill>
+                  </a:tcPr>
+                </a:tc>
+                <a:tc>
+                  <a:txBody>
+                    <a:bodyPr wrap="square"/>
+                    <a:lstStyle/>
+                    <a:p>
+                      <a:pPr algn="l"/>
+                      <a:r>
+                        <a:rPr sz="1100" b="0">
+                          <a:solidFill>
+                            <a:srgbClr val="16213E"/>
+                          </a:solidFill>
+                          <a:latin typeface="Microsoft YaHei"/>
+                        </a:rPr>
+                        <a:t>多模态 + AI 终端</a:t>
+                      </a:r>
+                    </a:p>
+                  </a:txBody>
+                  <a:tcPr marL="54864" marR="54864" marT="18288" marB="18288" anchor="ctr">
+                    <a:solidFill>
+                      <a:srgbClr val="FFFFFF"/>
+                    </a:solidFill>
+                  </a:tcPr>
+                </a:tc>
+                <a:tc>
+                  <a:txBody>
+                    <a:bodyPr wrap="square"/>
+                    <a:lstStyle/>
+                    <a:p>
+                      <a:pPr algn="l"/>
+                      <a:r>
+                        <a:rPr sz="1100" b="0">
+                          <a:solidFill>
+                            <a:srgbClr val="16213E"/>
+                          </a:solidFill>
+                          <a:latin typeface="Microsoft YaHei"/>
+                        </a:rPr>
+                        <a:t>偏 B/终端</a:t>
+                      </a:r>
+                    </a:p>
+                  </a:txBody>
+                  <a:tcPr marL="54864" marR="54864" marT="18288" marB="18288" anchor="ctr">
+                    <a:solidFill>
+                      <a:srgbClr val="FFFFFF"/>
+                    </a:solidFill>
+                  </a:tcPr>
+                </a:tc>
+                <a:tc>
+                  <a:txBody>
+                    <a:bodyPr wrap="square"/>
+                    <a:lstStyle/>
+                    <a:p>
+                      <a:pPr algn="l"/>
+                      <a:r>
+                        <a:rPr sz="1100" b="0">
+                          <a:solidFill>
+                            <a:srgbClr val="16213E"/>
+                          </a:solidFill>
+                          <a:latin typeface="Microsoft YaHei"/>
+                        </a:rPr>
+                        <a:t>计划年内港股</a:t>
+                      </a:r>
+                    </a:p>
+                  </a:txBody>
+                  <a:tcPr marL="54864" marR="54864" marT="18288" marB="18288" anchor="ctr">
+                    <a:solidFill>
+                      <a:srgbClr val="FFFFFF"/>
+                    </a:solidFill>
+                  </a:tcPr>
+                </a:tc>
+                <a:tc>
+                  <a:txBody>
+                    <a:bodyPr wrap="square"/>
+                    <a:lstStyle/>
+                    <a:p>
+                      <a:pPr algn="l"/>
+                      <a:r>
+                        <a:rPr sz="1100" b="0">
+                          <a:solidFill>
+                            <a:srgbClr val="16213E"/>
+                          </a:solidFill>
+                          <a:latin typeface="Microsoft YaHei"/>
+                        </a:rPr>
+                        <a:t>多模态正面对手，吉利系资本</a:t>
+                      </a:r>
+                    </a:p>
+                  </a:txBody>
+                  <a:tcPr marL="54864" marR="54864" marT="18288" marB="18288" anchor="ctr">
+                    <a:solidFill>
+                      <a:srgbClr val="FFFFFF"/>
+                    </a:solidFill>
+                  </a:tcPr>
+                </a:tc>
+              </a:tr>
+              <a:tr h="587832">
+                <a:tc>
+                  <a:txBody>
+                    <a:bodyPr wrap="square"/>
+                    <a:lstStyle/>
+                    <a:p>
+                      <a:pPr algn="l"/>
+                      <a:r>
+                        <a:rPr sz="1100" b="0">
                           <a:solidFill>
                             <a:srgbClr val="16213E"/>
                           </a:solidFill>
@@ -5683,20 +5802,20 @@
                       </a:r>
                     </a:p>
                   </a:txBody>
-                  <a:tcPr marL="64008" marR="64008" marT="18288" marB="18288" anchor="ctr">
-                    <a:solidFill>
-                      <a:srgbClr val="FFFFFF"/>
-                    </a:solidFill>
-                  </a:tcPr>
-                </a:tc>
-                <a:tc>
-                  <a:txBody>
-                    <a:bodyPr wrap="square"/>
-                    <a:lstStyle/>
-                    <a:p>
-                      <a:pPr algn="l"/>
-                      <a:r>
-                        <a:rPr sz="1150" b="0">
+                  <a:tcPr marL="54864" marR="54864" marT="18288" marB="18288" anchor="ctr">
+                    <a:solidFill>
+                      <a:srgbClr val="E9EBEF"/>
+                    </a:solidFill>
+                  </a:tcPr>
+                </a:tc>
+                <a:tc>
+                  <a:txBody>
+                    <a:bodyPr wrap="square"/>
+                    <a:lstStyle/>
+                    <a:p>
+                      <a:pPr algn="l"/>
+                      <a:r>
+                        <a:rPr sz="1100" b="0">
                           <a:solidFill>
                             <a:srgbClr val="16213E"/>
                           </a:solidFill>
@@ -5706,20 +5825,20 @@
                       </a:r>
                     </a:p>
                   </a:txBody>
-                  <a:tcPr marL="64008" marR="64008" marT="18288" marB="18288" anchor="ctr">
-                    <a:solidFill>
-                      <a:srgbClr val="FFFFFF"/>
-                    </a:solidFill>
-                  </a:tcPr>
-                </a:tc>
-                <a:tc>
-                  <a:txBody>
-                    <a:bodyPr wrap="square"/>
-                    <a:lstStyle/>
-                    <a:p>
-                      <a:pPr algn="l"/>
-                      <a:r>
-                        <a:rPr sz="1150" b="0">
+                  <a:tcPr marL="54864" marR="54864" marT="18288" marB="18288" anchor="ctr">
+                    <a:solidFill>
+                      <a:srgbClr val="E9EBEF"/>
+                    </a:solidFill>
+                  </a:tcPr>
+                </a:tc>
+                <a:tc>
+                  <a:txBody>
+                    <a:bodyPr wrap="square"/>
+                    <a:lstStyle/>
+                    <a:p>
+                      <a:pPr algn="l"/>
+                      <a:r>
+                        <a:rPr sz="1100" b="0">
                           <a:solidFill>
                             <a:srgbClr val="16213E"/>
                           </a:solidFill>
@@ -5729,43 +5848,43 @@
                       </a:r>
                     </a:p>
                   </a:txBody>
-                  <a:tcPr marL="64008" marR="64008" marT="18288" marB="18288" anchor="ctr">
-                    <a:solidFill>
-                      <a:srgbClr val="FFFFFF"/>
-                    </a:solidFill>
-                  </a:tcPr>
-                </a:tc>
-                <a:tc>
-                  <a:txBody>
-                    <a:bodyPr wrap="square"/>
-                    <a:lstStyle/>
-                    <a:p>
-                      <a:pPr algn="l"/>
-                      <a:r>
-                        <a:rPr sz="1150" b="0">
-                          <a:solidFill>
-                            <a:srgbClr val="16213E"/>
-                          </a:solidFill>
-                          <a:latin typeface="Microsoft YaHei"/>
-                        </a:rPr>
-                        <a:t>阿里云绑定</a:t>
-                      </a:r>
-                    </a:p>
-                  </a:txBody>
-                  <a:tcPr marL="64008" marR="64008" marT="18288" marB="18288" anchor="ctr">
-                    <a:solidFill>
-                      <a:srgbClr val="FFFFFF"/>
-                    </a:solidFill>
-                  </a:tcPr>
-                </a:tc>
-                <a:tc>
-                  <a:txBody>
-                    <a:bodyPr wrap="square"/>
-                    <a:lstStyle/>
-                    <a:p>
-                      <a:pPr algn="l"/>
-                      <a:r>
-                        <a:rPr sz="1150" b="0">
+                  <a:tcPr marL="54864" marR="54864" marT="18288" marB="18288" anchor="ctr">
+                    <a:solidFill>
+                      <a:srgbClr val="E9EBEF"/>
+                    </a:solidFill>
+                  </a:tcPr>
+                </a:tc>
+                <a:tc>
+                  <a:txBody>
+                    <a:bodyPr wrap="square"/>
+                    <a:lstStyle/>
+                    <a:p>
+                      <a:pPr algn="l"/>
+                      <a:r>
+                        <a:rPr sz="1100" b="0">
+                          <a:solidFill>
+                            <a:srgbClr val="16213E"/>
+                          </a:solidFill>
+                          <a:latin typeface="Microsoft YaHei"/>
+                        </a:rPr>
+                        <a:t>大厂自有</a:t>
+                      </a:r>
+                    </a:p>
+                  </a:txBody>
+                  <a:tcPr marL="54864" marR="54864" marT="18288" marB="18288" anchor="ctr">
+                    <a:solidFill>
+                      <a:srgbClr val="E9EBEF"/>
+                    </a:solidFill>
+                  </a:tcPr>
+                </a:tc>
+                <a:tc>
+                  <a:txBody>
+                    <a:bodyPr wrap="square"/>
+                    <a:lstStyle/>
+                    <a:p>
+                      <a:pPr algn="l"/>
+                      <a:r>
+                        <a:rPr sz="1100" b="0">
                           <a:solidFill>
                             <a:srgbClr val="16213E"/>
                           </a:solidFill>
@@ -5775,9 +5894,9 @@
                       </a:r>
                     </a:p>
                   </a:txBody>
-                  <a:tcPr marL="64008" marR="64008" marT="18288" marB="18288" anchor="ctr">
-                    <a:solidFill>
-                      <a:srgbClr val="FFFFFF"/>
+                  <a:tcPr marL="54864" marR="54864" marT="18288" marB="18288" anchor="ctr">
+                    <a:solidFill>
+                      <a:srgbClr val="E9EBEF"/>
                     </a:solidFill>
                   </a:tcPr>
                 </a:tc>
@@ -5794,7 +5913,7 @@
         </p:nvSpPr>
         <p:spPr>
           <a:xfrm>
-            <a:off x="457200" y="6437376"/>
+            <a:off x="457200" y="6455664"/>
             <a:ext cx="11338560" cy="365760"/>
           </a:xfrm>
           <a:prstGeom prst="rect">
@@ -5816,7 +5935,7 @@
                 </a:solidFill>
                 <a:latin typeface="Microsoft YaHei"/>
               </a:rPr>
-              <a:t>来源：人人都是产品经理《2026国产大模型选型地图》；财联社；火山引擎社区</a:t>
+              <a:t>来源：各家招股书/融资公告；人人都是产品经理《2026国产大模型选型地图》；财联社</a:t>
             </a:r>
           </a:p>
         </p:txBody>
@@ -5890,7 +6009,7 @@
         </p:nvSpPr>
         <p:spPr>
           <a:xfrm>
-            <a:off x="457200" y="237744"/>
+            <a:off x="457200" y="219456"/>
             <a:ext cx="11338560" cy="914400"/>
           </a:xfrm>
           <a:prstGeom prst="rect">
@@ -5906,7 +6025,7 @@
           <a:p>
             <a:pPr algn="l"/>
             <a:r>
-              <a:rPr sz="2600" b="1">
+              <a:rPr sz="2500" b="1">
                 <a:solidFill>
                   <a:srgbClr val="16213E"/>
                 </a:solidFill>
@@ -5918,7 +6037,7 @@
           <a:p>
             <a:pPr algn="l"/>
             <a:r>
-              <a:rPr sz="1400" b="0">
+              <a:rPr sz="1350" b="0">
                 <a:solidFill>
                   <a:srgbClr val="6B707B"/>
                 </a:solidFill>
@@ -5937,8 +6056,8 @@
         </p:nvSpPr>
         <p:spPr>
           <a:xfrm>
-            <a:off x="10058400" y="274320"/>
-            <a:ext cx="1828800" cy="411480"/>
+            <a:off x="10104120" y="274320"/>
+            <a:ext cx="1783080" cy="384048"/>
           </a:xfrm>
           <a:prstGeom prst="rect">
             <a:avLst/>
@@ -6023,7 +6142,7 @@
           <a:p>
             <a:pPr algn="l">
               <a:spcAft>
-                <a:spcPts val="800"/>
+                <a:spcPts val="700"/>
               </a:spcAft>
             </a:pPr>
             <a:r>
@@ -6039,7 +6158,7 @@
           <a:p>
             <a:pPr algn="l">
               <a:spcAft>
-                <a:spcPts val="800"/>
+                <a:spcPts val="700"/>
               </a:spcAft>
             </a:pPr>
             <a:r>
@@ -6055,7 +6174,7 @@
           <a:p>
             <a:pPr algn="l">
               <a:spcAft>
-                <a:spcPts val="800"/>
+                <a:spcPts val="700"/>
               </a:spcAft>
             </a:pPr>
             <a:r>
@@ -6071,7 +6190,7 @@
           <a:p>
             <a:pPr algn="l">
               <a:spcAft>
-                <a:spcPts val="800"/>
+                <a:spcPts val="700"/>
               </a:spcAft>
             </a:pPr>
             <a:r>
@@ -6081,7 +6200,23 @@
                 </a:solidFill>
                 <a:latin typeface="Microsoft YaHei"/>
               </a:rPr>
-              <a:t>• 各家形状差异大 → 不是同质竞争，而是分赛道卡位</a:t>
+              <a:t>• 智谱内收，强在多模态/技术、弱在出海与盈利</a:t>
+            </a:r>
+          </a:p>
+          <a:p>
+            <a:pPr algn="l">
+              <a:spcAft>
+                <a:spcPts val="700"/>
+              </a:spcAft>
+            </a:pPr>
+            <a:r>
+              <a:rPr sz="1400" b="0">
+                <a:solidFill>
+                  <a:srgbClr val="6B707B"/>
+                </a:solidFill>
+                <a:latin typeface="Microsoft YaHei"/>
+              </a:rPr>
+              <a:t>• 各家形状差异大 → 分赛道卡位，而非同质竞争</a:t>
             </a:r>
           </a:p>
         </p:txBody>
@@ -6094,7 +6229,7 @@
         </p:nvSpPr>
         <p:spPr>
           <a:xfrm>
-            <a:off x="457200" y="6437376"/>
+            <a:off x="457200" y="6455664"/>
             <a:ext cx="11338560" cy="365760"/>
           </a:xfrm>
           <a:prstGeom prst="rect">
@@ -6190,7 +6325,7 @@
         </p:nvSpPr>
         <p:spPr>
           <a:xfrm>
-            <a:off x="457200" y="237744"/>
+            <a:off x="457200" y="219456"/>
             <a:ext cx="11338560" cy="914400"/>
           </a:xfrm>
           <a:prstGeom prst="rect">
@@ -6206,13 +6341,13 @@
           <a:p>
             <a:pPr algn="l"/>
             <a:r>
-              <a:rPr sz="2600" b="1">
+              <a:rPr sz="2500" b="1">
                 <a:solidFill>
                   <a:srgbClr val="16213E"/>
                 </a:solidFill>
                 <a:latin typeface="Microsoft YaHei"/>
               </a:rPr>
-              <a:t>综合：护城河在“多模态+出海产品力”，软肋在“流量+盈利”</a:t>
+              <a:t>【竞争格局】“六小龙”横评：营收、估值、模式与 IPO 路径</a:t>
             </a:r>
           </a:p>
         </p:txBody>
@@ -6225,14 +6360,14 @@
         </p:nvSpPr>
         <p:spPr>
           <a:xfrm>
-            <a:off x="457200" y="1600200"/>
-            <a:ext cx="5486400" cy="457200"/>
+            <a:off x="10104120" y="274320"/>
+            <a:ext cx="1783080" cy="384048"/>
           </a:xfrm>
           <a:prstGeom prst="rect">
             <a:avLst/>
           </a:prstGeom>
           <a:solidFill>
-            <a:srgbClr val="16213E"/>
+            <a:srgbClr val="5D6D9E"/>
           </a:solidFill>
           <a:ln>
             <a:noFill/>
@@ -6258,27 +6393,757 @@
           <a:p>
             <a:pPr algn="ctr"/>
             <a:r>
-              <a:rPr sz="1500" b="1">
+              <a:rPr sz="1200" b="1">
                 <a:solidFill>
                   <a:srgbClr val="FFFFFF"/>
                 </a:solidFill>
                 <a:latin typeface="Microsoft YaHei"/>
               </a:rPr>
-              <a:t>护城河（可持续优势）</a:t>
+              <a:t>③ 竞争格局</a:t>
             </a:r>
           </a:p>
         </p:txBody>
       </p:sp>
+      <p:graphicFrame>
+        <p:nvGraphicFramePr>
+          <p:cNvPr id="5" name="Table 4"/>
+          <p:cNvGraphicFramePr>
+            <a:graphicFrameLocks noGrp="1"/>
+          </p:cNvGraphicFramePr>
+          <p:nvPr/>
+        </p:nvGraphicFramePr>
+        <p:xfrm>
+          <a:off x="365760" y="1645920"/>
+          <a:ext cx="13304520" cy="3383280"/>
+        </p:xfrm>
+        <a:graphic>
+          <a:graphicData uri="http://schemas.openxmlformats.org/drawingml/2006/table">
+            <a:tbl>
+              <a:tblPr firstRow="1" bandRow="1">
+                <a:tableStyleId>{5C22544A-7EE6-4342-B048-85BDC9FD1C3A}</a:tableStyleId>
+              </a:tblPr>
+              <a:tblGrid>
+                <a:gridCol w="1828800"/>
+                <a:gridCol w="2468880"/>
+                <a:gridCol w="2468880"/>
+                <a:gridCol w="2240280"/>
+                <a:gridCol w="1828800"/>
+                <a:gridCol w="2468880"/>
+              </a:tblGrid>
+              <a:tr h="676656">
+                <a:tc>
+                  <a:txBody>
+                    <a:bodyPr wrap="square"/>
+                    <a:lstStyle/>
+                    <a:p>
+                      <a:pPr algn="l"/>
+                      <a:r>
+                        <a:rPr sz="1050" b="1">
+                          <a:solidFill>
+                            <a:srgbClr val="FFFFFF"/>
+                          </a:solidFill>
+                          <a:latin typeface="Microsoft YaHei"/>
+                        </a:rPr>
+                        <a:t>公司</a:t>
+                      </a:r>
+                    </a:p>
+                  </a:txBody>
+                  <a:tcPr marL="54864" marR="54864" marT="18288" marB="18288" anchor="ctr">
+                    <a:solidFill>
+                      <a:srgbClr val="16213E"/>
+                    </a:solidFill>
+                  </a:tcPr>
+                </a:tc>
+                <a:tc>
+                  <a:txBody>
+                    <a:bodyPr wrap="square"/>
+                    <a:lstStyle/>
+                    <a:p>
+                      <a:pPr algn="l"/>
+                      <a:r>
+                        <a:rPr sz="1050" b="1">
+                          <a:solidFill>
+                            <a:srgbClr val="FFFFFF"/>
+                          </a:solidFill>
+                          <a:latin typeface="Microsoft YaHei"/>
+                        </a:rPr>
+                        <a:t>模式</a:t>
+                      </a:r>
+                    </a:p>
+                  </a:txBody>
+                  <a:tcPr marL="54864" marR="54864" marT="18288" marB="18288" anchor="ctr">
+                    <a:solidFill>
+                      <a:srgbClr val="16213E"/>
+                    </a:solidFill>
+                  </a:tcPr>
+                </a:tc>
+                <a:tc>
+                  <a:txBody>
+                    <a:bodyPr wrap="square"/>
+                    <a:lstStyle/>
+                    <a:p>
+                      <a:pPr algn="l"/>
+                      <a:r>
+                        <a:rPr sz="1050" b="1">
+                          <a:solidFill>
+                            <a:srgbClr val="FFFFFF"/>
+                          </a:solidFill>
+                          <a:latin typeface="Microsoft YaHei"/>
+                        </a:rPr>
+                        <a:t>营收</a:t>
+                      </a:r>
+                    </a:p>
+                  </a:txBody>
+                  <a:tcPr marL="54864" marR="54864" marT="18288" marB="18288" anchor="ctr">
+                    <a:solidFill>
+                      <a:srgbClr val="16213E"/>
+                    </a:solidFill>
+                  </a:tcPr>
+                </a:tc>
+                <a:tc>
+                  <a:txBody>
+                    <a:bodyPr wrap="square"/>
+                    <a:lstStyle/>
+                    <a:p>
+                      <a:pPr algn="l"/>
+                      <a:r>
+                        <a:rPr sz="1050" b="1">
+                          <a:solidFill>
+                            <a:srgbClr val="FFFFFF"/>
+                          </a:solidFill>
+                          <a:latin typeface="Microsoft YaHei"/>
+                        </a:rPr>
+                        <a:t>最新估值</a:t>
+                      </a:r>
+                    </a:p>
+                  </a:txBody>
+                  <a:tcPr marL="54864" marR="54864" marT="18288" marB="18288" anchor="ctr">
+                    <a:solidFill>
+                      <a:srgbClr val="16213E"/>
+                    </a:solidFill>
+                  </a:tcPr>
+                </a:tc>
+                <a:tc>
+                  <a:txBody>
+                    <a:bodyPr wrap="square"/>
+                    <a:lstStyle/>
+                    <a:p>
+                      <a:pPr algn="l"/>
+                      <a:r>
+                        <a:rPr sz="1050" b="1">
+                          <a:solidFill>
+                            <a:srgbClr val="FFFFFF"/>
+                          </a:solidFill>
+                          <a:latin typeface="Microsoft YaHei"/>
+                        </a:rPr>
+                        <a:t>IPO 状态</a:t>
+                      </a:r>
+                    </a:p>
+                  </a:txBody>
+                  <a:tcPr marL="54864" marR="54864" marT="18288" marB="18288" anchor="ctr">
+                    <a:solidFill>
+                      <a:srgbClr val="16213E"/>
+                    </a:solidFill>
+                  </a:tcPr>
+                </a:tc>
+                <a:tc>
+                  <a:txBody>
+                    <a:bodyPr wrap="square"/>
+                    <a:lstStyle/>
+                    <a:p>
+                      <a:pPr algn="l"/>
+                      <a:r>
+                        <a:rPr sz="1050" b="1">
+                          <a:solidFill>
+                            <a:srgbClr val="FFFFFF"/>
+                          </a:solidFill>
+                          <a:latin typeface="Microsoft YaHei"/>
+                        </a:rPr>
+                        <a:t>差异化标签</a:t>
+                      </a:r>
+                    </a:p>
+                  </a:txBody>
+                  <a:tcPr marL="54864" marR="54864" marT="18288" marB="18288" anchor="ctr">
+                    <a:solidFill>
+                      <a:srgbClr val="16213E"/>
+                    </a:solidFill>
+                  </a:tcPr>
+                </a:tc>
+              </a:tr>
+              <a:tr h="676656">
+                <a:tc>
+                  <a:txBody>
+                    <a:bodyPr wrap="square"/>
+                    <a:lstStyle/>
+                    <a:p>
+                      <a:pPr algn="l"/>
+                      <a:r>
+                        <a:rPr sz="1050" b="0">
+                          <a:solidFill>
+                            <a:srgbClr val="16213E"/>
+                          </a:solidFill>
+                          <a:latin typeface="Microsoft YaHei"/>
+                        </a:rPr>
+                        <a:t>智谱 AI</a:t>
+                      </a:r>
+                    </a:p>
+                  </a:txBody>
+                  <a:tcPr marL="54864" marR="54864" marT="18288" marB="18288" anchor="ctr">
+                    <a:solidFill>
+                      <a:srgbClr val="FFFFFF"/>
+                    </a:solidFill>
+                  </a:tcPr>
+                </a:tc>
+                <a:tc>
+                  <a:txBody>
+                    <a:bodyPr wrap="square"/>
+                    <a:lstStyle/>
+                    <a:p>
+                      <a:pPr algn="l"/>
+                      <a:r>
+                        <a:rPr sz="1050" b="0">
+                          <a:solidFill>
+                            <a:srgbClr val="16213E"/>
+                          </a:solidFill>
+                          <a:latin typeface="Microsoft YaHei"/>
+                        </a:rPr>
+                        <a:t>To B 本地化(84%)</a:t>
+                      </a:r>
+                    </a:p>
+                  </a:txBody>
+                  <a:tcPr marL="54864" marR="54864" marT="18288" marB="18288" anchor="ctr">
+                    <a:solidFill>
+                      <a:srgbClr val="FFFFFF"/>
+                    </a:solidFill>
+                  </a:tcPr>
+                </a:tc>
+                <a:tc>
+                  <a:txBody>
+                    <a:bodyPr wrap="square"/>
+                    <a:lstStyle/>
+                    <a:p>
+                      <a:pPr algn="l"/>
+                      <a:r>
+                        <a:rPr sz="1050" b="0">
+                          <a:solidFill>
+                            <a:srgbClr val="16213E"/>
+                          </a:solidFill>
+                          <a:latin typeface="Microsoft YaHei"/>
+                        </a:rPr>
+                        <a:t>¥3.12亿 (24A)</a:t>
+                      </a:r>
+                    </a:p>
+                  </a:txBody>
+                  <a:tcPr marL="54864" marR="54864" marT="18288" marB="18288" anchor="ctr">
+                    <a:solidFill>
+                      <a:srgbClr val="FFFFFF"/>
+                    </a:solidFill>
+                  </a:tcPr>
+                </a:tc>
+                <a:tc>
+                  <a:txBody>
+                    <a:bodyPr wrap="square"/>
+                    <a:lstStyle/>
+                    <a:p>
+                      <a:pPr algn="l"/>
+                      <a:r>
+                        <a:rPr sz="1050" b="0">
+                          <a:solidFill>
+                            <a:srgbClr val="16213E"/>
+                          </a:solidFill>
+                          <a:latin typeface="Microsoft YaHei"/>
+                        </a:rPr>
+                        <a:t>≈¥244亿 (~$3.4B)</a:t>
+                      </a:r>
+                    </a:p>
+                  </a:txBody>
+                  <a:tcPr marL="54864" marR="54864" marT="18288" marB="18288" anchor="ctr">
+                    <a:solidFill>
+                      <a:srgbClr val="FFFFFF"/>
+                    </a:solidFill>
+                  </a:tcPr>
+                </a:tc>
+                <a:tc>
+                  <a:txBody>
+                    <a:bodyPr wrap="square"/>
+                    <a:lstStyle/>
+                    <a:p>
+                      <a:pPr algn="l"/>
+                      <a:r>
+                        <a:rPr sz="1050" b="0">
+                          <a:solidFill>
+                            <a:srgbClr val="16213E"/>
+                          </a:solidFill>
+                          <a:latin typeface="Microsoft YaHei"/>
+                        </a:rPr>
+                        <a:t>通过聆讯,冲第一股</a:t>
+                      </a:r>
+                    </a:p>
+                  </a:txBody>
+                  <a:tcPr marL="54864" marR="54864" marT="18288" marB="18288" anchor="ctr">
+                    <a:solidFill>
+                      <a:srgbClr val="FFFFFF"/>
+                    </a:solidFill>
+                  </a:tcPr>
+                </a:tc>
+                <a:tc>
+                  <a:txBody>
+                    <a:bodyPr wrap="square"/>
+                    <a:lstStyle/>
+                    <a:p>
+                      <a:pPr algn="l"/>
+                      <a:r>
+                        <a:rPr sz="1050" b="0">
+                          <a:solidFill>
+                            <a:srgbClr val="16213E"/>
+                          </a:solidFill>
+                          <a:latin typeface="Microsoft YaHei"/>
+                        </a:rPr>
+                        <a:t>中国版OpenAI/政企</a:t>
+                      </a:r>
+                    </a:p>
+                  </a:txBody>
+                  <a:tcPr marL="54864" marR="54864" marT="18288" marB="18288" anchor="ctr">
+                    <a:solidFill>
+                      <a:srgbClr val="FFFFFF"/>
+                    </a:solidFill>
+                  </a:tcPr>
+                </a:tc>
+              </a:tr>
+              <a:tr h="676656">
+                <a:tc>
+                  <a:txBody>
+                    <a:bodyPr wrap="square"/>
+                    <a:lstStyle/>
+                    <a:p>
+                      <a:pPr algn="l"/>
+                      <a:r>
+                        <a:rPr sz="1050" b="0">
+                          <a:solidFill>
+                            <a:srgbClr val="16213E"/>
+                          </a:solidFill>
+                          <a:latin typeface="Microsoft YaHei"/>
+                        </a:rPr>
+                        <a:t>MiniMax</a:t>
+                      </a:r>
+                    </a:p>
+                  </a:txBody>
+                  <a:tcPr marL="54864" marR="54864" marT="18288" marB="18288" anchor="ctr">
+                    <a:solidFill>
+                      <a:srgbClr val="E9EBEF"/>
+                    </a:solidFill>
+                  </a:tcPr>
+                </a:tc>
+                <a:tc>
+                  <a:txBody>
+                    <a:bodyPr wrap="square"/>
+                    <a:lstStyle/>
+                    <a:p>
+                      <a:pPr algn="l"/>
+                      <a:r>
+                        <a:rPr sz="1050" b="0">
+                          <a:solidFill>
+                            <a:srgbClr val="16213E"/>
+                          </a:solidFill>
+                          <a:latin typeface="Microsoft YaHei"/>
+                        </a:rPr>
+                        <a:t>To C 出海(海外73%)</a:t>
+                      </a:r>
+                    </a:p>
+                  </a:txBody>
+                  <a:tcPr marL="54864" marR="54864" marT="18288" marB="18288" anchor="ctr">
+                    <a:solidFill>
+                      <a:srgbClr val="E9EBEF"/>
+                    </a:solidFill>
+                  </a:tcPr>
+                </a:tc>
+                <a:tc>
+                  <a:txBody>
+                    <a:bodyPr wrap="square"/>
+                    <a:lstStyle/>
+                    <a:p>
+                      <a:pPr algn="l"/>
+                      <a:r>
+                        <a:rPr sz="1050" b="0">
+                          <a:solidFill>
+                            <a:srgbClr val="16213E"/>
+                          </a:solidFill>
+                          <a:latin typeface="Microsoft YaHei"/>
+                        </a:rPr>
+                        <a:t>$79M (~¥5.7亿,25A)</a:t>
+                      </a:r>
+                    </a:p>
+                  </a:txBody>
+                  <a:tcPr marL="54864" marR="54864" marT="18288" marB="18288" anchor="ctr">
+                    <a:solidFill>
+                      <a:srgbClr val="E9EBEF"/>
+                    </a:solidFill>
+                  </a:tcPr>
+                </a:tc>
+                <a:tc>
+                  <a:txBody>
+                    <a:bodyPr wrap="square"/>
+                    <a:lstStyle/>
+                    <a:p>
+                      <a:pPr algn="l"/>
+                      <a:r>
+                        <a:rPr sz="1050" b="0">
+                          <a:solidFill>
+                            <a:srgbClr val="16213E"/>
+                          </a:solidFill>
+                          <a:latin typeface="Microsoft YaHei"/>
+                        </a:rPr>
+                        <a:t>≈US$5.9B</a:t>
+                      </a:r>
+                    </a:p>
+                  </a:txBody>
+                  <a:tcPr marL="54864" marR="54864" marT="18288" marB="18288" anchor="ctr">
+                    <a:solidFill>
+                      <a:srgbClr val="E9EBEF"/>
+                    </a:solidFill>
+                  </a:tcPr>
+                </a:tc>
+                <a:tc>
+                  <a:txBody>
+                    <a:bodyPr wrap="square"/>
+                    <a:lstStyle/>
+                    <a:p>
+                      <a:pPr algn="l"/>
+                      <a:r>
+                        <a:rPr sz="1050" b="0">
+                          <a:solidFill>
+                            <a:srgbClr val="16213E"/>
+                          </a:solidFill>
+                          <a:latin typeface="Microsoft YaHei"/>
+                        </a:rPr>
+                        <a:t>已上市 2026-01</a:t>
+                      </a:r>
+                    </a:p>
+                  </a:txBody>
+                  <a:tcPr marL="54864" marR="54864" marT="18288" marB="18288" anchor="ctr">
+                    <a:solidFill>
+                      <a:srgbClr val="E9EBEF"/>
+                    </a:solidFill>
+                  </a:tcPr>
+                </a:tc>
+                <a:tc>
+                  <a:txBody>
+                    <a:bodyPr wrap="square"/>
+                    <a:lstStyle/>
+                    <a:p>
+                      <a:pPr algn="l"/>
+                      <a:r>
+                        <a:rPr sz="1050" b="0">
+                          <a:solidFill>
+                            <a:srgbClr val="16213E"/>
+                          </a:solidFill>
+                          <a:latin typeface="Microsoft YaHei"/>
+                        </a:rPr>
+                        <a:t>多模态/海螺/Talkie</a:t>
+                      </a:r>
+                    </a:p>
+                  </a:txBody>
+                  <a:tcPr marL="54864" marR="54864" marT="18288" marB="18288" anchor="ctr">
+                    <a:solidFill>
+                      <a:srgbClr val="E9EBEF"/>
+                    </a:solidFill>
+                  </a:tcPr>
+                </a:tc>
+              </a:tr>
+              <a:tr h="676656">
+                <a:tc>
+                  <a:txBody>
+                    <a:bodyPr wrap="square"/>
+                    <a:lstStyle/>
+                    <a:p>
+                      <a:pPr algn="l"/>
+                      <a:r>
+                        <a:rPr sz="1050" b="0">
+                          <a:solidFill>
+                            <a:srgbClr val="16213E"/>
+                          </a:solidFill>
+                          <a:latin typeface="Microsoft YaHei"/>
+                        </a:rPr>
+                        <a:t>月之暗面(Kimi)</a:t>
+                      </a:r>
+                    </a:p>
+                  </a:txBody>
+                  <a:tcPr marL="54864" marR="54864" marT="18288" marB="18288" anchor="ctr">
+                    <a:solidFill>
+                      <a:srgbClr val="FFFFFF"/>
+                    </a:solidFill>
+                  </a:tcPr>
+                </a:tc>
+                <a:tc>
+                  <a:txBody>
+                    <a:bodyPr wrap="square"/>
+                    <a:lstStyle/>
+                    <a:p>
+                      <a:pPr algn="l"/>
+                      <a:r>
+                        <a:rPr sz="1050" b="0">
+                          <a:solidFill>
+                            <a:srgbClr val="16213E"/>
+                          </a:solidFill>
+                          <a:latin typeface="Microsoft YaHei"/>
+                        </a:rPr>
+                        <a:t>C端 + 通用Agent</a:t>
+                      </a:r>
+                    </a:p>
+                  </a:txBody>
+                  <a:tcPr marL="54864" marR="54864" marT="18288" marB="18288" anchor="ctr">
+                    <a:solidFill>
+                      <a:srgbClr val="FFFFFF"/>
+                    </a:solidFill>
+                  </a:tcPr>
+                </a:tc>
+                <a:tc>
+                  <a:txBody>
+                    <a:bodyPr wrap="square"/>
+                    <a:lstStyle/>
+                    <a:p>
+                      <a:pPr algn="l"/>
+                      <a:r>
+                        <a:rPr sz="1050" b="0">
+                          <a:solidFill>
+                            <a:srgbClr val="16213E"/>
+                          </a:solidFill>
+                          <a:latin typeface="Microsoft YaHei"/>
+                        </a:rPr>
+                        <a:t>&gt;¥5亿 (25); 26E&gt;¥20亿</a:t>
+                      </a:r>
+                    </a:p>
+                  </a:txBody>
+                  <a:tcPr marL="54864" marR="54864" marT="18288" marB="18288" anchor="ctr">
+                    <a:solidFill>
+                      <a:srgbClr val="FFFFFF"/>
+                    </a:solidFill>
+                  </a:tcPr>
+                </a:tc>
+                <a:tc>
+                  <a:txBody>
+                    <a:bodyPr wrap="square"/>
+                    <a:lstStyle/>
+                    <a:p>
+                      <a:pPr algn="l"/>
+                      <a:r>
+                        <a:rPr sz="1050" b="0">
+                          <a:solidFill>
+                            <a:srgbClr val="16213E"/>
+                          </a:solidFill>
+                          <a:latin typeface="Microsoft YaHei"/>
+                        </a:rPr>
+                        <a:t>~US$18-30B [报道]</a:t>
+                      </a:r>
+                    </a:p>
+                  </a:txBody>
+                  <a:tcPr marL="54864" marR="54864" marT="18288" marB="18288" anchor="ctr">
+                    <a:solidFill>
+                      <a:srgbClr val="FFFFFF"/>
+                    </a:solidFill>
+                  </a:tcPr>
+                </a:tc>
+                <a:tc>
+                  <a:txBody>
+                    <a:bodyPr wrap="square"/>
+                    <a:lstStyle/>
+                    <a:p>
+                      <a:pPr algn="l"/>
+                      <a:r>
+                        <a:rPr sz="1050" b="0">
+                          <a:solidFill>
+                            <a:srgbClr val="16213E"/>
+                          </a:solidFill>
+                          <a:latin typeface="Microsoft YaHei"/>
+                        </a:rPr>
+                        <a:t>未上市</a:t>
+                      </a:r>
+                    </a:p>
+                  </a:txBody>
+                  <a:tcPr marL="54864" marR="54864" marT="18288" marB="18288" anchor="ctr">
+                    <a:solidFill>
+                      <a:srgbClr val="FFFFFF"/>
+                    </a:solidFill>
+                  </a:tcPr>
+                </a:tc>
+                <a:tc>
+                  <a:txBody>
+                    <a:bodyPr wrap="square"/>
+                    <a:lstStyle/>
+                    <a:p>
+                      <a:pPr algn="l"/>
+                      <a:r>
+                        <a:rPr sz="1050" b="0">
+                          <a:solidFill>
+                            <a:srgbClr val="16213E"/>
+                          </a:solidFill>
+                          <a:latin typeface="Microsoft YaHei"/>
+                        </a:rPr>
+                        <a:t>长文本→Agent/深度研究</a:t>
+                      </a:r>
+                    </a:p>
+                  </a:txBody>
+                  <a:tcPr marL="54864" marR="54864" marT="18288" marB="18288" anchor="ctr">
+                    <a:solidFill>
+                      <a:srgbClr val="FFFFFF"/>
+                    </a:solidFill>
+                  </a:tcPr>
+                </a:tc>
+              </a:tr>
+              <a:tr h="676656">
+                <a:tc>
+                  <a:txBody>
+                    <a:bodyPr wrap="square"/>
+                    <a:lstStyle/>
+                    <a:p>
+                      <a:pPr algn="l"/>
+                      <a:r>
+                        <a:rPr sz="1050" b="0">
+                          <a:solidFill>
+                            <a:srgbClr val="16213E"/>
+                          </a:solidFill>
+                          <a:latin typeface="Microsoft YaHei"/>
+                        </a:rPr>
+                        <a:t>阶跃星辰</a:t>
+                      </a:r>
+                    </a:p>
+                  </a:txBody>
+                  <a:tcPr marL="54864" marR="54864" marT="18288" marB="18288" anchor="ctr">
+                    <a:solidFill>
+                      <a:srgbClr val="E9EBEF"/>
+                    </a:solidFill>
+                  </a:tcPr>
+                </a:tc>
+                <a:tc>
+                  <a:txBody>
+                    <a:bodyPr wrap="square"/>
+                    <a:lstStyle/>
+                    <a:p>
+                      <a:pPr algn="l"/>
+                      <a:r>
+                        <a:rPr sz="1050" b="0">
+                          <a:solidFill>
+                            <a:srgbClr val="16213E"/>
+                          </a:solidFill>
+                          <a:latin typeface="Microsoft YaHei"/>
+                        </a:rPr>
+                        <a:t>多模态 + AI终端</a:t>
+                      </a:r>
+                    </a:p>
+                  </a:txBody>
+                  <a:tcPr marL="54864" marR="54864" marT="18288" marB="18288" anchor="ctr">
+                    <a:solidFill>
+                      <a:srgbClr val="E9EBEF"/>
+                    </a:solidFill>
+                  </a:tcPr>
+                </a:tc>
+                <a:tc>
+                  <a:txBody>
+                    <a:bodyPr wrap="square"/>
+                    <a:lstStyle/>
+                    <a:p>
+                      <a:pPr algn="l"/>
+                      <a:r>
+                        <a:rPr sz="1050" b="0">
+                          <a:solidFill>
+                            <a:srgbClr val="16213E"/>
+                          </a:solidFill>
+                          <a:latin typeface="Microsoft YaHei"/>
+                        </a:rPr>
+                        <a:t>~¥5亿 (25); 26E~¥12亿</a:t>
+                      </a:r>
+                    </a:p>
+                  </a:txBody>
+                  <a:tcPr marL="54864" marR="54864" marT="18288" marB="18288" anchor="ctr">
+                    <a:solidFill>
+                      <a:srgbClr val="E9EBEF"/>
+                    </a:solidFill>
+                  </a:tcPr>
+                </a:tc>
+                <a:tc>
+                  <a:txBody>
+                    <a:bodyPr wrap="square"/>
+                    <a:lstStyle/>
+                    <a:p>
+                      <a:pPr algn="l"/>
+                      <a:r>
+                        <a:rPr sz="1050" b="0">
+                          <a:solidFill>
+                            <a:srgbClr val="16213E"/>
+                          </a:solidFill>
+                          <a:latin typeface="Microsoft YaHei"/>
+                        </a:rPr>
+                        <a:t>~US$3-4B (B+轮后)</a:t>
+                      </a:r>
+                    </a:p>
+                  </a:txBody>
+                  <a:tcPr marL="54864" marR="54864" marT="18288" marB="18288" anchor="ctr">
+                    <a:solidFill>
+                      <a:srgbClr val="E9EBEF"/>
+                    </a:solidFill>
+                  </a:tcPr>
+                </a:tc>
+                <a:tc>
+                  <a:txBody>
+                    <a:bodyPr wrap="square"/>
+                    <a:lstStyle/>
+                    <a:p>
+                      <a:pPr algn="l"/>
+                      <a:r>
+                        <a:rPr sz="1050" b="0">
+                          <a:solidFill>
+                            <a:srgbClr val="16213E"/>
+                          </a:solidFill>
+                          <a:latin typeface="Microsoft YaHei"/>
+                        </a:rPr>
+                        <a:t>计划 2026 港股</a:t>
+                      </a:r>
+                    </a:p>
+                  </a:txBody>
+                  <a:tcPr marL="54864" marR="54864" marT="18288" marB="18288" anchor="ctr">
+                    <a:solidFill>
+                      <a:srgbClr val="E9EBEF"/>
+                    </a:solidFill>
+                  </a:tcPr>
+                </a:tc>
+                <a:tc>
+                  <a:txBody>
+                    <a:bodyPr wrap="square"/>
+                    <a:lstStyle/>
+                    <a:p>
+                      <a:pPr algn="l"/>
+                      <a:r>
+                        <a:rPr sz="1050" b="0">
+                          <a:solidFill>
+                            <a:srgbClr val="16213E"/>
+                          </a:solidFill>
+                          <a:latin typeface="Microsoft YaHei"/>
+                        </a:rPr>
+                        <a:t>Step系/万亿参数/吉利系</a:t>
+                      </a:r>
+                    </a:p>
+                  </a:txBody>
+                  <a:tcPr marL="54864" marR="54864" marT="18288" marB="18288" anchor="ctr">
+                    <a:solidFill>
+                      <a:srgbClr val="E9EBEF"/>
+                    </a:solidFill>
+                  </a:tcPr>
+                </a:tc>
+              </a:tr>
+            </a:tbl>
+          </a:graphicData>
+        </a:graphic>
+      </p:graphicFrame>
       <p:sp>
         <p:nvSpPr>
-          <p:cNvPr id="5" name="TextBox 4"/>
+          <p:cNvPr id="6" name="TextBox 5"/>
           <p:cNvSpPr txBox="1"/>
           <p:nvPr/>
         </p:nvSpPr>
         <p:spPr>
           <a:xfrm>
-            <a:off x="457200" y="2148840"/>
-            <a:ext cx="5486400" cy="3840480"/>
+            <a:off x="365760" y="5212080"/>
+            <a:ext cx="11475720" cy="1188720"/>
           </a:xfrm>
           <a:prstGeom prst="rect">
             <a:avLst/>
@@ -6293,117 +7158,33 @@
           <a:p>
             <a:pPr algn="l">
               <a:spcAft>
-                <a:spcPts val="800"/>
+                <a:spcPts val="700"/>
               </a:spcAft>
             </a:pPr>
             <a:r>
-              <a:rPr sz="1400" b="0">
+              <a:rPr sz="1600" b="1">
+                <a:solidFill>
+                  <a:srgbClr val="16213E"/>
+                </a:solidFill>
+                <a:latin typeface="Microsoft YaHei"/>
+              </a:rPr>
+              <a:t>一句话</a:t>
+            </a:r>
+          </a:p>
+          <a:p>
+            <a:pPr algn="l">
+              <a:spcAft>
+                <a:spcPts val="700"/>
+              </a:spcAft>
+            </a:pPr>
+            <a:r>
+              <a:rPr sz="1250" b="0">
                 <a:solidFill>
                   <a:srgbClr val="6B707B"/>
                 </a:solidFill>
                 <a:latin typeface="Microsoft YaHei"/>
               </a:rPr>
-              <a:t>• 产品力：海螺/Talkie 在 AI 视频与情感陪伴的海外心智</a:t>
-            </a:r>
-          </a:p>
-          <a:p>
-            <a:pPr algn="l">
-              <a:spcAft>
-                <a:spcPts val="800"/>
-              </a:spcAft>
-            </a:pPr>
-            <a:r>
-              <a:rPr sz="1400" b="0">
-                <a:solidFill>
-                  <a:srgbClr val="6B707B"/>
-                </a:solidFill>
-                <a:latin typeface="Microsoft YaHei"/>
-              </a:rPr>
-              <a:t>• 多模态全栈自研，模型迭代快（M2.5、Hailuo-02）</a:t>
-            </a:r>
-          </a:p>
-          <a:p>
-            <a:pPr algn="l">
-              <a:spcAft>
-                <a:spcPts val="800"/>
-              </a:spcAft>
-            </a:pPr>
-            <a:r>
-              <a:rPr sz="1400" b="0">
-                <a:solidFill>
-                  <a:srgbClr val="6B707B"/>
-                </a:solidFill>
-                <a:latin typeface="Microsoft YaHei"/>
-              </a:rPr>
-              <a:t>• 出海先发：73% 海外收入，绕开国内流量血战</a:t>
-            </a:r>
-          </a:p>
-          <a:p>
-            <a:pPr algn="l">
-              <a:spcAft>
-                <a:spcPts val="800"/>
-              </a:spcAft>
-            </a:pPr>
-            <a:r>
-              <a:rPr sz="1400" b="0">
-                <a:solidFill>
-                  <a:srgbClr val="6B707B"/>
-                </a:solidFill>
-                <a:latin typeface="Microsoft YaHei"/>
-              </a:rPr>
-              <a:t>• 资本/生态：阿里、腾讯、米哈游战略加持</a:t>
-            </a:r>
-          </a:p>
-        </p:txBody>
-      </p:sp>
-      <p:sp>
-        <p:nvSpPr>
-          <p:cNvPr id="6" name="Rectangle 5"/>
-          <p:cNvSpPr/>
-          <p:nvPr/>
-        </p:nvSpPr>
-        <p:spPr>
-          <a:xfrm>
-            <a:off x="6309360" y="1600200"/>
-            <a:ext cx="5486400" cy="457200"/>
-          </a:xfrm>
-          <a:prstGeom prst="rect">
-            <a:avLst/>
-          </a:prstGeom>
-          <a:solidFill>
-            <a:srgbClr val="2E86C1"/>
-          </a:solidFill>
-          <a:ln>
-            <a:noFill/>
-          </a:ln>
-        </p:spPr>
-        <p:style>
-          <a:lnRef idx="1">
-            <a:schemeClr val="accent1"/>
-          </a:lnRef>
-          <a:fillRef idx="3">
-            <a:schemeClr val="accent1"/>
-          </a:fillRef>
-          <a:effectRef idx="2">
-            <a:schemeClr val="accent1"/>
-          </a:effectRef>
-          <a:fontRef idx="minor">
-            <a:schemeClr val="lt1"/>
-          </a:fontRef>
-        </p:style>
-        <p:txBody>
-          <a:bodyPr rtlCol="0" anchor="ctr"/>
-          <a:lstStyle/>
-          <a:p>
-            <a:pPr algn="ctr"/>
-            <a:r>
-              <a:rPr sz="1500" b="1">
-                <a:solidFill>
-                  <a:srgbClr val="FFFFFF"/>
-                </a:solidFill>
-                <a:latin typeface="Microsoft YaHei"/>
-              </a:rPr>
-              <a:t>软肋（结构性风险）</a:t>
+              <a:t>• 智谱(To B)与 MiniMax(To C)率先 IPO；Kimi 靠 Agent 估值狂飙但未上市；阶跃押多模态+终端、吉利系加持。</a:t>
             </a:r>
           </a:p>
         </p:txBody>
@@ -6416,110 +7197,7 @@
         </p:nvSpPr>
         <p:spPr>
           <a:xfrm>
-            <a:off x="6309360" y="2148840"/>
-            <a:ext cx="5486400" cy="3840480"/>
-          </a:xfrm>
-          <a:prstGeom prst="rect">
-            <a:avLst/>
-          </a:prstGeom>
-          <a:noFill/>
-        </p:spPr>
-        <p:txBody>
-          <a:bodyPr wrap="square">
-            <a:spAutoFit/>
-          </a:bodyPr>
-          <a:lstStyle/>
-          <a:p>
-            <a:pPr algn="l">
-              <a:spcAft>
-                <a:spcPts val="800"/>
-              </a:spcAft>
-            </a:pPr>
-            <a:r>
-              <a:rPr sz="1400" b="0">
-                <a:solidFill>
-                  <a:srgbClr val="6B707B"/>
-                </a:solidFill>
-                <a:latin typeface="Microsoft YaHei"/>
-              </a:rPr>
-              <a:t>• 持续大额亏损，盈利路径与时点未明</a:t>
-            </a:r>
-          </a:p>
-          <a:p>
-            <a:pPr algn="l">
-              <a:spcAft>
-                <a:spcPts val="800"/>
-              </a:spcAft>
-            </a:pPr>
-            <a:r>
-              <a:rPr sz="1400" b="0">
-                <a:solidFill>
-                  <a:srgbClr val="6B707B"/>
-                </a:solidFill>
-                <a:latin typeface="Microsoft YaHei"/>
-              </a:rPr>
-              <a:t>• 国内流量远逊大厂，C 端获客成本高</a:t>
-            </a:r>
-          </a:p>
-          <a:p>
-            <a:pPr algn="l">
-              <a:spcAft>
-                <a:spcPts val="800"/>
-              </a:spcAft>
-            </a:pPr>
-            <a:r>
-              <a:rPr sz="1400" b="0">
-                <a:solidFill>
-                  <a:srgbClr val="6B707B"/>
-                </a:solidFill>
-                <a:latin typeface="Microsoft YaHei"/>
-              </a:rPr>
-              <a:t>• 估值 75x P/S，容错空间极小</a:t>
-            </a:r>
-          </a:p>
-          <a:p>
-            <a:pPr algn="l">
-              <a:spcAft>
-                <a:spcPts val="800"/>
-              </a:spcAft>
-            </a:pPr>
-            <a:r>
-              <a:rPr sz="1400" b="0">
-                <a:solidFill>
-                  <a:srgbClr val="6B707B"/>
-                </a:solidFill>
-                <a:latin typeface="Microsoft YaHei"/>
-              </a:rPr>
-              <a:t>• 海外合规/地缘 + 开源模型挤压付费意愿</a:t>
-            </a:r>
-          </a:p>
-          <a:p>
-            <a:pPr algn="l">
-              <a:spcAft>
-                <a:spcPts val="800"/>
-              </a:spcAft>
-            </a:pPr>
-            <a:r>
-              <a:rPr sz="1400" b="0">
-                <a:solidFill>
-                  <a:srgbClr val="6B707B"/>
-                </a:solidFill>
-                <a:latin typeface="Microsoft YaHei"/>
-              </a:rPr>
-              <a:t>• 阿里等股东同时是竞品（豆包/Qwen/智谱）</a:t>
-            </a:r>
-          </a:p>
-        </p:txBody>
-      </p:sp>
-      <p:sp>
-        <p:nvSpPr>
-          <p:cNvPr id="8" name="TextBox 7"/>
-          <p:cNvSpPr txBox="1"/>
-          <p:nvPr/>
-        </p:nvSpPr>
-        <p:spPr>
-          <a:xfrm>
-            <a:off x="457200" y="6437376"/>
+            <a:off x="457200" y="6455664"/>
             <a:ext cx="11338560" cy="365760"/>
           </a:xfrm>
           <a:prstGeom prst="rect">
@@ -6541,7 +7219,7 @@
                 </a:solidFill>
                 <a:latin typeface="Microsoft YaHei"/>
               </a:rPr>
-              <a:t>综合招股书、券商研报与公开报道的作者判断</a:t>
+              <a:t>来源：各家招股书/融资报道（智谱·量子位；Kimi·新浪/投资界；阶跃·财经网）。估值含 RMB/USD 混合及部分未证实报道 [E]</a:t>
             </a:r>
           </a:p>
         </p:txBody>
@@ -6615,7 +7293,7 @@
         </p:nvSpPr>
         <p:spPr>
           <a:xfrm>
-            <a:off x="457200" y="237744"/>
+            <a:off x="457200" y="219456"/>
             <a:ext cx="11338560" cy="914400"/>
           </a:xfrm>
           <a:prstGeom prst="rect">
@@ -6631,13 +7309,13 @@
           <a:p>
             <a:pPr algn="l"/>
             <a:r>
-              <a:rPr sz="2600" b="1">
+              <a:rPr sz="2500" b="1">
                 <a:solidFill>
                   <a:srgbClr val="16213E"/>
                 </a:solidFill>
                 <a:latin typeface="Microsoft YaHei"/>
               </a:rPr>
-              <a:t>综合结论：一笔“高赔率、高不确定”的 AI 平台期权</a:t>
+              <a:t>两条 IPO 路线对照：MiniMax 的 To C 出海 vs 智谱的 To B 政企</a:t>
             </a:r>
           </a:p>
         </p:txBody>
@@ -6651,8 +7329,8 @@
           <p:nvPr/>
         </p:nvGraphicFramePr>
         <p:xfrm>
-          <a:off x="457200" y="1645920"/>
-          <a:ext cx="11247120" cy="2743200"/>
+          <a:off x="457200" y="1691640"/>
+          <a:ext cx="11247120" cy="4206240"/>
         </p:xfrm>
         <a:graphic>
           <a:graphicData uri="http://schemas.openxmlformats.org/drawingml/2006/table">
@@ -6661,12 +7339,11 @@
                 <a:tableStyleId>{5C22544A-7EE6-4342-B048-85BDC9FD1C3A}</a:tableStyleId>
               </a:tblPr>
               <a:tblGrid>
-                <a:gridCol w="1005840"/>
-                <a:gridCol w="914400"/>
-                <a:gridCol w="5212080"/>
-                <a:gridCol w="4114800"/>
+                <a:gridCol w="2103120"/>
+                <a:gridCol w="4572000"/>
+                <a:gridCol w="4572000"/>
               </a:tblGrid>
-              <a:tr h="685800">
+              <a:tr h="467360">
                 <a:tc>
                   <a:txBody>
                     <a:bodyPr wrap="square"/>
@@ -6680,11 +7357,11 @@
                           </a:solidFill>
                           <a:latin typeface="Microsoft YaHei"/>
                         </a:rPr>
-                        <a:t>情景</a:t>
-                      </a:r>
-                    </a:p>
-                  </a:txBody>
-                  <a:tcPr marL="64008" marR="64008" marT="18288" marB="18288" anchor="ctr">
+                        <a:t>维度</a:t>
+                      </a:r>
+                    </a:p>
+                  </a:txBody>
+                  <a:tcPr marL="54864" marR="54864" marT="18288" marB="18288" anchor="ctr">
                     <a:solidFill>
                       <a:srgbClr val="16213E"/>
                     </a:solidFill>
@@ -6703,11 +7380,11 @@
                           </a:solidFill>
                           <a:latin typeface="Microsoft YaHei"/>
                         </a:rPr>
-                        <a:t>概率</a:t>
-                      </a:r>
-                    </a:p>
-                  </a:txBody>
-                  <a:tcPr marL="64008" marR="64008" marT="18288" marB="18288" anchor="ctr">
+                        <a:t>MiniMax (00100.HK)</a:t>
+                      </a:r>
+                    </a:p>
+                  </a:txBody>
+                  <a:tcPr marL="54864" marR="54864" marT="18288" marB="18288" anchor="ctr">
                     <a:solidFill>
                       <a:srgbClr val="16213E"/>
                     </a:solidFill>
@@ -6726,41 +7403,18 @@
                           </a:solidFill>
                           <a:latin typeface="Microsoft YaHei"/>
                         </a:rPr>
-                        <a:t>核心条件</a:t>
-                      </a:r>
-                    </a:p>
-                  </a:txBody>
-                  <a:tcPr marL="64008" marR="64008" marT="18288" marB="18288" anchor="ctr">
+                        <a:t>智谱 AI</a:t>
+                      </a:r>
+                    </a:p>
+                  </a:txBody>
+                  <a:tcPr marL="54864" marR="54864" marT="18288" marB="18288" anchor="ctr">
                     <a:solidFill>
                       <a:srgbClr val="16213E"/>
                     </a:solidFill>
                   </a:tcPr>
                 </a:tc>
-                <a:tc>
-                  <a:txBody>
-                    <a:bodyPr wrap="square"/>
-                    <a:lstStyle/>
-                    <a:p>
-                      <a:pPr algn="l"/>
-                      <a:r>
-                        <a:rPr sz="1250" b="1">
-                          <a:solidFill>
-                            <a:srgbClr val="FFFFFF"/>
-                          </a:solidFill>
-                          <a:latin typeface="Microsoft YaHei"/>
-                        </a:rPr>
-                        <a:t>估值含义</a:t>
-                      </a:r>
-                    </a:p>
-                  </a:txBody>
-                  <a:tcPr marL="64008" marR="64008" marT="18288" marB="18288" anchor="ctr">
-                    <a:solidFill>
-                      <a:srgbClr val="16213E"/>
-                    </a:solidFill>
-                  </a:tcPr>
-                </a:tc>
               </a:tr>
-              <a:tr h="685800">
+              <a:tr h="467360">
                 <a:tc>
                   <a:txBody>
                     <a:bodyPr wrap="square"/>
@@ -6774,11 +7428,11 @@
                           </a:solidFill>
                           <a:latin typeface="Microsoft YaHei"/>
                         </a:rPr>
-                        <a:t>牛</a:t>
-                      </a:r>
-                    </a:p>
-                  </a:txBody>
-                  <a:tcPr marL="64008" marR="64008" marT="18288" marB="18288" anchor="ctr">
+                        <a:t>客户结构</a:t>
+                      </a:r>
+                    </a:p>
+                  </a:txBody>
+                  <a:tcPr marL="54864" marR="54864" marT="18288" marB="18288" anchor="ctr">
                     <a:solidFill>
                       <a:srgbClr val="FFFFFF"/>
                     </a:solidFill>
@@ -6789,7 +7443,7 @@
                     <a:bodyPr wrap="square"/>
                     <a:lstStyle/>
                     <a:p>
-                      <a:pPr algn="r"/>
+                      <a:pPr algn="l"/>
                       <a:r>
                         <a:rPr sz="1250" b="0">
                           <a:solidFill>
@@ -6797,11 +7451,11 @@
                           </a:solidFill>
                           <a:latin typeface="Microsoft YaHei"/>
                         </a:rPr>
-                        <a:t>25%</a:t>
-                      </a:r>
-                    </a:p>
-                  </a:txBody>
-                  <a:tcPr marL="64008" marR="64008" marT="18288" marB="18288" anchor="ctr">
+                        <a:t>To C 为主 (~70% 消费级)</a:t>
+                      </a:r>
+                    </a:p>
+                  </a:txBody>
+                  <a:tcPr marL="54864" marR="54864" marT="18288" marB="18288" anchor="ctr">
                     <a:solidFill>
                       <a:srgbClr val="FFFFFF"/>
                     </a:solidFill>
@@ -6820,16 +7474,18 @@
                           </a:solidFill>
                           <a:latin typeface="Microsoft YaHei"/>
                         </a:rPr>
-                        <a:t>海外To C持续放量+M系列生态成形，2030前路径清晰转盈</a:t>
-                      </a:r>
-                    </a:p>
-                  </a:txBody>
-                  <a:tcPr marL="64008" marR="64008" marT="18288" marB="18288" anchor="ctr">
+                        <a:t>To B 为主 (84% 本地化部署)</a:t>
+                      </a:r>
+                    </a:p>
+                  </a:txBody>
+                  <a:tcPr marL="54864" marR="54864" marT="18288" marB="18288" anchor="ctr">
                     <a:solidFill>
                       <a:srgbClr val="FFFFFF"/>
                     </a:solidFill>
                   </a:tcPr>
                 </a:tc>
+              </a:tr>
+              <a:tr h="467360">
                 <a:tc>
                   <a:txBody>
                     <a:bodyPr wrap="square"/>
@@ -6843,18 +7499,135 @@
                           </a:solidFill>
                           <a:latin typeface="Microsoft YaHei"/>
                         </a:rPr>
-                        <a:t>重估为区域多模态赢家，市值上行空间大</a:t>
-                      </a:r>
-                    </a:p>
-                  </a:txBody>
-                  <a:tcPr marL="64008" marR="64008" marT="18288" marB="18288" anchor="ctr">
+                        <a:t>市场重心</a:t>
+                      </a:r>
+                    </a:p>
+                  </a:txBody>
+                  <a:tcPr marL="54864" marR="54864" marT="18288" marB="18288" anchor="ctr">
+                    <a:solidFill>
+                      <a:srgbClr val="E9EBEF"/>
+                    </a:solidFill>
+                  </a:tcPr>
+                </a:tc>
+                <a:tc>
+                  <a:txBody>
+                    <a:bodyPr wrap="square"/>
+                    <a:lstStyle/>
+                    <a:p>
+                      <a:pPr algn="l"/>
+                      <a:r>
+                        <a:rPr sz="1250" b="0">
+                          <a:solidFill>
+                            <a:srgbClr val="16213E"/>
+                          </a:solidFill>
+                          <a:latin typeface="Microsoft YaHei"/>
+                        </a:rPr>
+                        <a:t>海外优先 (73% 海外收入)</a:t>
+                      </a:r>
+                    </a:p>
+                  </a:txBody>
+                  <a:tcPr marL="54864" marR="54864" marT="18288" marB="18288" anchor="ctr">
+                    <a:solidFill>
+                      <a:srgbClr val="E9EBEF"/>
+                    </a:solidFill>
+                  </a:tcPr>
+                </a:tc>
+                <a:tc>
+                  <a:txBody>
+                    <a:bodyPr wrap="square"/>
+                    <a:lstStyle/>
+                    <a:p>
+                      <a:pPr algn="l"/>
+                      <a:r>
+                        <a:rPr sz="1250" b="0">
+                          <a:solidFill>
+                            <a:srgbClr val="16213E"/>
+                          </a:solidFill>
+                          <a:latin typeface="Microsoft YaHei"/>
+                        </a:rPr>
+                        <a:t>国内政企 / 国资体系</a:t>
+                      </a:r>
+                    </a:p>
+                  </a:txBody>
+                  <a:tcPr marL="54864" marR="54864" marT="18288" marB="18288" anchor="ctr">
+                    <a:solidFill>
+                      <a:srgbClr val="E9EBEF"/>
+                    </a:solidFill>
+                  </a:tcPr>
+                </a:tc>
+              </a:tr>
+              <a:tr h="467360">
+                <a:tc>
+                  <a:txBody>
+                    <a:bodyPr wrap="square"/>
+                    <a:lstStyle/>
+                    <a:p>
+                      <a:pPr algn="l"/>
+                      <a:r>
+                        <a:rPr sz="1250" b="0">
+                          <a:solidFill>
+                            <a:srgbClr val="16213E"/>
+                          </a:solidFill>
+                          <a:latin typeface="Microsoft YaHei"/>
+                        </a:rPr>
+                        <a:t>营收 (2024)</a:t>
+                      </a:r>
+                    </a:p>
+                  </a:txBody>
+                  <a:tcPr marL="54864" marR="54864" marT="18288" marB="18288" anchor="ctr">
                     <a:solidFill>
                       <a:srgbClr val="FFFFFF"/>
                     </a:solidFill>
                   </a:tcPr>
                 </a:tc>
+                <a:tc>
+                  <a:txBody>
+                    <a:bodyPr wrap="square"/>
+                    <a:lstStyle/>
+                    <a:p>
+                      <a:pPr algn="l"/>
+                      <a:r>
+                        <a:rPr sz="1250" b="0">
+                          <a:solidFill>
+                            <a:srgbClr val="16213E"/>
+                          </a:solidFill>
+                          <a:latin typeface="Microsoft YaHei"/>
+                        </a:rPr>
+                        <a:t>$30.5M (~¥2.2亿)</a:t>
+                      </a:r>
+                    </a:p>
+                  </a:txBody>
+                  <a:tcPr marL="54864" marR="54864" marT="18288" marB="18288" anchor="ctr">
+                    <a:solidFill>
+                      <a:srgbClr val="FFFFFF"/>
+                    </a:solidFill>
+                  </a:tcPr>
+                </a:tc>
+                <a:tc>
+                  <a:txBody>
+                    <a:bodyPr wrap="square"/>
+                    <a:lstStyle/>
+                    <a:p>
+                      <a:pPr algn="l"/>
+                      <a:r>
+                        <a:rPr sz="1250" b="0">
+                          <a:solidFill>
+                            <a:srgbClr val="16213E"/>
+                          </a:solidFill>
+                          <a:latin typeface="Microsoft YaHei"/>
+                        </a:rPr>
+                        <a:t>¥3.12 亿</a:t>
+                      </a:r>
+                    </a:p>
+                  </a:txBody>
+                  <a:tcPr marL="54864" marR="54864" marT="18288" marB="18288" anchor="ctr">
+                    <a:solidFill>
+                      <a:srgbClr val="FFFFFF"/>
+                    </a:solidFill>
+                  </a:tcPr>
+                </a:tc>
               </a:tr>
-              <a:tr h="685800">
+              <a:tr h="467360">
                 <a:tc>
                   <a:txBody>
                     <a:bodyPr wrap="square"/>
@@ -6868,11 +7641,11 @@
                           </a:solidFill>
                           <a:latin typeface="Microsoft YaHei"/>
                         </a:rPr>
-                        <a:t>中</a:t>
-                      </a:r>
-                    </a:p>
-                  </a:txBody>
-                  <a:tcPr marL="64008" marR="64008" marT="18288" marB="18288" anchor="ctr">
+                        <a:t>营收增速</a:t>
+                      </a:r>
+                    </a:p>
+                  </a:txBody>
+                  <a:tcPr marL="54864" marR="54864" marT="18288" marB="18288" anchor="ctr">
                     <a:solidFill>
                       <a:srgbClr val="E9EBEF"/>
                     </a:solidFill>
@@ -6883,7 +7656,7 @@
                     <a:bodyPr wrap="square"/>
                     <a:lstStyle/>
                     <a:p>
-                      <a:pPr algn="r"/>
+                      <a:pPr algn="l"/>
                       <a:r>
                         <a:rPr sz="1250" b="0">
                           <a:solidFill>
@@ -6891,11 +7664,11 @@
                           </a:solidFill>
                           <a:latin typeface="Microsoft YaHei"/>
                         </a:rPr>
-                        <a:t>45%</a:t>
-                      </a:r>
-                    </a:p>
-                  </a:txBody>
-                  <a:tcPr marL="64008" marR="64008" marT="18288" marB="18288" anchor="ctr">
+                        <a:t>2025 +159%</a:t>
+                      </a:r>
+                    </a:p>
+                  </a:txBody>
+                  <a:tcPr marL="54864" marR="54864" marT="18288" marB="18288" anchor="ctr">
                     <a:solidFill>
                       <a:srgbClr val="E9EBEF"/>
                     </a:solidFill>
@@ -6914,16 +7687,18 @@
                           </a:solidFill>
                           <a:latin typeface="Microsoft YaHei"/>
                         </a:rPr>
-                        <a:t>维持高增但盈利后移，烧钱与融资稀释并存</a:t>
-                      </a:r>
-                    </a:p>
-                  </a:txBody>
-                  <a:tcPr marL="64008" marR="64008" marT="18288" marB="18288" anchor="ctr">
+                        <a:t>三年 CAGR ~130%</a:t>
+                      </a:r>
+                    </a:p>
+                  </a:txBody>
+                  <a:tcPr marL="54864" marR="54864" marT="18288" marB="18288" anchor="ctr">
                     <a:solidFill>
                       <a:srgbClr val="E9EBEF"/>
                     </a:solidFill>
                   </a:tcPr>
                 </a:tc>
+              </a:tr>
+              <a:tr h="467360">
                 <a:tc>
                   <a:txBody>
                     <a:bodyPr wrap="square"/>
@@ -6937,18 +7712,135 @@
                           </a:solidFill>
                           <a:latin typeface="Microsoft YaHei"/>
                         </a:rPr>
-                        <a:t>随增长与情绪宽幅震荡，估值难“算清”</a:t>
-                      </a:r>
-                    </a:p>
-                  </a:txBody>
-                  <a:tcPr marL="64008" marR="64008" marT="18288" marB="18288" anchor="ctr">
+                        <a:t>估值</a:t>
+                      </a:r>
+                    </a:p>
+                  </a:txBody>
+                  <a:tcPr marL="54864" marR="54864" marT="18288" marB="18288" anchor="ctr">
+                    <a:solidFill>
+                      <a:srgbClr val="FFFFFF"/>
+                    </a:solidFill>
+                  </a:tcPr>
+                </a:tc>
+                <a:tc>
+                  <a:txBody>
+                    <a:bodyPr wrap="square"/>
+                    <a:lstStyle/>
+                    <a:p>
+                      <a:pPr algn="l"/>
+                      <a:r>
+                        <a:rPr sz="1250" b="0">
+                          <a:solidFill>
+                            <a:srgbClr val="16213E"/>
+                          </a:solidFill>
+                          <a:latin typeface="Microsoft YaHei"/>
+                        </a:rPr>
+                        <a:t>≈ US$5.9B (上市市值)</a:t>
+                      </a:r>
+                    </a:p>
+                  </a:txBody>
+                  <a:tcPr marL="54864" marR="54864" marT="18288" marB="18288" anchor="ctr">
+                    <a:solidFill>
+                      <a:srgbClr val="FFFFFF"/>
+                    </a:solidFill>
+                  </a:tcPr>
+                </a:tc>
+                <a:tc>
+                  <a:txBody>
+                    <a:bodyPr wrap="square"/>
+                    <a:lstStyle/>
+                    <a:p>
+                      <a:pPr algn="l"/>
+                      <a:r>
+                        <a:rPr sz="1250" b="0">
+                          <a:solidFill>
+                            <a:srgbClr val="16213E"/>
+                          </a:solidFill>
+                          <a:latin typeface="Microsoft YaHei"/>
+                        </a:rPr>
+                        <a:t>≈ ¥244 亿 (~$3.4B)</a:t>
+                      </a:r>
+                    </a:p>
+                  </a:txBody>
+                  <a:tcPr marL="54864" marR="54864" marT="18288" marB="18288" anchor="ctr">
+                    <a:solidFill>
+                      <a:srgbClr val="FFFFFF"/>
+                    </a:solidFill>
+                  </a:tcPr>
+                </a:tc>
+              </a:tr>
+              <a:tr h="467360">
+                <a:tc>
+                  <a:txBody>
+                    <a:bodyPr wrap="square"/>
+                    <a:lstStyle/>
+                    <a:p>
+                      <a:pPr algn="l"/>
+                      <a:r>
+                        <a:rPr sz="1250" b="0">
+                          <a:solidFill>
+                            <a:srgbClr val="16213E"/>
+                          </a:solidFill>
+                          <a:latin typeface="Microsoft YaHei"/>
+                        </a:rPr>
+                        <a:t>上市进度</a:t>
+                      </a:r>
+                    </a:p>
+                  </a:txBody>
+                  <a:tcPr marL="54864" marR="54864" marT="18288" marB="18288" anchor="ctr">
                     <a:solidFill>
                       <a:srgbClr val="E9EBEF"/>
                     </a:solidFill>
                   </a:tcPr>
                 </a:tc>
+                <a:tc>
+                  <a:txBody>
+                    <a:bodyPr wrap="square"/>
+                    <a:lstStyle/>
+                    <a:p>
+                      <a:pPr algn="l"/>
+                      <a:r>
+                        <a:rPr sz="1250" b="0">
+                          <a:solidFill>
+                            <a:srgbClr val="16213E"/>
+                          </a:solidFill>
+                          <a:latin typeface="Microsoft YaHei"/>
+                        </a:rPr>
+                        <a:t>已上市 2026-01-09</a:t>
+                      </a:r>
+                    </a:p>
+                  </a:txBody>
+                  <a:tcPr marL="54864" marR="54864" marT="18288" marB="18288" anchor="ctr">
+                    <a:solidFill>
+                      <a:srgbClr val="E9EBEF"/>
+                    </a:solidFill>
+                  </a:tcPr>
+                </a:tc>
+                <a:tc>
+                  <a:txBody>
+                    <a:bodyPr wrap="square"/>
+                    <a:lstStyle/>
+                    <a:p>
+                      <a:pPr algn="l"/>
+                      <a:r>
+                        <a:rPr sz="1250" b="0">
+                          <a:solidFill>
+                            <a:srgbClr val="16213E"/>
+                          </a:solidFill>
+                          <a:latin typeface="Microsoft YaHei"/>
+                        </a:rPr>
+                        <a:t>通过聆讯，冲“第一股”</a:t>
+                      </a:r>
+                    </a:p>
+                  </a:txBody>
+                  <a:tcPr marL="54864" marR="54864" marT="18288" marB="18288" anchor="ctr">
+                    <a:solidFill>
+                      <a:srgbClr val="E9EBEF"/>
+                    </a:solidFill>
+                  </a:tcPr>
+                </a:tc>
               </a:tr>
-              <a:tr h="685800">
+              <a:tr h="467360">
                 <a:tc>
                   <a:txBody>
                     <a:bodyPr wrap="square"/>
@@ -6962,11 +7854,11 @@
                           </a:solidFill>
                           <a:latin typeface="Microsoft YaHei"/>
                         </a:rPr>
-                        <a:t>熊</a:t>
-                      </a:r>
-                    </a:p>
-                  </a:txBody>
-                  <a:tcPr marL="64008" marR="64008" marT="18288" marB="18288" anchor="ctr">
+                        <a:t>代表模型</a:t>
+                      </a:r>
+                    </a:p>
+                  </a:txBody>
+                  <a:tcPr marL="54864" marR="54864" marT="18288" marB="18288" anchor="ctr">
                     <a:solidFill>
                       <a:srgbClr val="FFFFFF"/>
                     </a:solidFill>
@@ -6977,7 +7869,7 @@
                     <a:bodyPr wrap="square"/>
                     <a:lstStyle/>
                     <a:p>
-                      <a:pPr algn="r"/>
+                      <a:pPr algn="l"/>
                       <a:r>
                         <a:rPr sz="1250" b="0">
                           <a:solidFill>
@@ -6985,11 +7877,11 @@
                           </a:solidFill>
                           <a:latin typeface="Microsoft YaHei"/>
                         </a:rPr>
-                        <a:t>30%</a:t>
-                      </a:r>
-                    </a:p>
-                  </a:txBody>
-                  <a:tcPr marL="64008" marR="64008" marT="18288" marB="18288" anchor="ctr">
+                        <a:t>多模态(海螺视频/语音)</a:t>
+                      </a:r>
+                    </a:p>
+                  </a:txBody>
+                  <a:tcPr marL="54864" marR="54864" marT="18288" marB="18288" anchor="ctr">
                     <a:solidFill>
                       <a:srgbClr val="FFFFFF"/>
                     </a:solidFill>
@@ -7008,16 +7900,18 @@
                           </a:solidFill>
                           <a:latin typeface="Microsoft YaHei"/>
                         </a:rPr>
-                        <a:t>增速换挡+大厂/开源挤压+海外受阻，盈利遥遥无期</a:t>
-                      </a:r>
-                    </a:p>
-                  </a:txBody>
-                  <a:tcPr marL="64008" marR="64008" marT="18288" marB="18288" anchor="ctr">
+                        <a:t>GLM 系(通用+推理)</a:t>
+                      </a:r>
+                    </a:p>
+                  </a:txBody>
+                  <a:tcPr marL="54864" marR="54864" marT="18288" marB="18288" anchor="ctr">
                     <a:solidFill>
                       <a:srgbClr val="FFFFFF"/>
                     </a:solidFill>
                   </a:tcPr>
                 </a:tc>
+              </a:tr>
+              <a:tr h="467360">
                 <a:tc>
                   <a:txBody>
                     <a:bodyPr wrap="square"/>
@@ -7031,13 +7925,59 @@
                           </a:solidFill>
                           <a:latin typeface="Microsoft YaHei"/>
                         </a:rPr>
-                        <a:t>P/S 大幅压缩，持续融资稀释股东</a:t>
-                      </a:r>
-                    </a:p>
-                  </a:txBody>
-                  <a:tcPr marL="64008" marR="64008" marT="18288" marB="18288" anchor="ctr">
-                    <a:solidFill>
-                      <a:srgbClr val="FFFFFF"/>
+                        <a:t>核心风险</a:t>
+                      </a:r>
+                    </a:p>
+                  </a:txBody>
+                  <a:tcPr marL="54864" marR="54864" marT="18288" marB="18288" anchor="ctr">
+                    <a:solidFill>
+                      <a:srgbClr val="E9EBEF"/>
+                    </a:solidFill>
+                  </a:tcPr>
+                </a:tc>
+                <a:tc>
+                  <a:txBody>
+                    <a:bodyPr wrap="square"/>
+                    <a:lstStyle/>
+                    <a:p>
+                      <a:pPr algn="l"/>
+                      <a:r>
+                        <a:rPr sz="1250" b="0">
+                          <a:solidFill>
+                            <a:srgbClr val="16213E"/>
+                          </a:solidFill>
+                          <a:latin typeface="Microsoft YaHei"/>
+                        </a:rPr>
+                        <a:t>C端获客成本 / 海外合规</a:t>
+                      </a:r>
+                    </a:p>
+                  </a:txBody>
+                  <a:tcPr marL="54864" marR="54864" marT="18288" marB="18288" anchor="ctr">
+                    <a:solidFill>
+                      <a:srgbClr val="E9EBEF"/>
+                    </a:solidFill>
+                  </a:tcPr>
+                </a:tc>
+                <a:tc>
+                  <a:txBody>
+                    <a:bodyPr wrap="square"/>
+                    <a:lstStyle/>
+                    <a:p>
+                      <a:pPr algn="l"/>
+                      <a:r>
+                        <a:rPr sz="1250" b="0">
+                          <a:solidFill>
+                            <a:srgbClr val="16213E"/>
+                          </a:solidFill>
+                          <a:latin typeface="Microsoft YaHei"/>
+                        </a:rPr>
+                        <a:t>项目制毛利 / 回款 / G端依赖</a:t>
+                      </a:r>
+                    </a:p>
+                  </a:txBody>
+                  <a:tcPr marL="54864" marR="54864" marT="18288" marB="18288" anchor="ctr">
+                    <a:solidFill>
+                      <a:srgbClr val="E9EBEF"/>
                     </a:solidFill>
                   </a:tcPr>
                 </a:tc>
@@ -7054,78 +7994,7 @@
         </p:nvSpPr>
         <p:spPr>
           <a:xfrm>
-            <a:off x="457200" y="4663440"/>
-            <a:ext cx="11247120" cy="1463040"/>
-          </a:xfrm>
-          <a:prstGeom prst="rect">
-            <a:avLst/>
-          </a:prstGeom>
-          <a:noFill/>
-        </p:spPr>
-        <p:txBody>
-          <a:bodyPr wrap="square">
-            <a:spAutoFit/>
-          </a:bodyPr>
-          <a:lstStyle/>
-          <a:p>
-            <a:pPr algn="l">
-              <a:spcAft>
-                <a:spcPts val="800"/>
-              </a:spcAft>
-            </a:pPr>
-            <a:r>
-              <a:rPr sz="1600" b="1">
-                <a:solidFill>
-                  <a:srgbClr val="16213E"/>
-                </a:solidFill>
-                <a:latin typeface="Microsoft YaHei"/>
-              </a:rPr>
-              <a:t>给个人投资者的提醒</a:t>
-            </a:r>
-          </a:p>
-          <a:p>
-            <a:pPr algn="l">
-              <a:spcAft>
-                <a:spcPts val="800"/>
-              </a:spcAft>
-            </a:pPr>
-            <a:r>
-              <a:rPr sz="1250" b="0">
-                <a:solidFill>
-                  <a:srgbClr val="6B707B"/>
-                </a:solidFill>
-                <a:latin typeface="Microsoft YaHei"/>
-              </a:rPr>
-              <a:t>• 这不是靠 DCF/财报算清的标的，仓位与风险敞口比“目标价”更重要；把它当高波动成长期权对待。</a:t>
-            </a:r>
-          </a:p>
-          <a:p>
-            <a:pPr algn="l">
-              <a:spcAft>
-                <a:spcPts val="800"/>
-              </a:spcAft>
-            </a:pPr>
-            <a:r>
-              <a:rPr sz="1250" b="0">
-                <a:solidFill>
-                  <a:srgbClr val="6B707B"/>
-                </a:solidFill>
-                <a:latin typeface="Microsoft YaHei"/>
-              </a:rPr>
-              <a:t>• 最值得跟踪的三件事：① 亏损率拐点 ② 海外收入占比与付费转化 ③ 第二曲线（企业/开放平台）放量。</a:t>
-            </a:r>
-          </a:p>
-        </p:txBody>
-      </p:sp>
-      <p:sp>
-        <p:nvSpPr>
-          <p:cNvPr id="6" name="TextBox 5"/>
-          <p:cNvSpPr txBox="1"/>
-          <p:nvPr/>
-        </p:nvSpPr>
-        <p:spPr>
-          <a:xfrm>
-            <a:off x="457200" y="6437376"/>
+            <a:off x="457200" y="6455664"/>
             <a:ext cx="11338560" cy="365760"/>
           </a:xfrm>
           <a:prstGeom prst="rect">
@@ -7147,7 +8016,7 @@
                 </a:solidFill>
                 <a:latin typeface="Microsoft YaHei"/>
               </a:rPr>
-              <a:t>演示性情景与概率为作者主观假设 [E]，不构成投资建议</a:t>
+              <a:t>来源：MiniMax 招股书；智谱招股书（量子位/智东西解读）。两者口径与币种不同，仅作模式对照</a:t>
             </a:r>
           </a:p>
         </p:txBody>
@@ -7221,7 +8090,7 @@
         </p:nvSpPr>
         <p:spPr>
           <a:xfrm>
-            <a:off x="457200" y="237744"/>
+            <a:off x="457200" y="219456"/>
             <a:ext cx="11338560" cy="914400"/>
           </a:xfrm>
           <a:prstGeom prst="rect">
@@ -7237,7 +8106,1038 @@
           <a:p>
             <a:pPr algn="l"/>
             <a:r>
-              <a:rPr sz="2600" b="1">
+              <a:rPr sz="2500" b="1">
+                <a:solidFill>
+                  <a:srgbClr val="16213E"/>
+                </a:solidFill>
+                <a:latin typeface="Microsoft YaHei"/>
+              </a:rPr>
+              <a:t>综合：护城河在“多模态+出海产品力”，软肋在“流量+盈利”</a:t>
+            </a:r>
+          </a:p>
+        </p:txBody>
+      </p:sp>
+      <p:sp>
+        <p:nvSpPr>
+          <p:cNvPr id="4" name="Rectangle 3"/>
+          <p:cNvSpPr/>
+          <p:nvPr/>
+        </p:nvSpPr>
+        <p:spPr>
+          <a:xfrm>
+            <a:off x="457200" y="1600200"/>
+            <a:ext cx="5486400" cy="438912"/>
+          </a:xfrm>
+          <a:prstGeom prst="rect">
+            <a:avLst/>
+          </a:prstGeom>
+          <a:solidFill>
+            <a:srgbClr val="16213E"/>
+          </a:solidFill>
+          <a:ln>
+            <a:noFill/>
+          </a:ln>
+        </p:spPr>
+        <p:style>
+          <a:lnRef idx="1">
+            <a:schemeClr val="accent1"/>
+          </a:lnRef>
+          <a:fillRef idx="3">
+            <a:schemeClr val="accent1"/>
+          </a:fillRef>
+          <a:effectRef idx="2">
+            <a:schemeClr val="accent1"/>
+          </a:effectRef>
+          <a:fontRef idx="minor">
+            <a:schemeClr val="lt1"/>
+          </a:fontRef>
+        </p:style>
+        <p:txBody>
+          <a:bodyPr rtlCol="0" anchor="ctr"/>
+          <a:lstStyle/>
+          <a:p>
+            <a:pPr algn="ctr"/>
+            <a:r>
+              <a:rPr sz="1500" b="1">
+                <a:solidFill>
+                  <a:srgbClr val="FFFFFF"/>
+                </a:solidFill>
+                <a:latin typeface="Microsoft YaHei"/>
+              </a:rPr>
+              <a:t>护城河（可持续优势）</a:t>
+            </a:r>
+          </a:p>
+        </p:txBody>
+      </p:sp>
+      <p:sp>
+        <p:nvSpPr>
+          <p:cNvPr id="5" name="TextBox 4"/>
+          <p:cNvSpPr txBox="1"/>
+          <p:nvPr/>
+        </p:nvSpPr>
+        <p:spPr>
+          <a:xfrm>
+            <a:off x="457200" y="2103120"/>
+            <a:ext cx="5486400" cy="3840480"/>
+          </a:xfrm>
+          <a:prstGeom prst="rect">
+            <a:avLst/>
+          </a:prstGeom>
+          <a:noFill/>
+        </p:spPr>
+        <p:txBody>
+          <a:bodyPr wrap="square">
+            <a:spAutoFit/>
+          </a:bodyPr>
+          <a:lstStyle/>
+          <a:p>
+            <a:pPr algn="l">
+              <a:spcAft>
+                <a:spcPts val="700"/>
+              </a:spcAft>
+            </a:pPr>
+            <a:r>
+              <a:rPr sz="1400" b="0">
+                <a:solidFill>
+                  <a:srgbClr val="6B707B"/>
+                </a:solidFill>
+                <a:latin typeface="Microsoft YaHei"/>
+              </a:rPr>
+              <a:t>• 产品力：海螺/Talkie 在 AI 视频与情感陪伴的海外心智</a:t>
+            </a:r>
+          </a:p>
+          <a:p>
+            <a:pPr algn="l">
+              <a:spcAft>
+                <a:spcPts val="700"/>
+              </a:spcAft>
+            </a:pPr>
+            <a:r>
+              <a:rPr sz="1400" b="0">
+                <a:solidFill>
+                  <a:srgbClr val="6B707B"/>
+                </a:solidFill>
+                <a:latin typeface="Microsoft YaHei"/>
+              </a:rPr>
+              <a:t>• 多模态全栈自研，模型迭代快（M2.5、Hailuo-02）</a:t>
+            </a:r>
+          </a:p>
+          <a:p>
+            <a:pPr algn="l">
+              <a:spcAft>
+                <a:spcPts val="700"/>
+              </a:spcAft>
+            </a:pPr>
+            <a:r>
+              <a:rPr sz="1400" b="0">
+                <a:solidFill>
+                  <a:srgbClr val="6B707B"/>
+                </a:solidFill>
+                <a:latin typeface="Microsoft YaHei"/>
+              </a:rPr>
+              <a:t>• 出海先发：73% 海外收入，绕开国内流量血战</a:t>
+            </a:r>
+          </a:p>
+          <a:p>
+            <a:pPr algn="l">
+              <a:spcAft>
+                <a:spcPts val="700"/>
+              </a:spcAft>
+            </a:pPr>
+            <a:r>
+              <a:rPr sz="1400" b="0">
+                <a:solidFill>
+                  <a:srgbClr val="6B707B"/>
+                </a:solidFill>
+                <a:latin typeface="Microsoft YaHei"/>
+              </a:rPr>
+              <a:t>• 资本/生态：阿里、腾讯、米哈游战略加持</a:t>
+            </a:r>
+          </a:p>
+        </p:txBody>
+      </p:sp>
+      <p:sp>
+        <p:nvSpPr>
+          <p:cNvPr id="6" name="Rectangle 5"/>
+          <p:cNvSpPr/>
+          <p:nvPr/>
+        </p:nvSpPr>
+        <p:spPr>
+          <a:xfrm>
+            <a:off x="6309360" y="1600200"/>
+            <a:ext cx="5486400" cy="438912"/>
+          </a:xfrm>
+          <a:prstGeom prst="rect">
+            <a:avLst/>
+          </a:prstGeom>
+          <a:solidFill>
+            <a:srgbClr val="2E86C1"/>
+          </a:solidFill>
+          <a:ln>
+            <a:noFill/>
+          </a:ln>
+        </p:spPr>
+        <p:style>
+          <a:lnRef idx="1">
+            <a:schemeClr val="accent1"/>
+          </a:lnRef>
+          <a:fillRef idx="3">
+            <a:schemeClr val="accent1"/>
+          </a:fillRef>
+          <a:effectRef idx="2">
+            <a:schemeClr val="accent1"/>
+          </a:effectRef>
+          <a:fontRef idx="minor">
+            <a:schemeClr val="lt1"/>
+          </a:fontRef>
+        </p:style>
+        <p:txBody>
+          <a:bodyPr rtlCol="0" anchor="ctr"/>
+          <a:lstStyle/>
+          <a:p>
+            <a:pPr algn="ctr"/>
+            <a:r>
+              <a:rPr sz="1500" b="1">
+                <a:solidFill>
+                  <a:srgbClr val="FFFFFF"/>
+                </a:solidFill>
+                <a:latin typeface="Microsoft YaHei"/>
+              </a:rPr>
+              <a:t>软肋（结构性风险）</a:t>
+            </a:r>
+          </a:p>
+        </p:txBody>
+      </p:sp>
+      <p:sp>
+        <p:nvSpPr>
+          <p:cNvPr id="7" name="TextBox 6"/>
+          <p:cNvSpPr txBox="1"/>
+          <p:nvPr/>
+        </p:nvSpPr>
+        <p:spPr>
+          <a:xfrm>
+            <a:off x="6309360" y="2103120"/>
+            <a:ext cx="5486400" cy="3840480"/>
+          </a:xfrm>
+          <a:prstGeom prst="rect">
+            <a:avLst/>
+          </a:prstGeom>
+          <a:noFill/>
+        </p:spPr>
+        <p:txBody>
+          <a:bodyPr wrap="square">
+            <a:spAutoFit/>
+          </a:bodyPr>
+          <a:lstStyle/>
+          <a:p>
+            <a:pPr algn="l">
+              <a:spcAft>
+                <a:spcPts val="700"/>
+              </a:spcAft>
+            </a:pPr>
+            <a:r>
+              <a:rPr sz="1400" b="0">
+                <a:solidFill>
+                  <a:srgbClr val="6B707B"/>
+                </a:solidFill>
+                <a:latin typeface="Microsoft YaHei"/>
+              </a:rPr>
+              <a:t>• 持续大额亏损，盈利路径与时点未明</a:t>
+            </a:r>
+          </a:p>
+          <a:p>
+            <a:pPr algn="l">
+              <a:spcAft>
+                <a:spcPts val="700"/>
+              </a:spcAft>
+            </a:pPr>
+            <a:r>
+              <a:rPr sz="1400" b="0">
+                <a:solidFill>
+                  <a:srgbClr val="6B707B"/>
+                </a:solidFill>
+                <a:latin typeface="Microsoft YaHei"/>
+              </a:rPr>
+              <a:t>• 国内流量远逊大厂，C 端获客成本高</a:t>
+            </a:r>
+          </a:p>
+          <a:p>
+            <a:pPr algn="l">
+              <a:spcAft>
+                <a:spcPts val="700"/>
+              </a:spcAft>
+            </a:pPr>
+            <a:r>
+              <a:rPr sz="1400" b="0">
+                <a:solidFill>
+                  <a:srgbClr val="6B707B"/>
+                </a:solidFill>
+                <a:latin typeface="Microsoft YaHei"/>
+              </a:rPr>
+              <a:t>• 估值 75x P/S，容错空间极小</a:t>
+            </a:r>
+          </a:p>
+          <a:p>
+            <a:pPr algn="l">
+              <a:spcAft>
+                <a:spcPts val="700"/>
+              </a:spcAft>
+            </a:pPr>
+            <a:r>
+              <a:rPr sz="1400" b="0">
+                <a:solidFill>
+                  <a:srgbClr val="6B707B"/>
+                </a:solidFill>
+                <a:latin typeface="Microsoft YaHei"/>
+              </a:rPr>
+              <a:t>• 海外合规/地缘 + 开源模型挤压付费意愿</a:t>
+            </a:r>
+          </a:p>
+          <a:p>
+            <a:pPr algn="l">
+              <a:spcAft>
+                <a:spcPts val="700"/>
+              </a:spcAft>
+            </a:pPr>
+            <a:r>
+              <a:rPr sz="1400" b="0">
+                <a:solidFill>
+                  <a:srgbClr val="6B707B"/>
+                </a:solidFill>
+                <a:latin typeface="Microsoft YaHei"/>
+              </a:rPr>
+              <a:t>• 阿里等股东同时是竞品（豆包/Qwen/智谱）</a:t>
+            </a:r>
+          </a:p>
+        </p:txBody>
+      </p:sp>
+      <p:sp>
+        <p:nvSpPr>
+          <p:cNvPr id="8" name="TextBox 7"/>
+          <p:cNvSpPr txBox="1"/>
+          <p:nvPr/>
+        </p:nvSpPr>
+        <p:spPr>
+          <a:xfrm>
+            <a:off x="457200" y="6455664"/>
+            <a:ext cx="11338560" cy="365760"/>
+          </a:xfrm>
+          <a:prstGeom prst="rect">
+            <a:avLst/>
+          </a:prstGeom>
+          <a:noFill/>
+        </p:spPr>
+        <p:txBody>
+          <a:bodyPr wrap="square">
+            <a:spAutoFit/>
+          </a:bodyPr>
+          <a:lstStyle/>
+          <a:p>
+            <a:pPr algn="l"/>
+            <a:r>
+              <a:rPr sz="900" b="0">
+                <a:solidFill>
+                  <a:srgbClr val="6B707B"/>
+                </a:solidFill>
+                <a:latin typeface="Microsoft YaHei"/>
+              </a:rPr>
+              <a:t>综合招股书、券商研报与公开报道的作者判断</a:t>
+            </a:r>
+          </a:p>
+        </p:txBody>
+      </p:sp>
+    </p:spTree>
+  </p:cSld>
+  <p:clrMapOvr>
+    <a:masterClrMapping/>
+  </p:clrMapOvr>
+</p:sld>
+</file>
+
+<file path=ppt/slides/slide17.xml><?xml version="1.0" encoding="utf-8"?>
+<p:sld xmlns:a="http://schemas.openxmlformats.org/drawingml/2006/main" xmlns:p="http://schemas.openxmlformats.org/presentationml/2006/main" xmlns:r="http://schemas.openxmlformats.org/officeDocument/2006/relationships">
+  <p:cSld>
+    <p:spTree>
+      <p:nvGrpSpPr>
+        <p:cNvPr id="1" name=""/>
+        <p:cNvGrpSpPr/>
+        <p:nvPr/>
+      </p:nvGrpSpPr>
+      <p:grpSpPr/>
+      <p:sp>
+        <p:nvSpPr>
+          <p:cNvPr id="2" name="Rectangle 1"/>
+          <p:cNvSpPr/>
+          <p:nvPr/>
+        </p:nvSpPr>
+        <p:spPr>
+          <a:xfrm>
+            <a:off x="0" y="0"/>
+            <a:ext cx="12191695" cy="109728"/>
+          </a:xfrm>
+          <a:prstGeom prst="rect">
+            <a:avLst/>
+          </a:prstGeom>
+          <a:solidFill>
+            <a:srgbClr val="2E86C1"/>
+          </a:solidFill>
+          <a:ln>
+            <a:noFill/>
+          </a:ln>
+        </p:spPr>
+        <p:style>
+          <a:lnRef idx="1">
+            <a:schemeClr val="accent1"/>
+          </a:lnRef>
+          <a:fillRef idx="3">
+            <a:schemeClr val="accent1"/>
+          </a:fillRef>
+          <a:effectRef idx="2">
+            <a:schemeClr val="accent1"/>
+          </a:effectRef>
+          <a:fontRef idx="minor">
+            <a:schemeClr val="lt1"/>
+          </a:fontRef>
+        </p:style>
+        <p:txBody>
+          <a:bodyPr rtlCol="0" anchor="ctr"/>
+          <a:lstStyle/>
+          <a:p>
+            <a:pPr algn="ctr"/>
+          </a:p>
+        </p:txBody>
+      </p:sp>
+      <p:sp>
+        <p:nvSpPr>
+          <p:cNvPr id="3" name="TextBox 2"/>
+          <p:cNvSpPr txBox="1"/>
+          <p:nvPr/>
+        </p:nvSpPr>
+        <p:spPr>
+          <a:xfrm>
+            <a:off x="457200" y="219456"/>
+            <a:ext cx="11338560" cy="914400"/>
+          </a:xfrm>
+          <a:prstGeom prst="rect">
+            <a:avLst/>
+          </a:prstGeom>
+          <a:noFill/>
+        </p:spPr>
+        <p:txBody>
+          <a:bodyPr wrap="square">
+            <a:spAutoFit/>
+          </a:bodyPr>
+          <a:lstStyle/>
+          <a:p>
+            <a:pPr algn="l"/>
+            <a:r>
+              <a:rPr sz="2500" b="1">
+                <a:solidFill>
+                  <a:srgbClr val="16213E"/>
+                </a:solidFill>
+                <a:latin typeface="Microsoft YaHei"/>
+              </a:rPr>
+              <a:t>综合结论：一笔“高赔率、高不确定”的 AI 平台期权</a:t>
+            </a:r>
+          </a:p>
+        </p:txBody>
+      </p:sp>
+      <p:graphicFrame>
+        <p:nvGraphicFramePr>
+          <p:cNvPr id="4" name="Table 3"/>
+          <p:cNvGraphicFramePr>
+            <a:graphicFrameLocks noGrp="1"/>
+          </p:cNvGraphicFramePr>
+          <p:nvPr/>
+        </p:nvGraphicFramePr>
+        <p:xfrm>
+          <a:off x="457200" y="1645920"/>
+          <a:ext cx="11247120" cy="2743200"/>
+        </p:xfrm>
+        <a:graphic>
+          <a:graphicData uri="http://schemas.openxmlformats.org/drawingml/2006/table">
+            <a:tbl>
+              <a:tblPr firstRow="1" bandRow="1">
+                <a:tableStyleId>{5C22544A-7EE6-4342-B048-85BDC9FD1C3A}</a:tableStyleId>
+              </a:tblPr>
+              <a:tblGrid>
+                <a:gridCol w="1005840"/>
+                <a:gridCol w="914400"/>
+                <a:gridCol w="5212080"/>
+                <a:gridCol w="4114800"/>
+              </a:tblGrid>
+              <a:tr h="685800">
+                <a:tc>
+                  <a:txBody>
+                    <a:bodyPr wrap="square"/>
+                    <a:lstStyle/>
+                    <a:p>
+                      <a:pPr algn="l"/>
+                      <a:r>
+                        <a:rPr sz="1250" b="1">
+                          <a:solidFill>
+                            <a:srgbClr val="FFFFFF"/>
+                          </a:solidFill>
+                          <a:latin typeface="Microsoft YaHei"/>
+                        </a:rPr>
+                        <a:t>情景</a:t>
+                      </a:r>
+                    </a:p>
+                  </a:txBody>
+                  <a:tcPr marL="54864" marR="54864" marT="18288" marB="18288" anchor="ctr">
+                    <a:solidFill>
+                      <a:srgbClr val="16213E"/>
+                    </a:solidFill>
+                  </a:tcPr>
+                </a:tc>
+                <a:tc>
+                  <a:txBody>
+                    <a:bodyPr wrap="square"/>
+                    <a:lstStyle/>
+                    <a:p>
+                      <a:pPr algn="l"/>
+                      <a:r>
+                        <a:rPr sz="1250" b="1">
+                          <a:solidFill>
+                            <a:srgbClr val="FFFFFF"/>
+                          </a:solidFill>
+                          <a:latin typeface="Microsoft YaHei"/>
+                        </a:rPr>
+                        <a:t>概率</a:t>
+                      </a:r>
+                    </a:p>
+                  </a:txBody>
+                  <a:tcPr marL="54864" marR="54864" marT="18288" marB="18288" anchor="ctr">
+                    <a:solidFill>
+                      <a:srgbClr val="16213E"/>
+                    </a:solidFill>
+                  </a:tcPr>
+                </a:tc>
+                <a:tc>
+                  <a:txBody>
+                    <a:bodyPr wrap="square"/>
+                    <a:lstStyle/>
+                    <a:p>
+                      <a:pPr algn="l"/>
+                      <a:r>
+                        <a:rPr sz="1250" b="1">
+                          <a:solidFill>
+                            <a:srgbClr val="FFFFFF"/>
+                          </a:solidFill>
+                          <a:latin typeface="Microsoft YaHei"/>
+                        </a:rPr>
+                        <a:t>核心条件</a:t>
+                      </a:r>
+                    </a:p>
+                  </a:txBody>
+                  <a:tcPr marL="54864" marR="54864" marT="18288" marB="18288" anchor="ctr">
+                    <a:solidFill>
+                      <a:srgbClr val="16213E"/>
+                    </a:solidFill>
+                  </a:tcPr>
+                </a:tc>
+                <a:tc>
+                  <a:txBody>
+                    <a:bodyPr wrap="square"/>
+                    <a:lstStyle/>
+                    <a:p>
+                      <a:pPr algn="l"/>
+                      <a:r>
+                        <a:rPr sz="1250" b="1">
+                          <a:solidFill>
+                            <a:srgbClr val="FFFFFF"/>
+                          </a:solidFill>
+                          <a:latin typeface="Microsoft YaHei"/>
+                        </a:rPr>
+                        <a:t>估值含义</a:t>
+                      </a:r>
+                    </a:p>
+                  </a:txBody>
+                  <a:tcPr marL="54864" marR="54864" marT="18288" marB="18288" anchor="ctr">
+                    <a:solidFill>
+                      <a:srgbClr val="16213E"/>
+                    </a:solidFill>
+                  </a:tcPr>
+                </a:tc>
+              </a:tr>
+              <a:tr h="685800">
+                <a:tc>
+                  <a:txBody>
+                    <a:bodyPr wrap="square"/>
+                    <a:lstStyle/>
+                    <a:p>
+                      <a:pPr algn="l"/>
+                      <a:r>
+                        <a:rPr sz="1250" b="0">
+                          <a:solidFill>
+                            <a:srgbClr val="16213E"/>
+                          </a:solidFill>
+                          <a:latin typeface="Microsoft YaHei"/>
+                        </a:rPr>
+                        <a:t>牛</a:t>
+                      </a:r>
+                    </a:p>
+                  </a:txBody>
+                  <a:tcPr marL="54864" marR="54864" marT="18288" marB="18288" anchor="ctr">
+                    <a:solidFill>
+                      <a:srgbClr val="FFFFFF"/>
+                    </a:solidFill>
+                  </a:tcPr>
+                </a:tc>
+                <a:tc>
+                  <a:txBody>
+                    <a:bodyPr wrap="square"/>
+                    <a:lstStyle/>
+                    <a:p>
+                      <a:pPr algn="r"/>
+                      <a:r>
+                        <a:rPr sz="1250" b="0">
+                          <a:solidFill>
+                            <a:srgbClr val="16213E"/>
+                          </a:solidFill>
+                          <a:latin typeface="Microsoft YaHei"/>
+                        </a:rPr>
+                        <a:t>25%</a:t>
+                      </a:r>
+                    </a:p>
+                  </a:txBody>
+                  <a:tcPr marL="54864" marR="54864" marT="18288" marB="18288" anchor="ctr">
+                    <a:solidFill>
+                      <a:srgbClr val="FFFFFF"/>
+                    </a:solidFill>
+                  </a:tcPr>
+                </a:tc>
+                <a:tc>
+                  <a:txBody>
+                    <a:bodyPr wrap="square"/>
+                    <a:lstStyle/>
+                    <a:p>
+                      <a:pPr algn="l"/>
+                      <a:r>
+                        <a:rPr sz="1250" b="0">
+                          <a:solidFill>
+                            <a:srgbClr val="16213E"/>
+                          </a:solidFill>
+                          <a:latin typeface="Microsoft YaHei"/>
+                        </a:rPr>
+                        <a:t>海外To C放量+M系列生态成形，2030前路径清晰转盈</a:t>
+                      </a:r>
+                    </a:p>
+                  </a:txBody>
+                  <a:tcPr marL="54864" marR="54864" marT="18288" marB="18288" anchor="ctr">
+                    <a:solidFill>
+                      <a:srgbClr val="FFFFFF"/>
+                    </a:solidFill>
+                  </a:tcPr>
+                </a:tc>
+                <a:tc>
+                  <a:txBody>
+                    <a:bodyPr wrap="square"/>
+                    <a:lstStyle/>
+                    <a:p>
+                      <a:pPr algn="l"/>
+                      <a:r>
+                        <a:rPr sz="1250" b="0">
+                          <a:solidFill>
+                            <a:srgbClr val="16213E"/>
+                          </a:solidFill>
+                          <a:latin typeface="Microsoft YaHei"/>
+                        </a:rPr>
+                        <a:t>重估为区域多模态赢家，上行空间大</a:t>
+                      </a:r>
+                    </a:p>
+                  </a:txBody>
+                  <a:tcPr marL="54864" marR="54864" marT="18288" marB="18288" anchor="ctr">
+                    <a:solidFill>
+                      <a:srgbClr val="FFFFFF"/>
+                    </a:solidFill>
+                  </a:tcPr>
+                </a:tc>
+              </a:tr>
+              <a:tr h="685800">
+                <a:tc>
+                  <a:txBody>
+                    <a:bodyPr wrap="square"/>
+                    <a:lstStyle/>
+                    <a:p>
+                      <a:pPr algn="l"/>
+                      <a:r>
+                        <a:rPr sz="1250" b="0">
+                          <a:solidFill>
+                            <a:srgbClr val="16213E"/>
+                          </a:solidFill>
+                          <a:latin typeface="Microsoft YaHei"/>
+                        </a:rPr>
+                        <a:t>中</a:t>
+                      </a:r>
+                    </a:p>
+                  </a:txBody>
+                  <a:tcPr marL="54864" marR="54864" marT="18288" marB="18288" anchor="ctr">
+                    <a:solidFill>
+                      <a:srgbClr val="E9EBEF"/>
+                    </a:solidFill>
+                  </a:tcPr>
+                </a:tc>
+                <a:tc>
+                  <a:txBody>
+                    <a:bodyPr wrap="square"/>
+                    <a:lstStyle/>
+                    <a:p>
+                      <a:pPr algn="r"/>
+                      <a:r>
+                        <a:rPr sz="1250" b="0">
+                          <a:solidFill>
+                            <a:srgbClr val="16213E"/>
+                          </a:solidFill>
+                          <a:latin typeface="Microsoft YaHei"/>
+                        </a:rPr>
+                        <a:t>45%</a:t>
+                      </a:r>
+                    </a:p>
+                  </a:txBody>
+                  <a:tcPr marL="54864" marR="54864" marT="18288" marB="18288" anchor="ctr">
+                    <a:solidFill>
+                      <a:srgbClr val="E9EBEF"/>
+                    </a:solidFill>
+                  </a:tcPr>
+                </a:tc>
+                <a:tc>
+                  <a:txBody>
+                    <a:bodyPr wrap="square"/>
+                    <a:lstStyle/>
+                    <a:p>
+                      <a:pPr algn="l"/>
+                      <a:r>
+                        <a:rPr sz="1250" b="0">
+                          <a:solidFill>
+                            <a:srgbClr val="16213E"/>
+                          </a:solidFill>
+                          <a:latin typeface="Microsoft YaHei"/>
+                        </a:rPr>
+                        <a:t>维持高增但盈利后移，烧钱与融资稀释并存</a:t>
+                      </a:r>
+                    </a:p>
+                  </a:txBody>
+                  <a:tcPr marL="54864" marR="54864" marT="18288" marB="18288" anchor="ctr">
+                    <a:solidFill>
+                      <a:srgbClr val="E9EBEF"/>
+                    </a:solidFill>
+                  </a:tcPr>
+                </a:tc>
+                <a:tc>
+                  <a:txBody>
+                    <a:bodyPr wrap="square"/>
+                    <a:lstStyle/>
+                    <a:p>
+                      <a:pPr algn="l"/>
+                      <a:r>
+                        <a:rPr sz="1250" b="0">
+                          <a:solidFill>
+                            <a:srgbClr val="16213E"/>
+                          </a:solidFill>
+                          <a:latin typeface="Microsoft YaHei"/>
+                        </a:rPr>
+                        <a:t>随增长与情绪宽幅震荡，估值难算清</a:t>
+                      </a:r>
+                    </a:p>
+                  </a:txBody>
+                  <a:tcPr marL="54864" marR="54864" marT="18288" marB="18288" anchor="ctr">
+                    <a:solidFill>
+                      <a:srgbClr val="E9EBEF"/>
+                    </a:solidFill>
+                  </a:tcPr>
+                </a:tc>
+              </a:tr>
+              <a:tr h="685800">
+                <a:tc>
+                  <a:txBody>
+                    <a:bodyPr wrap="square"/>
+                    <a:lstStyle/>
+                    <a:p>
+                      <a:pPr algn="l"/>
+                      <a:r>
+                        <a:rPr sz="1250" b="0">
+                          <a:solidFill>
+                            <a:srgbClr val="16213E"/>
+                          </a:solidFill>
+                          <a:latin typeface="Microsoft YaHei"/>
+                        </a:rPr>
+                        <a:t>熊</a:t>
+                      </a:r>
+                    </a:p>
+                  </a:txBody>
+                  <a:tcPr marL="54864" marR="54864" marT="18288" marB="18288" anchor="ctr">
+                    <a:solidFill>
+                      <a:srgbClr val="FFFFFF"/>
+                    </a:solidFill>
+                  </a:tcPr>
+                </a:tc>
+                <a:tc>
+                  <a:txBody>
+                    <a:bodyPr wrap="square"/>
+                    <a:lstStyle/>
+                    <a:p>
+                      <a:pPr algn="r"/>
+                      <a:r>
+                        <a:rPr sz="1250" b="0">
+                          <a:solidFill>
+                            <a:srgbClr val="16213E"/>
+                          </a:solidFill>
+                          <a:latin typeface="Microsoft YaHei"/>
+                        </a:rPr>
+                        <a:t>30%</a:t>
+                      </a:r>
+                    </a:p>
+                  </a:txBody>
+                  <a:tcPr marL="54864" marR="54864" marT="18288" marB="18288" anchor="ctr">
+                    <a:solidFill>
+                      <a:srgbClr val="FFFFFF"/>
+                    </a:solidFill>
+                  </a:tcPr>
+                </a:tc>
+                <a:tc>
+                  <a:txBody>
+                    <a:bodyPr wrap="square"/>
+                    <a:lstStyle/>
+                    <a:p>
+                      <a:pPr algn="l"/>
+                      <a:r>
+                        <a:rPr sz="1250" b="0">
+                          <a:solidFill>
+                            <a:srgbClr val="16213E"/>
+                          </a:solidFill>
+                          <a:latin typeface="Microsoft YaHei"/>
+                        </a:rPr>
+                        <a:t>增速换挡+大厂/开源挤压+海外受阻，盈利遥遥无期</a:t>
+                      </a:r>
+                    </a:p>
+                  </a:txBody>
+                  <a:tcPr marL="54864" marR="54864" marT="18288" marB="18288" anchor="ctr">
+                    <a:solidFill>
+                      <a:srgbClr val="FFFFFF"/>
+                    </a:solidFill>
+                  </a:tcPr>
+                </a:tc>
+                <a:tc>
+                  <a:txBody>
+                    <a:bodyPr wrap="square"/>
+                    <a:lstStyle/>
+                    <a:p>
+                      <a:pPr algn="l"/>
+                      <a:r>
+                        <a:rPr sz="1250" b="0">
+                          <a:solidFill>
+                            <a:srgbClr val="16213E"/>
+                          </a:solidFill>
+                          <a:latin typeface="Microsoft YaHei"/>
+                        </a:rPr>
+                        <a:t>P/S 大幅压缩，持续融资稀释股东</a:t>
+                      </a:r>
+                    </a:p>
+                  </a:txBody>
+                  <a:tcPr marL="54864" marR="54864" marT="18288" marB="18288" anchor="ctr">
+                    <a:solidFill>
+                      <a:srgbClr val="FFFFFF"/>
+                    </a:solidFill>
+                  </a:tcPr>
+                </a:tc>
+              </a:tr>
+            </a:tbl>
+          </a:graphicData>
+        </a:graphic>
+      </p:graphicFrame>
+      <p:sp>
+        <p:nvSpPr>
+          <p:cNvPr id="5" name="TextBox 4"/>
+          <p:cNvSpPr txBox="1"/>
+          <p:nvPr/>
+        </p:nvSpPr>
+        <p:spPr>
+          <a:xfrm>
+            <a:off x="457200" y="4663440"/>
+            <a:ext cx="11247120" cy="1463040"/>
+          </a:xfrm>
+          <a:prstGeom prst="rect">
+            <a:avLst/>
+          </a:prstGeom>
+          <a:noFill/>
+        </p:spPr>
+        <p:txBody>
+          <a:bodyPr wrap="square">
+            <a:spAutoFit/>
+          </a:bodyPr>
+          <a:lstStyle/>
+          <a:p>
+            <a:pPr algn="l">
+              <a:spcAft>
+                <a:spcPts val="700"/>
+              </a:spcAft>
+            </a:pPr>
+            <a:r>
+              <a:rPr sz="1600" b="1">
+                <a:solidFill>
+                  <a:srgbClr val="16213E"/>
+                </a:solidFill>
+                <a:latin typeface="Microsoft YaHei"/>
+              </a:rPr>
+              <a:t>给个人投资者的提醒</a:t>
+            </a:r>
+          </a:p>
+          <a:p>
+            <a:pPr algn="l">
+              <a:spcAft>
+                <a:spcPts val="700"/>
+              </a:spcAft>
+            </a:pPr>
+            <a:r>
+              <a:rPr sz="1250" b="0">
+                <a:solidFill>
+                  <a:srgbClr val="6B707B"/>
+                </a:solidFill>
+                <a:latin typeface="Microsoft YaHei"/>
+              </a:rPr>
+              <a:t>• 这不是靠 DCF/财报算清的标的，仓位与风险敞口比“目标价”更重要；把它当高波动成长期权对待。</a:t>
+            </a:r>
+          </a:p>
+          <a:p>
+            <a:pPr algn="l">
+              <a:spcAft>
+                <a:spcPts val="700"/>
+              </a:spcAft>
+            </a:pPr>
+            <a:r>
+              <a:rPr sz="1250" b="0">
+                <a:solidFill>
+                  <a:srgbClr val="6B707B"/>
+                </a:solidFill>
+                <a:latin typeface="Microsoft YaHei"/>
+              </a:rPr>
+              <a:t>• 最值得跟踪三件事：① 亏损率拐点 ② 海外收入占比与付费转化 ③ 第二曲线（企业/开放平台）放量。</a:t>
+            </a:r>
+          </a:p>
+        </p:txBody>
+      </p:sp>
+      <p:sp>
+        <p:nvSpPr>
+          <p:cNvPr id="6" name="TextBox 5"/>
+          <p:cNvSpPr txBox="1"/>
+          <p:nvPr/>
+        </p:nvSpPr>
+        <p:spPr>
+          <a:xfrm>
+            <a:off x="457200" y="6455664"/>
+            <a:ext cx="11338560" cy="365760"/>
+          </a:xfrm>
+          <a:prstGeom prst="rect">
+            <a:avLst/>
+          </a:prstGeom>
+          <a:noFill/>
+        </p:spPr>
+        <p:txBody>
+          <a:bodyPr wrap="square">
+            <a:spAutoFit/>
+          </a:bodyPr>
+          <a:lstStyle/>
+          <a:p>
+            <a:pPr algn="l"/>
+            <a:r>
+              <a:rPr sz="900" b="0">
+                <a:solidFill>
+                  <a:srgbClr val="6B707B"/>
+                </a:solidFill>
+                <a:latin typeface="Microsoft YaHei"/>
+              </a:rPr>
+              <a:t>演示性情景与概率为作者主观假设 [E]，不构成投资建议</a:t>
+            </a:r>
+          </a:p>
+        </p:txBody>
+      </p:sp>
+    </p:spTree>
+  </p:cSld>
+  <p:clrMapOvr>
+    <a:masterClrMapping/>
+  </p:clrMapOvr>
+</p:sld>
+</file>
+
+<file path=ppt/slides/slide18.xml><?xml version="1.0" encoding="utf-8"?>
+<p:sld xmlns:a="http://schemas.openxmlformats.org/drawingml/2006/main" xmlns:p="http://schemas.openxmlformats.org/presentationml/2006/main" xmlns:r="http://schemas.openxmlformats.org/officeDocument/2006/relationships">
+  <p:cSld>
+    <p:spTree>
+      <p:nvGrpSpPr>
+        <p:cNvPr id="1" name=""/>
+        <p:cNvGrpSpPr/>
+        <p:nvPr/>
+      </p:nvGrpSpPr>
+      <p:grpSpPr/>
+      <p:sp>
+        <p:nvSpPr>
+          <p:cNvPr id="2" name="Rectangle 1"/>
+          <p:cNvSpPr/>
+          <p:nvPr/>
+        </p:nvSpPr>
+        <p:spPr>
+          <a:xfrm>
+            <a:off x="0" y="0"/>
+            <a:ext cx="12191695" cy="109728"/>
+          </a:xfrm>
+          <a:prstGeom prst="rect">
+            <a:avLst/>
+          </a:prstGeom>
+          <a:solidFill>
+            <a:srgbClr val="2E86C1"/>
+          </a:solidFill>
+          <a:ln>
+            <a:noFill/>
+          </a:ln>
+        </p:spPr>
+        <p:style>
+          <a:lnRef idx="1">
+            <a:schemeClr val="accent1"/>
+          </a:lnRef>
+          <a:fillRef idx="3">
+            <a:schemeClr val="accent1"/>
+          </a:fillRef>
+          <a:effectRef idx="2">
+            <a:schemeClr val="accent1"/>
+          </a:effectRef>
+          <a:fontRef idx="minor">
+            <a:schemeClr val="lt1"/>
+          </a:fontRef>
+        </p:style>
+        <p:txBody>
+          <a:bodyPr rtlCol="0" anchor="ctr"/>
+          <a:lstStyle/>
+          <a:p>
+            <a:pPr algn="ctr"/>
+          </a:p>
+        </p:txBody>
+      </p:sp>
+      <p:sp>
+        <p:nvSpPr>
+          <p:cNvPr id="3" name="TextBox 2"/>
+          <p:cNvSpPr txBox="1"/>
+          <p:nvPr/>
+        </p:nvSpPr>
+        <p:spPr>
+          <a:xfrm>
+            <a:off x="457200" y="219456"/>
+            <a:ext cx="11338560" cy="914400"/>
+          </a:xfrm>
+          <a:prstGeom prst="rect">
+            <a:avLst/>
+          </a:prstGeom>
+          <a:noFill/>
+        </p:spPr>
+        <p:txBody>
+          <a:bodyPr wrap="square">
+            <a:spAutoFit/>
+          </a:bodyPr>
+          <a:lstStyle/>
+          <a:p>
+            <a:pPr algn="l"/>
+            <a:r>
+              <a:rPr sz="2500" b="1">
                 <a:solidFill>
                   <a:srgbClr val="16213E"/>
                 </a:solidFill>
@@ -7272,7 +9172,7 @@
           <a:p>
             <a:pPr algn="l">
               <a:spcAft>
-                <a:spcPts val="800"/>
+                <a:spcPts val="700"/>
               </a:spcAft>
             </a:pPr>
             <a:r>
@@ -7288,7 +9188,7 @@
           <a:p>
             <a:pPr algn="l">
               <a:spcAft>
-                <a:spcPts val="800"/>
+                <a:spcPts val="700"/>
               </a:spcAft>
             </a:pPr>
             <a:r>
@@ -7298,13 +9198,13 @@
                 </a:solidFill>
                 <a:latin typeface="Microsoft YaHei"/>
               </a:rPr>
-              <a:t>• MiniMax (稀宇科技) 港交所招股书 (2025-12) 及上市后业绩公告</a:t>
+              <a:t>• MiniMax / 智谱 / 阶跃星辰 港交所招股书及融资公告；月之暗面历轮融资报道</a:t>
             </a:r>
           </a:p>
           <a:p>
             <a:pPr algn="l">
               <a:spcAft>
-                <a:spcPts val="800"/>
+                <a:spcPts val="700"/>
               </a:spcAft>
             </a:pPr>
             <a:r>
@@ -7314,13 +9214,13 @@
                 </a:solidFill>
                 <a:latin typeface="Microsoft YaHei"/>
               </a:rPr>
-              <a:t>• 量子位、新浪财经、证券时报、21经济网、澎湃新闻、InfoQ、财联社、新华网</a:t>
+              <a:t>• 量子位、新浪财经、证券时报、21经济网、澎湃新闻、InfoQ、财联社、智东西、投资界、财经网</a:t>
             </a:r>
           </a:p>
           <a:p>
             <a:pPr algn="l">
               <a:spcAft>
-                <a:spcPts val="800"/>
+                <a:spcPts val="700"/>
               </a:spcAft>
             </a:pPr>
             <a:r>
@@ -7330,36 +9230,20 @@
                 </a:solidFill>
                 <a:latin typeface="Microsoft YaHei"/>
               </a:rPr>
-              <a:t>• QuestMobile（月活数据）；人人都是产品经理《2026国产大模型选型地图》</a:t>
+              <a:t>• QuestMobile（月活）；人人都是产品经理《2026国产大模型选型地图》；Caproasia / Douglas Research</a:t>
             </a:r>
           </a:p>
           <a:p>
             <a:pPr algn="l">
               <a:spcAft>
-                <a:spcPts val="800"/>
+                <a:spcPts val="700"/>
               </a:spcAft>
             </a:pPr>
-            <a:r>
-              <a:rPr sz="1300" b="0">
-                <a:solidFill>
-                  <a:srgbClr val="6B707B"/>
-                </a:solidFill>
-                <a:latin typeface="Microsoft YaHei"/>
-              </a:rPr>
-              <a:t>• Caproasia / Douglas Research（IPO 估值与募资）</a:t>
-            </a:r>
           </a:p>
           <a:p>
             <a:pPr algn="l">
               <a:spcAft>
-                <a:spcPts val="800"/>
-              </a:spcAft>
-            </a:pPr>
-          </a:p>
-          <a:p>
-            <a:pPr algn="l">
-              <a:spcAft>
-                <a:spcPts val="800"/>
+                <a:spcPts val="700"/>
               </a:spcAft>
             </a:pPr>
             <a:r>
@@ -7375,7 +9259,7 @@
           <a:p>
             <a:pPr algn="l">
               <a:spcAft>
-                <a:spcPts val="800"/>
+                <a:spcPts val="700"/>
               </a:spcAft>
             </a:pPr>
             <a:r>
@@ -7385,13 +9269,13 @@
                 </a:solidFill>
                 <a:latin typeface="Microsoft YaHei"/>
               </a:rPr>
-              <a:t>本报告由 AI 基于公开来源整理。财报前瞻假设、DCF 测算（营收/利润率/WACC/终值）、竞争打分与情景概率均为演示性估计 [E]，</a:t>
+              <a:t>本报告由 AI 基于公开来源整理。财报前瞻、DCF（营收/利润率/WACC/终值）、竞争打分、情景概率及部分同业估值均为</a:t>
             </a:r>
           </a:p>
           <a:p>
             <a:pPr algn="l">
               <a:spcAft>
-                <a:spcPts val="800"/>
+                <a:spcPts val="700"/>
               </a:spcAft>
             </a:pPr>
             <a:r>
@@ -7401,13 +9285,13 @@
                 </a:solidFill>
                 <a:latin typeface="Microsoft YaHei"/>
               </a:rPr>
-              <a:t>可能存在重大误差或时效偏差。DCF 对早期亏损 AI 公司参考性有限，已在正文充分提示。本报告不构成任何投资建议，</a:t>
+              <a:t>演示性估计或未证实报道 [E]，可能存在重大误差或时效偏差。DCF 对早期亏损 AI 公司参考性有限，已在正文充分提示。</a:t>
             </a:r>
           </a:p>
           <a:p>
             <a:pPr algn="l">
               <a:spcAft>
-                <a:spcPts val="800"/>
+                <a:spcPts val="700"/>
               </a:spcAft>
             </a:pPr>
             <a:r>
@@ -7417,7 +9301,7 @@
                 </a:solidFill>
                 <a:latin typeface="Microsoft YaHei"/>
               </a:rPr>
-              <a:t>投资决策请以公司正式披露文件及专业意见为准。</a:t>
+              <a:t>本报告不构成任何投资建议，投资决策请以公司正式披露文件及专业意见为准。</a:t>
             </a:r>
           </a:p>
         </p:txBody>
@@ -7491,7 +9375,7 @@
         </p:nvSpPr>
         <p:spPr>
           <a:xfrm>
-            <a:off x="457200" y="237744"/>
+            <a:off x="457200" y="219456"/>
             <a:ext cx="11338560" cy="914400"/>
           </a:xfrm>
           <a:prstGeom prst="rect">
@@ -7507,7 +9391,7 @@
           <a:p>
             <a:pPr algn="l"/>
             <a:r>
-              <a:rPr sz="2600" b="1">
+              <a:rPr sz="2500" b="1">
                 <a:solidFill>
                   <a:srgbClr val="16213E"/>
                 </a:solidFill>
@@ -7558,7 +9442,7 @@
                       </a:r>
                     </a:p>
                   </a:txBody>
-                  <a:tcPr marL="64008" marR="64008" marT="18288" marB="18288" anchor="ctr">
+                  <a:tcPr marL="54864" marR="54864" marT="18288" marB="18288" anchor="ctr">
                     <a:solidFill>
                       <a:srgbClr val="16213E"/>
                     </a:solidFill>
@@ -7581,7 +9465,7 @@
                       </a:r>
                     </a:p>
                   </a:txBody>
-                  <a:tcPr marL="64008" marR="64008" marT="18288" marB="18288" anchor="ctr">
+                  <a:tcPr marL="54864" marR="54864" marT="18288" marB="18288" anchor="ctr">
                     <a:solidFill>
                       <a:srgbClr val="16213E"/>
                     </a:solidFill>
@@ -7606,7 +9490,7 @@
                       </a:r>
                     </a:p>
                   </a:txBody>
-                  <a:tcPr marL="64008" marR="64008" marT="18288" marB="18288" anchor="ctr">
+                  <a:tcPr marL="54864" marR="54864" marT="18288" marB="18288" anchor="ctr">
                     <a:solidFill>
                       <a:srgbClr val="FFFFFF"/>
                     </a:solidFill>
@@ -7629,7 +9513,7 @@
                       </a:r>
                     </a:p>
                   </a:txBody>
-                  <a:tcPr marL="64008" marR="64008" marT="18288" marB="18288" anchor="ctr">
+                  <a:tcPr marL="54864" marR="54864" marT="18288" marB="18288" anchor="ctr">
                     <a:solidFill>
                       <a:srgbClr val="FFFFFF"/>
                     </a:solidFill>
@@ -7654,7 +9538,7 @@
                       </a:r>
                     </a:p>
                   </a:txBody>
-                  <a:tcPr marL="64008" marR="64008" marT="18288" marB="18288" anchor="ctr">
+                  <a:tcPr marL="54864" marR="54864" marT="18288" marB="18288" anchor="ctr">
                     <a:solidFill>
                       <a:srgbClr val="E9EBEF"/>
                     </a:solidFill>
@@ -7677,7 +9561,7 @@
                       </a:r>
                     </a:p>
                   </a:txBody>
-                  <a:tcPr marL="64008" marR="64008" marT="18288" marB="18288" anchor="ctr">
+                  <a:tcPr marL="54864" marR="54864" marT="18288" marB="18288" anchor="ctr">
                     <a:solidFill>
                       <a:srgbClr val="E9EBEF"/>
                     </a:solidFill>
@@ -7702,7 +9586,7 @@
                       </a:r>
                     </a:p>
                   </a:txBody>
-                  <a:tcPr marL="64008" marR="64008" marT="18288" marB="18288" anchor="ctr">
+                  <a:tcPr marL="54864" marR="54864" marT="18288" marB="18288" anchor="ctr">
                     <a:solidFill>
                       <a:srgbClr val="FFFFFF"/>
                     </a:solidFill>
@@ -7725,7 +9609,7 @@
                       </a:r>
                     </a:p>
                   </a:txBody>
-                  <a:tcPr marL="64008" marR="64008" marT="18288" marB="18288" anchor="ctr">
+                  <a:tcPr marL="54864" marR="54864" marT="18288" marB="18288" anchor="ctr">
                     <a:solidFill>
                       <a:srgbClr val="FFFFFF"/>
                     </a:solidFill>
@@ -7750,7 +9634,7 @@
                       </a:r>
                     </a:p>
                   </a:txBody>
-                  <a:tcPr marL="64008" marR="64008" marT="18288" marB="18288" anchor="ctr">
+                  <a:tcPr marL="54864" marR="54864" marT="18288" marB="18288" anchor="ctr">
                     <a:solidFill>
                       <a:srgbClr val="E9EBEF"/>
                     </a:solidFill>
@@ -7773,7 +9657,7 @@
                       </a:r>
                     </a:p>
                   </a:txBody>
-                  <a:tcPr marL="64008" marR="64008" marT="18288" marB="18288" anchor="ctr">
+                  <a:tcPr marL="54864" marR="54864" marT="18288" marB="18288" anchor="ctr">
                     <a:solidFill>
                       <a:srgbClr val="E9EBEF"/>
                     </a:solidFill>
@@ -7798,7 +9682,7 @@
                       </a:r>
                     </a:p>
                   </a:txBody>
-                  <a:tcPr marL="64008" marR="64008" marT="18288" marB="18288" anchor="ctr">
+                  <a:tcPr marL="54864" marR="54864" marT="18288" marB="18288" anchor="ctr">
                     <a:solidFill>
                       <a:srgbClr val="FFFFFF"/>
                     </a:solidFill>
@@ -7821,7 +9705,7 @@
                       </a:r>
                     </a:p>
                   </a:txBody>
-                  <a:tcPr marL="64008" marR="64008" marT="18288" marB="18288" anchor="ctr">
+                  <a:tcPr marL="54864" marR="54864" marT="18288" marB="18288" anchor="ctr">
                     <a:solidFill>
                       <a:srgbClr val="FFFFFF"/>
                     </a:solidFill>
@@ -7846,7 +9730,7 @@
                       </a:r>
                     </a:p>
                   </a:txBody>
-                  <a:tcPr marL="64008" marR="64008" marT="18288" marB="18288" anchor="ctr">
+                  <a:tcPr marL="54864" marR="54864" marT="18288" marB="18288" anchor="ctr">
                     <a:solidFill>
                       <a:srgbClr val="E9EBEF"/>
                     </a:solidFill>
@@ -7869,7 +9753,7 @@
                       </a:r>
                     </a:p>
                   </a:txBody>
-                  <a:tcPr marL="64008" marR="64008" marT="18288" marB="18288" anchor="ctr">
+                  <a:tcPr marL="54864" marR="54864" marT="18288" marB="18288" anchor="ctr">
                     <a:solidFill>
                       <a:srgbClr val="E9EBEF"/>
                     </a:solidFill>
@@ -7904,7 +9788,7 @@
           <a:p>
             <a:pPr algn="l">
               <a:spcAft>
-                <a:spcPts val="800"/>
+                <a:spcPts val="700"/>
               </a:spcAft>
             </a:pPr>
             <a:r>
@@ -7920,7 +9804,7 @@
           <a:p>
             <a:pPr algn="l">
               <a:spcAft>
-                <a:spcPts val="800"/>
+                <a:spcPts val="700"/>
               </a:spcAft>
             </a:pPr>
             <a:r>
@@ -7930,13 +9814,13 @@
                 </a:solidFill>
                 <a:latin typeface="Microsoft YaHei"/>
               </a:rPr>
-              <a:t>数据扎实的部分：营收高增、To C + 出海差异化、多模态（视频/语音/陪伴）产品矩阵领先。</a:t>
+              <a:t>数据扎实：营收高增、To C + 出海差异化、多模态（视频/语音/陪伴）产品矩阵领先。</a:t>
             </a:r>
           </a:p>
           <a:p>
             <a:pPr algn="l">
               <a:spcAft>
-                <a:spcPts val="800"/>
+                <a:spcPts val="700"/>
               </a:spcAft>
             </a:pPr>
             <a:r>
@@ -7952,7 +9836,7 @@
           <a:p>
             <a:pPr algn="l">
               <a:spcAft>
-                <a:spcPts val="800"/>
+                <a:spcPts val="700"/>
               </a:spcAft>
             </a:pPr>
             <a:r>
@@ -7962,7 +9846,7 @@
                 </a:solidFill>
                 <a:latin typeface="Microsoft YaHei"/>
               </a:rPr>
-              <a:t>传统 DCF 在此失效（见 DCF 章节）——这是一笔“长期期权”，不是现金流折现能算清的标的。</a:t>
+              <a:t>即便把 DCF 显性期拉到 10 年（见后），估值仍只到市值约 40%——这是一笔“长期期权”。</a:t>
             </a:r>
           </a:p>
         </p:txBody>
@@ -7975,7 +9859,7 @@
         </p:nvSpPr>
         <p:spPr>
           <a:xfrm>
-            <a:off x="457200" y="6437376"/>
+            <a:off x="457200" y="6455664"/>
             <a:ext cx="11338560" cy="365760"/>
           </a:xfrm>
           <a:prstGeom prst="rect">
@@ -8071,7 +9955,7 @@
         </p:nvSpPr>
         <p:spPr>
           <a:xfrm>
-            <a:off x="457200" y="237744"/>
+            <a:off x="457200" y="219456"/>
             <a:ext cx="11338560" cy="914400"/>
           </a:xfrm>
           <a:prstGeom prst="rect">
@@ -8087,7 +9971,7 @@
           <a:p>
             <a:pPr algn="l"/>
             <a:r>
-              <a:rPr sz="2600" b="1">
+              <a:rPr sz="2500" b="1">
                 <a:solidFill>
                   <a:srgbClr val="16213E"/>
                 </a:solidFill>
@@ -8099,7 +9983,7 @@
           <a:p>
             <a:pPr algn="l"/>
             <a:r>
-              <a:rPr sz="1400" b="0">
+              <a:rPr sz="1350" b="0">
                 <a:solidFill>
                   <a:srgbClr val="6B707B"/>
                 </a:solidFill>
@@ -8150,7 +10034,7 @@
                       </a:r>
                     </a:p>
                   </a:txBody>
-                  <a:tcPr marL="64008" marR="64008" marT="18288" marB="18288" anchor="ctr">
+                  <a:tcPr marL="54864" marR="54864" marT="18288" marB="18288" anchor="ctr">
                     <a:solidFill>
                       <a:srgbClr val="16213E"/>
                     </a:solidFill>
@@ -8173,7 +10057,7 @@
                       </a:r>
                     </a:p>
                   </a:txBody>
-                  <a:tcPr marL="64008" marR="64008" marT="18288" marB="18288" anchor="ctr">
+                  <a:tcPr marL="54864" marR="54864" marT="18288" marB="18288" anchor="ctr">
                     <a:solidFill>
                       <a:srgbClr val="16213E"/>
                     </a:solidFill>
@@ -8198,7 +10082,7 @@
                       </a:r>
                     </a:p>
                   </a:txBody>
-                  <a:tcPr marL="64008" marR="64008" marT="18288" marB="18288" anchor="ctr">
+                  <a:tcPr marL="54864" marR="54864" marT="18288" marB="18288" anchor="ctr">
                     <a:solidFill>
                       <a:srgbClr val="FFFFFF"/>
                     </a:solidFill>
@@ -8221,7 +10105,7 @@
                       </a:r>
                     </a:p>
                   </a:txBody>
-                  <a:tcPr marL="64008" marR="64008" marT="18288" marB="18288" anchor="ctr">
+                  <a:tcPr marL="54864" marR="54864" marT="18288" marB="18288" anchor="ctr">
                     <a:solidFill>
                       <a:srgbClr val="FFFFFF"/>
                     </a:solidFill>
@@ -8246,7 +10130,7 @@
                       </a:r>
                     </a:p>
                   </a:txBody>
-                  <a:tcPr marL="64008" marR="64008" marT="18288" marB="18288" anchor="ctr">
+                  <a:tcPr marL="54864" marR="54864" marT="18288" marB="18288" anchor="ctr">
                     <a:solidFill>
                       <a:srgbClr val="E9EBEF"/>
                     </a:solidFill>
@@ -8269,7 +10153,7 @@
                       </a:r>
                     </a:p>
                   </a:txBody>
-                  <a:tcPr marL="64008" marR="64008" marT="18288" marB="18288" anchor="ctr">
+                  <a:tcPr marL="54864" marR="54864" marT="18288" marB="18288" anchor="ctr">
                     <a:solidFill>
                       <a:srgbClr val="E9EBEF"/>
                     </a:solidFill>
@@ -8294,7 +10178,7 @@
                       </a:r>
                     </a:p>
                   </a:txBody>
-                  <a:tcPr marL="64008" marR="64008" marT="18288" marB="18288" anchor="ctr">
+                  <a:tcPr marL="54864" marR="54864" marT="18288" marB="18288" anchor="ctr">
                     <a:solidFill>
                       <a:srgbClr val="FFFFFF"/>
                     </a:solidFill>
@@ -8317,7 +10201,7 @@
                       </a:r>
                     </a:p>
                   </a:txBody>
-                  <a:tcPr marL="64008" marR="64008" marT="18288" marB="18288" anchor="ctr">
+                  <a:tcPr marL="54864" marR="54864" marT="18288" marB="18288" anchor="ctr">
                     <a:solidFill>
                       <a:srgbClr val="FFFFFF"/>
                     </a:solidFill>
@@ -8342,7 +10226,7 @@
                       </a:r>
                     </a:p>
                   </a:txBody>
-                  <a:tcPr marL="64008" marR="64008" marT="18288" marB="18288" anchor="ctr">
+                  <a:tcPr marL="54864" marR="54864" marT="18288" marB="18288" anchor="ctr">
                     <a:solidFill>
                       <a:srgbClr val="E9EBEF"/>
                     </a:solidFill>
@@ -8365,7 +10249,7 @@
                       </a:r>
                     </a:p>
                   </a:txBody>
-                  <a:tcPr marL="64008" marR="64008" marT="18288" marB="18288" anchor="ctr">
+                  <a:tcPr marL="54864" marR="54864" marT="18288" marB="18288" anchor="ctr">
                     <a:solidFill>
                       <a:srgbClr val="E9EBEF"/>
                     </a:solidFill>
@@ -8390,7 +10274,7 @@
                       </a:r>
                     </a:p>
                   </a:txBody>
-                  <a:tcPr marL="64008" marR="64008" marT="18288" marB="18288" anchor="ctr">
+                  <a:tcPr marL="54864" marR="54864" marT="18288" marB="18288" anchor="ctr">
                     <a:solidFill>
                       <a:srgbClr val="FFFFFF"/>
                     </a:solidFill>
@@ -8413,7 +10297,7 @@
                       </a:r>
                     </a:p>
                   </a:txBody>
-                  <a:tcPr marL="64008" marR="64008" marT="18288" marB="18288" anchor="ctr">
+                  <a:tcPr marL="54864" marR="54864" marT="18288" marB="18288" anchor="ctr">
                     <a:solidFill>
                       <a:srgbClr val="FFFFFF"/>
                     </a:solidFill>
@@ -8438,7 +10322,7 @@
                       </a:r>
                     </a:p>
                   </a:txBody>
-                  <a:tcPr marL="64008" marR="64008" marT="18288" marB="18288" anchor="ctr">
+                  <a:tcPr marL="54864" marR="54864" marT="18288" marB="18288" anchor="ctr">
                     <a:solidFill>
                       <a:srgbClr val="E9EBEF"/>
                     </a:solidFill>
@@ -8461,7 +10345,7 @@
                       </a:r>
                     </a:p>
                   </a:txBody>
-                  <a:tcPr marL="64008" marR="64008" marT="18288" marB="18288" anchor="ctr">
+                  <a:tcPr marL="54864" marR="54864" marT="18288" marB="18288" anchor="ctr">
                     <a:solidFill>
                       <a:srgbClr val="E9EBEF"/>
                     </a:solidFill>
@@ -8486,7 +10370,7 @@
                       </a:r>
                     </a:p>
                   </a:txBody>
-                  <a:tcPr marL="64008" marR="64008" marT="18288" marB="18288" anchor="ctr">
+                  <a:tcPr marL="54864" marR="54864" marT="18288" marB="18288" anchor="ctr">
                     <a:solidFill>
                       <a:srgbClr val="FFFFFF"/>
                     </a:solidFill>
@@ -8509,7 +10393,7 @@
                       </a:r>
                     </a:p>
                   </a:txBody>
-                  <a:tcPr marL="64008" marR="64008" marT="18288" marB="18288" anchor="ctr">
+                  <a:tcPr marL="54864" marR="54864" marT="18288" marB="18288" anchor="ctr">
                     <a:solidFill>
                       <a:srgbClr val="FFFFFF"/>
                     </a:solidFill>
@@ -8544,7 +10428,7 @@
           <a:p>
             <a:pPr algn="l">
               <a:spcAft>
-                <a:spcPts val="800"/>
+                <a:spcPts val="700"/>
               </a:spcAft>
             </a:pPr>
             <a:r>
@@ -8560,7 +10444,7 @@
           <a:p>
             <a:pPr algn="l">
               <a:spcAft>
-                <a:spcPts val="800"/>
+                <a:spcPts val="700"/>
               </a:spcAft>
             </a:pPr>
             <a:r>
@@ -8576,7 +10460,7 @@
           <a:p>
             <a:pPr algn="l">
               <a:spcAft>
-                <a:spcPts val="800"/>
+                <a:spcPts val="700"/>
               </a:spcAft>
             </a:pPr>
             <a:r>
@@ -8592,7 +10476,7 @@
           <a:p>
             <a:pPr algn="l">
               <a:spcAft>
-                <a:spcPts val="800"/>
+                <a:spcPts val="700"/>
               </a:spcAft>
             </a:pPr>
             <a:r>
@@ -8608,7 +10492,7 @@
           <a:p>
             <a:pPr algn="l">
               <a:spcAft>
-                <a:spcPts val="800"/>
+                <a:spcPts val="700"/>
               </a:spcAft>
             </a:pPr>
             <a:r>
@@ -8631,7 +10515,7 @@
         </p:nvSpPr>
         <p:spPr>
           <a:xfrm>
-            <a:off x="457200" y="6437376"/>
+            <a:off x="457200" y="6455664"/>
             <a:ext cx="11338560" cy="365760"/>
           </a:xfrm>
           <a:prstGeom prst="rect">
@@ -8727,7 +10611,7 @@
         </p:nvSpPr>
         <p:spPr>
           <a:xfrm>
-            <a:off x="457200" y="237744"/>
+            <a:off x="457200" y="219456"/>
             <a:ext cx="11338560" cy="914400"/>
           </a:xfrm>
           <a:prstGeom prst="rect">
@@ -8743,7 +10627,7 @@
           <a:p>
             <a:pPr algn="l"/>
             <a:r>
-              <a:rPr sz="2600" b="1">
+              <a:rPr sz="2500" b="1">
                 <a:solidFill>
                   <a:srgbClr val="16213E"/>
                 </a:solidFill>
@@ -8755,7 +10639,7 @@
           <a:p>
             <a:pPr algn="l"/>
             <a:r>
-              <a:rPr sz="1400" b="0">
+              <a:rPr sz="1350" b="0">
                 <a:solidFill>
                   <a:srgbClr val="6B707B"/>
                 </a:solidFill>
@@ -8808,7 +10692,7 @@
           <a:p>
             <a:pPr algn="l">
               <a:spcAft>
-                <a:spcPts val="800"/>
+                <a:spcPts val="700"/>
               </a:spcAft>
             </a:pPr>
             <a:r>
@@ -8824,7 +10708,7 @@
           <a:p>
             <a:pPr algn="l">
               <a:spcAft>
-                <a:spcPts val="800"/>
+                <a:spcPts val="700"/>
               </a:spcAft>
             </a:pPr>
             <a:r>
@@ -8840,7 +10724,7 @@
           <a:p>
             <a:pPr algn="l">
               <a:spcAft>
-                <a:spcPts val="800"/>
+                <a:spcPts val="700"/>
               </a:spcAft>
             </a:pPr>
             <a:r>
@@ -8856,7 +10740,7 @@
           <a:p>
             <a:pPr algn="l">
               <a:spcAft>
-                <a:spcPts val="800"/>
+                <a:spcPts val="700"/>
               </a:spcAft>
             </a:pPr>
             <a:r>
@@ -8872,7 +10756,7 @@
           <a:p>
             <a:pPr algn="l">
               <a:spcAft>
-                <a:spcPts val="800"/>
+                <a:spcPts val="700"/>
               </a:spcAft>
             </a:pPr>
             <a:r>
@@ -8888,7 +10772,7 @@
           <a:p>
             <a:pPr algn="l">
               <a:spcAft>
-                <a:spcPts val="800"/>
+                <a:spcPts val="700"/>
               </a:spcAft>
             </a:pPr>
             <a:r>
@@ -8911,7 +10795,7 @@
         </p:nvSpPr>
         <p:spPr>
           <a:xfrm>
-            <a:off x="457200" y="6437376"/>
+            <a:off x="457200" y="6455664"/>
             <a:ext cx="11338560" cy="365760"/>
           </a:xfrm>
           <a:prstGeom prst="rect">
@@ -9007,7 +10891,7 @@
         </p:nvSpPr>
         <p:spPr>
           <a:xfrm>
-            <a:off x="457200" y="237744"/>
+            <a:off x="457200" y="219456"/>
             <a:ext cx="11338560" cy="914400"/>
           </a:xfrm>
           <a:prstGeom prst="rect">
@@ -9023,7 +10907,7 @@
           <a:p>
             <a:pPr algn="l"/>
             <a:r>
-              <a:rPr sz="2600" b="1">
+              <a:rPr sz="2500" b="1">
                 <a:solidFill>
                   <a:srgbClr val="16213E"/>
                 </a:solidFill>
@@ -9042,8 +10926,8 @@
         </p:nvSpPr>
         <p:spPr>
           <a:xfrm>
-            <a:off x="10058400" y="274320"/>
-            <a:ext cx="1828800" cy="411480"/>
+            <a:off x="10104120" y="274320"/>
+            <a:ext cx="1783080" cy="384048"/>
           </a:xfrm>
           <a:prstGeom prst="rect">
             <a:avLst/>
@@ -9128,7 +11012,7 @@
                       </a:r>
                     </a:p>
                   </a:txBody>
-                  <a:tcPr marL="64008" marR="64008" marT="18288" marB="18288" anchor="ctr">
+                  <a:tcPr marL="54864" marR="54864" marT="18288" marB="18288" anchor="ctr">
                     <a:solidFill>
                       <a:srgbClr val="16213E"/>
                     </a:solidFill>
@@ -9151,7 +11035,7 @@
                       </a:r>
                     </a:p>
                   </a:txBody>
-                  <a:tcPr marL="64008" marR="64008" marT="18288" marB="18288" anchor="ctr">
+                  <a:tcPr marL="54864" marR="54864" marT="18288" marB="18288" anchor="ctr">
                     <a:solidFill>
                       <a:srgbClr val="16213E"/>
                     </a:solidFill>
@@ -9174,7 +11058,7 @@
                       </a:r>
                     </a:p>
                   </a:txBody>
-                  <a:tcPr marL="64008" marR="64008" marT="18288" marB="18288" anchor="ctr">
+                  <a:tcPr marL="54864" marR="54864" marT="18288" marB="18288" anchor="ctr">
                     <a:solidFill>
                       <a:srgbClr val="16213E"/>
                     </a:solidFill>
@@ -9197,7 +11081,7 @@
                       </a:r>
                     </a:p>
                   </a:txBody>
-                  <a:tcPr marL="64008" marR="64008" marT="18288" marB="18288" anchor="ctr">
+                  <a:tcPr marL="54864" marR="54864" marT="18288" marB="18288" anchor="ctr">
                     <a:solidFill>
                       <a:srgbClr val="16213E"/>
                     </a:solidFill>
@@ -9222,7 +11106,7 @@
                       </a:r>
                     </a:p>
                   </a:txBody>
-                  <a:tcPr marL="64008" marR="64008" marT="18288" marB="18288" anchor="ctr">
+                  <a:tcPr marL="54864" marR="54864" marT="18288" marB="18288" anchor="ctr">
                     <a:solidFill>
                       <a:srgbClr val="FFFFFF"/>
                     </a:solidFill>
@@ -9245,7 +11129,7 @@
                       </a:r>
                     </a:p>
                   </a:txBody>
-                  <a:tcPr marL="64008" marR="64008" marT="18288" marB="18288" anchor="ctr">
+                  <a:tcPr marL="54864" marR="54864" marT="18288" marB="18288" anchor="ctr">
                     <a:solidFill>
                       <a:srgbClr val="FFFFFF"/>
                     </a:solidFill>
@@ -9268,7 +11152,7 @@
                       </a:r>
                     </a:p>
                   </a:txBody>
-                  <a:tcPr marL="64008" marR="64008" marT="18288" marB="18288" anchor="ctr">
+                  <a:tcPr marL="54864" marR="54864" marT="18288" marB="18288" anchor="ctr">
                     <a:solidFill>
                       <a:srgbClr val="FFFFFF"/>
                     </a:solidFill>
@@ -9291,7 +11175,7 @@
                       </a:r>
                     </a:p>
                   </a:txBody>
-                  <a:tcPr marL="64008" marR="64008" marT="18288" marB="18288" anchor="ctr">
+                  <a:tcPr marL="54864" marR="54864" marT="18288" marB="18288" anchor="ctr">
                     <a:solidFill>
                       <a:srgbClr val="FFFFFF"/>
                     </a:solidFill>
@@ -9316,7 +11200,7 @@
                       </a:r>
                     </a:p>
                   </a:txBody>
-                  <a:tcPr marL="64008" marR="64008" marT="18288" marB="18288" anchor="ctr">
+                  <a:tcPr marL="54864" marR="54864" marT="18288" marB="18288" anchor="ctr">
                     <a:solidFill>
                       <a:srgbClr val="E9EBEF"/>
                     </a:solidFill>
@@ -9339,7 +11223,7 @@
                       </a:r>
                     </a:p>
                   </a:txBody>
-                  <a:tcPr marL="64008" marR="64008" marT="18288" marB="18288" anchor="ctr">
+                  <a:tcPr marL="54864" marR="54864" marT="18288" marB="18288" anchor="ctr">
                     <a:solidFill>
                       <a:srgbClr val="E9EBEF"/>
                     </a:solidFill>
@@ -9362,7 +11246,7 @@
                       </a:r>
                     </a:p>
                   </a:txBody>
-                  <a:tcPr marL="64008" marR="64008" marT="18288" marB="18288" anchor="ctr">
+                  <a:tcPr marL="54864" marR="54864" marT="18288" marB="18288" anchor="ctr">
                     <a:solidFill>
                       <a:srgbClr val="E9EBEF"/>
                     </a:solidFill>
@@ -9385,7 +11269,7 @@
                       </a:r>
                     </a:p>
                   </a:txBody>
-                  <a:tcPr marL="64008" marR="64008" marT="18288" marB="18288" anchor="ctr">
+                  <a:tcPr marL="54864" marR="54864" marT="18288" marB="18288" anchor="ctr">
                     <a:solidFill>
                       <a:srgbClr val="E9EBEF"/>
                     </a:solidFill>
@@ -9410,7 +11294,7 @@
                       </a:r>
                     </a:p>
                   </a:txBody>
-                  <a:tcPr marL="64008" marR="64008" marT="18288" marB="18288" anchor="ctr">
+                  <a:tcPr marL="54864" marR="54864" marT="18288" marB="18288" anchor="ctr">
                     <a:solidFill>
                       <a:srgbClr val="FFFFFF"/>
                     </a:solidFill>
@@ -9433,7 +11317,7 @@
                       </a:r>
                     </a:p>
                   </a:txBody>
-                  <a:tcPr marL="64008" marR="64008" marT="18288" marB="18288" anchor="ctr">
+                  <a:tcPr marL="54864" marR="54864" marT="18288" marB="18288" anchor="ctr">
                     <a:solidFill>
                       <a:srgbClr val="FFFFFF"/>
                     </a:solidFill>
@@ -9456,7 +11340,7 @@
                       </a:r>
                     </a:p>
                   </a:txBody>
-                  <a:tcPr marL="64008" marR="64008" marT="18288" marB="18288" anchor="ctr">
+                  <a:tcPr marL="54864" marR="54864" marT="18288" marB="18288" anchor="ctr">
                     <a:solidFill>
                       <a:srgbClr val="FFFFFF"/>
                     </a:solidFill>
@@ -9479,7 +11363,7 @@
                       </a:r>
                     </a:p>
                   </a:txBody>
-                  <a:tcPr marL="64008" marR="64008" marT="18288" marB="18288" anchor="ctr">
+                  <a:tcPr marL="54864" marR="54864" marT="18288" marB="18288" anchor="ctr">
                     <a:solidFill>
                       <a:srgbClr val="FFFFFF"/>
                     </a:solidFill>
@@ -9504,7 +11388,7 @@
                       </a:r>
                     </a:p>
                   </a:txBody>
-                  <a:tcPr marL="64008" marR="64008" marT="18288" marB="18288" anchor="ctr">
+                  <a:tcPr marL="54864" marR="54864" marT="18288" marB="18288" anchor="ctr">
                     <a:solidFill>
                       <a:srgbClr val="E9EBEF"/>
                     </a:solidFill>
@@ -9527,7 +11411,7 @@
                       </a:r>
                     </a:p>
                   </a:txBody>
-                  <a:tcPr marL="64008" marR="64008" marT="18288" marB="18288" anchor="ctr">
+                  <a:tcPr marL="54864" marR="54864" marT="18288" marB="18288" anchor="ctr">
                     <a:solidFill>
                       <a:srgbClr val="E9EBEF"/>
                     </a:solidFill>
@@ -9550,7 +11434,7 @@
                       </a:r>
                     </a:p>
                   </a:txBody>
-                  <a:tcPr marL="64008" marR="64008" marT="18288" marB="18288" anchor="ctr">
+                  <a:tcPr marL="54864" marR="54864" marT="18288" marB="18288" anchor="ctr">
                     <a:solidFill>
                       <a:srgbClr val="E9EBEF"/>
                     </a:solidFill>
@@ -9573,7 +11457,7 @@
                       </a:r>
                     </a:p>
                   </a:txBody>
-                  <a:tcPr marL="64008" marR="64008" marT="18288" marB="18288" anchor="ctr">
+                  <a:tcPr marL="54864" marR="54864" marT="18288" marB="18288" anchor="ctr">
                     <a:solidFill>
                       <a:srgbClr val="E9EBEF"/>
                     </a:solidFill>
@@ -9598,7 +11482,7 @@
                       </a:r>
                     </a:p>
                   </a:txBody>
-                  <a:tcPr marL="64008" marR="64008" marT="18288" marB="18288" anchor="ctr">
+                  <a:tcPr marL="54864" marR="54864" marT="18288" marB="18288" anchor="ctr">
                     <a:solidFill>
                       <a:srgbClr val="FFFFFF"/>
                     </a:solidFill>
@@ -9621,7 +11505,7 @@
                       </a:r>
                     </a:p>
                   </a:txBody>
-                  <a:tcPr marL="64008" marR="64008" marT="18288" marB="18288" anchor="ctr">
+                  <a:tcPr marL="54864" marR="54864" marT="18288" marB="18288" anchor="ctr">
                     <a:solidFill>
                       <a:srgbClr val="FFFFFF"/>
                     </a:solidFill>
@@ -9644,7 +11528,7 @@
                       </a:r>
                     </a:p>
                   </a:txBody>
-                  <a:tcPr marL="64008" marR="64008" marT="18288" marB="18288" anchor="ctr">
+                  <a:tcPr marL="54864" marR="54864" marT="18288" marB="18288" anchor="ctr">
                     <a:solidFill>
                       <a:srgbClr val="FFFFFF"/>
                     </a:solidFill>
@@ -9667,7 +11551,7 @@
                       </a:r>
                     </a:p>
                   </a:txBody>
-                  <a:tcPr marL="64008" marR="64008" marT="18288" marB="18288" anchor="ctr">
+                  <a:tcPr marL="54864" marR="54864" marT="18288" marB="18288" anchor="ctr">
                     <a:solidFill>
                       <a:srgbClr val="FFFFFF"/>
                     </a:solidFill>
@@ -9702,7 +11586,7 @@
           <a:p>
             <a:pPr algn="l">
               <a:spcAft>
-                <a:spcPts val="800"/>
+                <a:spcPts val="700"/>
               </a:spcAft>
             </a:pPr>
             <a:r>
@@ -9718,7 +11602,7 @@
           <a:p>
             <a:pPr algn="l">
               <a:spcAft>
-                <a:spcPts val="800"/>
+                <a:spcPts val="700"/>
               </a:spcAft>
             </a:pPr>
             <a:r>
@@ -9734,7 +11618,7 @@
           <a:p>
             <a:pPr algn="l">
               <a:spcAft>
-                <a:spcPts val="800"/>
+                <a:spcPts val="700"/>
               </a:spcAft>
             </a:pPr>
             <a:r>
@@ -9757,7 +11641,7 @@
         </p:nvSpPr>
         <p:spPr>
           <a:xfrm>
-            <a:off x="457200" y="6437376"/>
+            <a:off x="457200" y="6455664"/>
             <a:ext cx="11338560" cy="365760"/>
           </a:xfrm>
           <a:prstGeom prst="rect">
@@ -9853,7 +11737,7 @@
         </p:nvSpPr>
         <p:spPr>
           <a:xfrm>
-            <a:off x="457200" y="237744"/>
+            <a:off x="457200" y="219456"/>
             <a:ext cx="11338560" cy="914400"/>
           </a:xfrm>
           <a:prstGeom prst="rect">
@@ -9869,7 +11753,7 @@
           <a:p>
             <a:pPr algn="l"/>
             <a:r>
-              <a:rPr sz="2600" b="1">
+              <a:rPr sz="2500" b="1">
                 <a:solidFill>
                   <a:srgbClr val="16213E"/>
                 </a:solidFill>
@@ -9888,8 +11772,8 @@
         </p:nvSpPr>
         <p:spPr>
           <a:xfrm>
-            <a:off x="10058400" y="274320"/>
-            <a:ext cx="1828800" cy="411480"/>
+            <a:off x="10104120" y="274320"/>
+            <a:ext cx="1783080" cy="384048"/>
           </a:xfrm>
           <a:prstGeom prst="rect">
             <a:avLst/>
@@ -9973,7 +11857,7 @@
                       </a:r>
                     </a:p>
                   </a:txBody>
-                  <a:tcPr marL="64008" marR="64008" marT="18288" marB="18288" anchor="ctr">
+                  <a:tcPr marL="54864" marR="54864" marT="18288" marB="18288" anchor="ctr">
                     <a:solidFill>
                       <a:srgbClr val="16213E"/>
                     </a:solidFill>
@@ -9996,7 +11880,7 @@
                       </a:r>
                     </a:p>
                   </a:txBody>
-                  <a:tcPr marL="64008" marR="64008" marT="18288" marB="18288" anchor="ctr">
+                  <a:tcPr marL="54864" marR="54864" marT="18288" marB="18288" anchor="ctr">
                     <a:solidFill>
                       <a:srgbClr val="16213E"/>
                     </a:solidFill>
@@ -10019,7 +11903,7 @@
                       </a:r>
                     </a:p>
                   </a:txBody>
-                  <a:tcPr marL="64008" marR="64008" marT="18288" marB="18288" anchor="ctr">
+                  <a:tcPr marL="54864" marR="54864" marT="18288" marB="18288" anchor="ctr">
                     <a:solidFill>
                       <a:srgbClr val="16213E"/>
                     </a:solidFill>
@@ -10044,7 +11928,7 @@
                       </a:r>
                     </a:p>
                   </a:txBody>
-                  <a:tcPr marL="64008" marR="64008" marT="18288" marB="18288" anchor="ctr">
+                  <a:tcPr marL="54864" marR="54864" marT="18288" marB="18288" anchor="ctr">
                     <a:solidFill>
                       <a:srgbClr val="FFFFFF"/>
                     </a:solidFill>
@@ -10067,7 +11951,7 @@
                       </a:r>
                     </a:p>
                   </a:txBody>
-                  <a:tcPr marL="64008" marR="64008" marT="18288" marB="18288" anchor="ctr">
+                  <a:tcPr marL="54864" marR="54864" marT="18288" marB="18288" anchor="ctr">
                     <a:solidFill>
                       <a:srgbClr val="FFFFFF"/>
                     </a:solidFill>
@@ -10090,7 +11974,7 @@
                       </a:r>
                     </a:p>
                   </a:txBody>
-                  <a:tcPr marL="64008" marR="64008" marT="18288" marB="18288" anchor="ctr">
+                  <a:tcPr marL="54864" marR="54864" marT="18288" marB="18288" anchor="ctr">
                     <a:solidFill>
                       <a:srgbClr val="FFFFFF"/>
                     </a:solidFill>
@@ -10115,7 +11999,7 @@
                       </a:r>
                     </a:p>
                   </a:txBody>
-                  <a:tcPr marL="64008" marR="64008" marT="18288" marB="18288" anchor="ctr">
+                  <a:tcPr marL="54864" marR="54864" marT="18288" marB="18288" anchor="ctr">
                     <a:solidFill>
                       <a:srgbClr val="E9EBEF"/>
                     </a:solidFill>
@@ -10138,7 +12022,7 @@
                       </a:r>
                     </a:p>
                   </a:txBody>
-                  <a:tcPr marL="64008" marR="64008" marT="18288" marB="18288" anchor="ctr">
+                  <a:tcPr marL="54864" marR="54864" marT="18288" marB="18288" anchor="ctr">
                     <a:solidFill>
                       <a:srgbClr val="E9EBEF"/>
                     </a:solidFill>
@@ -10161,7 +12045,7 @@
                       </a:r>
                     </a:p>
                   </a:txBody>
-                  <a:tcPr marL="64008" marR="64008" marT="18288" marB="18288" anchor="ctr">
+                  <a:tcPr marL="54864" marR="54864" marT="18288" marB="18288" anchor="ctr">
                     <a:solidFill>
                       <a:srgbClr val="E9EBEF"/>
                     </a:solidFill>
@@ -10186,7 +12070,7 @@
                       </a:r>
                     </a:p>
                   </a:txBody>
-                  <a:tcPr marL="64008" marR="64008" marT="18288" marB="18288" anchor="ctr">
+                  <a:tcPr marL="54864" marR="54864" marT="18288" marB="18288" anchor="ctr">
                     <a:solidFill>
                       <a:srgbClr val="FFFFFF"/>
                     </a:solidFill>
@@ -10209,7 +12093,7 @@
                       </a:r>
                     </a:p>
                   </a:txBody>
-                  <a:tcPr marL="64008" marR="64008" marT="18288" marB="18288" anchor="ctr">
+                  <a:tcPr marL="54864" marR="54864" marT="18288" marB="18288" anchor="ctr">
                     <a:solidFill>
                       <a:srgbClr val="FFFFFF"/>
                     </a:solidFill>
@@ -10232,7 +12116,7 @@
                       </a:r>
                     </a:p>
                   </a:txBody>
-                  <a:tcPr marL="64008" marR="64008" marT="18288" marB="18288" anchor="ctr">
+                  <a:tcPr marL="54864" marR="54864" marT="18288" marB="18288" anchor="ctr">
                     <a:solidFill>
                       <a:srgbClr val="FFFFFF"/>
                     </a:solidFill>
@@ -10257,7 +12141,7 @@
                       </a:r>
                     </a:p>
                   </a:txBody>
-                  <a:tcPr marL="64008" marR="64008" marT="18288" marB="18288" anchor="ctr">
+                  <a:tcPr marL="54864" marR="54864" marT="18288" marB="18288" anchor="ctr">
                     <a:solidFill>
                       <a:srgbClr val="E9EBEF"/>
                     </a:solidFill>
@@ -10280,7 +12164,7 @@
                       </a:r>
                     </a:p>
                   </a:txBody>
-                  <a:tcPr marL="64008" marR="64008" marT="18288" marB="18288" anchor="ctr">
+                  <a:tcPr marL="54864" marR="54864" marT="18288" marB="18288" anchor="ctr">
                     <a:solidFill>
                       <a:srgbClr val="E9EBEF"/>
                     </a:solidFill>
@@ -10303,7 +12187,7 @@
                       </a:r>
                     </a:p>
                   </a:txBody>
-                  <a:tcPr marL="64008" marR="64008" marT="18288" marB="18288" anchor="ctr">
+                  <a:tcPr marL="54864" marR="54864" marT="18288" marB="18288" anchor="ctr">
                     <a:solidFill>
                       <a:srgbClr val="E9EBEF"/>
                     </a:solidFill>
@@ -10328,7 +12212,7 @@
                       </a:r>
                     </a:p>
                   </a:txBody>
-                  <a:tcPr marL="64008" marR="64008" marT="18288" marB="18288" anchor="ctr">
+                  <a:tcPr marL="54864" marR="54864" marT="18288" marB="18288" anchor="ctr">
                     <a:solidFill>
                       <a:srgbClr val="FFFFFF"/>
                     </a:solidFill>
@@ -10351,7 +12235,7 @@
                       </a:r>
                     </a:p>
                   </a:txBody>
-                  <a:tcPr marL="64008" marR="64008" marT="18288" marB="18288" anchor="ctr">
+                  <a:tcPr marL="54864" marR="54864" marT="18288" marB="18288" anchor="ctr">
                     <a:solidFill>
                       <a:srgbClr val="FFFFFF"/>
                     </a:solidFill>
@@ -10374,7 +12258,7 @@
                       </a:r>
                     </a:p>
                   </a:txBody>
-                  <a:tcPr marL="64008" marR="64008" marT="18288" marB="18288" anchor="ctr">
+                  <a:tcPr marL="54864" marR="54864" marT="18288" marB="18288" anchor="ctr">
                     <a:solidFill>
                       <a:srgbClr val="FFFFFF"/>
                     </a:solidFill>
@@ -10399,7 +12283,7 @@
                       </a:r>
                     </a:p>
                   </a:txBody>
-                  <a:tcPr marL="64008" marR="64008" marT="18288" marB="18288" anchor="ctr">
+                  <a:tcPr marL="54864" marR="54864" marT="18288" marB="18288" anchor="ctr">
                     <a:solidFill>
                       <a:srgbClr val="E9EBEF"/>
                     </a:solidFill>
@@ -10422,7 +12306,7 @@
                       </a:r>
                     </a:p>
                   </a:txBody>
-                  <a:tcPr marL="64008" marR="64008" marT="18288" marB="18288" anchor="ctr">
+                  <a:tcPr marL="54864" marR="54864" marT="18288" marB="18288" anchor="ctr">
                     <a:solidFill>
                       <a:srgbClr val="E9EBEF"/>
                     </a:solidFill>
@@ -10445,7 +12329,7 @@
                       </a:r>
                     </a:p>
                   </a:txBody>
-                  <a:tcPr marL="64008" marR="64008" marT="18288" marB="18288" anchor="ctr">
+                  <a:tcPr marL="54864" marR="54864" marT="18288" marB="18288" anchor="ctr">
                     <a:solidFill>
                       <a:srgbClr val="E9EBEF"/>
                     </a:solidFill>
@@ -10464,7 +12348,7 @@
         </p:nvSpPr>
         <p:spPr>
           <a:xfrm>
-            <a:off x="457200" y="6437376"/>
+            <a:off x="457200" y="6455664"/>
             <a:ext cx="11338560" cy="365760"/>
           </a:xfrm>
           <a:prstGeom prst="rect">
@@ -10560,7 +12444,7 @@
         </p:nvSpPr>
         <p:spPr>
           <a:xfrm>
-            <a:off x="457200" y="237744"/>
+            <a:off x="457200" y="219456"/>
             <a:ext cx="11338560" cy="914400"/>
           </a:xfrm>
           <a:prstGeom prst="rect">
@@ -10576,13 +12460,13 @@
           <a:p>
             <a:pPr algn="l"/>
             <a:r>
-              <a:rPr sz="2600" b="1">
+              <a:rPr sz="2500" b="1">
                 <a:solidFill>
                   <a:srgbClr val="16213E"/>
                 </a:solidFill>
                 <a:latin typeface="Microsoft YaHei"/>
               </a:rPr>
-              <a:t>【DCF】核心假设：7 年显性期 + 终值，WACC 15%（早期中概 AI）</a:t>
+              <a:t>【DCF】10 年显性期假设：营收 10 年 ~38x，2029 盈亏平衡、2035 转 26% 利润率</a:t>
             </a:r>
           </a:p>
         </p:txBody>
@@ -10595,8 +12479,8 @@
         </p:nvSpPr>
         <p:spPr>
           <a:xfrm>
-            <a:off x="10058400" y="274320"/>
-            <a:ext cx="1828800" cy="411480"/>
+            <a:off x="10104120" y="274320"/>
+            <a:ext cx="1783080" cy="384048"/>
           </a:xfrm>
           <a:prstGeom prst="rect">
             <a:avLst/>
@@ -10648,8 +12532,8 @@
           <p:nvPr/>
         </p:nvGraphicFramePr>
         <p:xfrm>
-          <a:off x="457200" y="1645920"/>
-          <a:ext cx="11237976" cy="2468880"/>
+          <a:off x="365760" y="1691640"/>
+          <a:ext cx="11247120" cy="2377440"/>
         </p:xfrm>
         <a:graphic>
           <a:graphicData uri="http://schemas.openxmlformats.org/drawingml/2006/table">
@@ -10658,24 +12542,27 @@
                 <a:tableStyleId>{5C22544A-7EE6-4342-B048-85BDC9FD1C3A}</a:tableStyleId>
               </a:tblPr>
               <a:tblGrid>
-                <a:gridCol w="2468880"/>
-                <a:gridCol w="1252728"/>
-                <a:gridCol w="1252728"/>
-                <a:gridCol w="1252728"/>
-                <a:gridCol w="1252728"/>
-                <a:gridCol w="1252728"/>
-                <a:gridCol w="1252728"/>
-                <a:gridCol w="1252728"/>
+                <a:gridCol w="2011680"/>
+                <a:gridCol w="923544"/>
+                <a:gridCol w="923544"/>
+                <a:gridCol w="923544"/>
+                <a:gridCol w="923544"/>
+                <a:gridCol w="923544"/>
+                <a:gridCol w="923544"/>
+                <a:gridCol w="923544"/>
+                <a:gridCol w="923544"/>
+                <a:gridCol w="923544"/>
+                <a:gridCol w="923544"/>
               </a:tblGrid>
-              <a:tr h="493776">
-                <a:tc>
-                  <a:txBody>
-                    <a:bodyPr wrap="square"/>
-                    <a:lstStyle/>
-                    <a:p>
-                      <a:pPr algn="l"/>
-                      <a:r>
-                        <a:rPr sz="1150" b="1">
+              <a:tr h="475488">
+                <a:tc>
+                  <a:txBody>
+                    <a:bodyPr wrap="square"/>
+                    <a:lstStyle/>
+                    <a:p>
+                      <a:pPr algn="l"/>
+                      <a:r>
+                        <a:rPr sz="1000" b="1">
                           <a:solidFill>
                             <a:srgbClr val="FFFFFF"/>
                           </a:solidFill>
@@ -10685,7 +12572,7 @@
                       </a:r>
                     </a:p>
                   </a:txBody>
-                  <a:tcPr marL="64008" marR="64008" marT="18288" marB="18288" anchor="ctr">
+                  <a:tcPr marL="54864" marR="54864" marT="18288" marB="18288" anchor="ctr">
                     <a:solidFill>
                       <a:srgbClr val="16213E"/>
                     </a:solidFill>
@@ -10698,7 +12585,7 @@
                     <a:p>
                       <a:pPr algn="l"/>
                       <a:r>
-                        <a:rPr sz="1150" b="1">
+                        <a:rPr sz="1000" b="1">
                           <a:solidFill>
                             <a:srgbClr val="FFFFFF"/>
                           </a:solidFill>
@@ -10708,7 +12595,7 @@
                       </a:r>
                     </a:p>
                   </a:txBody>
-                  <a:tcPr marL="64008" marR="64008" marT="18288" marB="18288" anchor="ctr">
+                  <a:tcPr marL="54864" marR="54864" marT="18288" marB="18288" anchor="ctr">
                     <a:solidFill>
                       <a:srgbClr val="16213E"/>
                     </a:solidFill>
@@ -10721,7 +12608,7 @@
                     <a:p>
                       <a:pPr algn="l"/>
                       <a:r>
-                        <a:rPr sz="1150" b="1">
+                        <a:rPr sz="1000" b="1">
                           <a:solidFill>
                             <a:srgbClr val="FFFFFF"/>
                           </a:solidFill>
@@ -10731,7 +12618,7 @@
                       </a:r>
                     </a:p>
                   </a:txBody>
-                  <a:tcPr marL="64008" marR="64008" marT="18288" marB="18288" anchor="ctr">
+                  <a:tcPr marL="54864" marR="54864" marT="18288" marB="18288" anchor="ctr">
                     <a:solidFill>
                       <a:srgbClr val="16213E"/>
                     </a:solidFill>
@@ -10744,7 +12631,7 @@
                     <a:p>
                       <a:pPr algn="l"/>
                       <a:r>
-                        <a:rPr sz="1150" b="1">
+                        <a:rPr sz="1000" b="1">
                           <a:solidFill>
                             <a:srgbClr val="FFFFFF"/>
                           </a:solidFill>
@@ -10754,7 +12641,7 @@
                       </a:r>
                     </a:p>
                   </a:txBody>
-                  <a:tcPr marL="64008" marR="64008" marT="18288" marB="18288" anchor="ctr">
+                  <a:tcPr marL="54864" marR="54864" marT="18288" marB="18288" anchor="ctr">
                     <a:solidFill>
                       <a:srgbClr val="16213E"/>
                     </a:solidFill>
@@ -10767,7 +12654,7 @@
                     <a:p>
                       <a:pPr algn="l"/>
                       <a:r>
-                        <a:rPr sz="1150" b="1">
+                        <a:rPr sz="1000" b="1">
                           <a:solidFill>
                             <a:srgbClr val="FFFFFF"/>
                           </a:solidFill>
@@ -10777,7 +12664,7 @@
                       </a:r>
                     </a:p>
                   </a:txBody>
-                  <a:tcPr marL="64008" marR="64008" marT="18288" marB="18288" anchor="ctr">
+                  <a:tcPr marL="54864" marR="54864" marT="18288" marB="18288" anchor="ctr">
                     <a:solidFill>
                       <a:srgbClr val="16213E"/>
                     </a:solidFill>
@@ -10790,7 +12677,7 @@
                     <a:p>
                       <a:pPr algn="l"/>
                       <a:r>
-                        <a:rPr sz="1150" b="1">
+                        <a:rPr sz="1000" b="1">
                           <a:solidFill>
                             <a:srgbClr val="FFFFFF"/>
                           </a:solidFill>
@@ -10800,7 +12687,7 @@
                       </a:r>
                     </a:p>
                   </a:txBody>
-                  <a:tcPr marL="64008" marR="64008" marT="18288" marB="18288" anchor="ctr">
+                  <a:tcPr marL="54864" marR="54864" marT="18288" marB="18288" anchor="ctr">
                     <a:solidFill>
                       <a:srgbClr val="16213E"/>
                     </a:solidFill>
@@ -10813,7 +12700,7 @@
                     <a:p>
                       <a:pPr algn="l"/>
                       <a:r>
-                        <a:rPr sz="1150" b="1">
+                        <a:rPr sz="1000" b="1">
                           <a:solidFill>
                             <a:srgbClr val="FFFFFF"/>
                           </a:solidFill>
@@ -10823,7 +12710,7 @@
                       </a:r>
                     </a:p>
                   </a:txBody>
-                  <a:tcPr marL="64008" marR="64008" marT="18288" marB="18288" anchor="ctr">
+                  <a:tcPr marL="54864" marR="54864" marT="18288" marB="18288" anchor="ctr">
                     <a:solidFill>
                       <a:srgbClr val="16213E"/>
                     </a:solidFill>
@@ -10836,7 +12723,7 @@
                     <a:p>
                       <a:pPr algn="l"/>
                       <a:r>
-                        <a:rPr sz="1150" b="1">
+                        <a:rPr sz="1000" b="1">
                           <a:solidFill>
                             <a:srgbClr val="FFFFFF"/>
                           </a:solidFill>
@@ -10846,22 +12733,91 @@
                       </a:r>
                     </a:p>
                   </a:txBody>
-                  <a:tcPr marL="64008" marR="64008" marT="18288" marB="18288" anchor="ctr">
+                  <a:tcPr marL="54864" marR="54864" marT="18288" marB="18288" anchor="ctr">
                     <a:solidFill>
                       <a:srgbClr val="16213E"/>
                     </a:solidFill>
                   </a:tcPr>
                 </a:tc>
+                <a:tc>
+                  <a:txBody>
+                    <a:bodyPr wrap="square"/>
+                    <a:lstStyle/>
+                    <a:p>
+                      <a:pPr algn="l"/>
+                      <a:r>
+                        <a:rPr sz="1000" b="1">
+                          <a:solidFill>
+                            <a:srgbClr val="FFFFFF"/>
+                          </a:solidFill>
+                          <a:latin typeface="Microsoft YaHei"/>
+                        </a:rPr>
+                        <a:t>33E</a:t>
+                      </a:r>
+                    </a:p>
+                  </a:txBody>
+                  <a:tcPr marL="54864" marR="54864" marT="18288" marB="18288" anchor="ctr">
+                    <a:solidFill>
+                      <a:srgbClr val="16213E"/>
+                    </a:solidFill>
+                  </a:tcPr>
+                </a:tc>
+                <a:tc>
+                  <a:txBody>
+                    <a:bodyPr wrap="square"/>
+                    <a:lstStyle/>
+                    <a:p>
+                      <a:pPr algn="l"/>
+                      <a:r>
+                        <a:rPr sz="1000" b="1">
+                          <a:solidFill>
+                            <a:srgbClr val="FFFFFF"/>
+                          </a:solidFill>
+                          <a:latin typeface="Microsoft YaHei"/>
+                        </a:rPr>
+                        <a:t>34E</a:t>
+                      </a:r>
+                    </a:p>
+                  </a:txBody>
+                  <a:tcPr marL="54864" marR="54864" marT="18288" marB="18288" anchor="ctr">
+                    <a:solidFill>
+                      <a:srgbClr val="16213E"/>
+                    </a:solidFill>
+                  </a:tcPr>
+                </a:tc>
+                <a:tc>
+                  <a:txBody>
+                    <a:bodyPr wrap="square"/>
+                    <a:lstStyle/>
+                    <a:p>
+                      <a:pPr algn="l"/>
+                      <a:r>
+                        <a:rPr sz="1000" b="1">
+                          <a:solidFill>
+                            <a:srgbClr val="FFFFFF"/>
+                          </a:solidFill>
+                          <a:latin typeface="Microsoft YaHei"/>
+                        </a:rPr>
+                        <a:t>35E</a:t>
+                      </a:r>
+                    </a:p>
+                  </a:txBody>
+                  <a:tcPr marL="54864" marR="54864" marT="18288" marB="18288" anchor="ctr">
+                    <a:solidFill>
+                      <a:srgbClr val="16213E"/>
+                    </a:solidFill>
+                  </a:tcPr>
+                </a:tc>
               </a:tr>
-              <a:tr h="493776">
-                <a:tc>
-                  <a:txBody>
-                    <a:bodyPr wrap="square"/>
-                    <a:lstStyle/>
-                    <a:p>
-                      <a:pPr algn="l"/>
-                      <a:r>
-                        <a:rPr sz="1150" b="0">
+              <a:tr h="475488">
+                <a:tc>
+                  <a:txBody>
+                    <a:bodyPr wrap="square"/>
+                    <a:lstStyle/>
+                    <a:p>
+                      <a:pPr algn="l"/>
+                      <a:r>
+                        <a:rPr sz="1000" b="0">
                           <a:solidFill>
                             <a:srgbClr val="16213E"/>
                           </a:solidFill>
@@ -10871,7 +12827,7 @@
                       </a:r>
                     </a:p>
                   </a:txBody>
-                  <a:tcPr marL="64008" marR="64008" marT="18288" marB="18288" anchor="ctr">
+                  <a:tcPr marL="54864" marR="54864" marT="18288" marB="18288" anchor="ctr">
                     <a:solidFill>
                       <a:srgbClr val="FFFFFF"/>
                     </a:solidFill>
@@ -10884,7 +12840,7 @@
                     <a:p>
                       <a:pPr algn="r"/>
                       <a:r>
-                        <a:rPr sz="1150" b="0">
+                        <a:rPr sz="1000" b="0">
                           <a:solidFill>
                             <a:srgbClr val="16213E"/>
                           </a:solidFill>
@@ -10894,7 +12850,7 @@
                       </a:r>
                     </a:p>
                   </a:txBody>
-                  <a:tcPr marL="64008" marR="64008" marT="18288" marB="18288" anchor="ctr">
+                  <a:tcPr marL="54864" marR="54864" marT="18288" marB="18288" anchor="ctr">
                     <a:solidFill>
                       <a:srgbClr val="FFFFFF"/>
                     </a:solidFill>
@@ -10907,7 +12863,7 @@
                     <a:p>
                       <a:pPr algn="r"/>
                       <a:r>
-                        <a:rPr sz="1150" b="0">
+                        <a:rPr sz="1000" b="0">
                           <a:solidFill>
                             <a:srgbClr val="16213E"/>
                           </a:solidFill>
@@ -10917,7 +12873,7 @@
                       </a:r>
                     </a:p>
                   </a:txBody>
-                  <a:tcPr marL="64008" marR="64008" marT="18288" marB="18288" anchor="ctr">
+                  <a:tcPr marL="54864" marR="54864" marT="18288" marB="18288" anchor="ctr">
                     <a:solidFill>
                       <a:srgbClr val="FFFFFF"/>
                     </a:solidFill>
@@ -10930,7 +12886,7 @@
                     <a:p>
                       <a:pPr algn="r"/>
                       <a:r>
-                        <a:rPr sz="1150" b="0">
+                        <a:rPr sz="1000" b="0">
                           <a:solidFill>
                             <a:srgbClr val="16213E"/>
                           </a:solidFill>
@@ -10940,7 +12896,7 @@
                       </a:r>
                     </a:p>
                   </a:txBody>
-                  <a:tcPr marL="64008" marR="64008" marT="18288" marB="18288" anchor="ctr">
+                  <a:tcPr marL="54864" marR="54864" marT="18288" marB="18288" anchor="ctr">
                     <a:solidFill>
                       <a:srgbClr val="FFFFFF"/>
                     </a:solidFill>
@@ -10953,7 +12909,7 @@
                     <a:p>
                       <a:pPr algn="r"/>
                       <a:r>
-                        <a:rPr sz="1150" b="0">
+                        <a:rPr sz="1000" b="0">
                           <a:solidFill>
                             <a:srgbClr val="16213E"/>
                           </a:solidFill>
@@ -10963,7 +12919,7 @@
                       </a:r>
                     </a:p>
                   </a:txBody>
-                  <a:tcPr marL="64008" marR="64008" marT="18288" marB="18288" anchor="ctr">
+                  <a:tcPr marL="54864" marR="54864" marT="18288" marB="18288" anchor="ctr">
                     <a:solidFill>
                       <a:srgbClr val="FFFFFF"/>
                     </a:solidFill>
@@ -10976,7 +12932,7 @@
                     <a:p>
                       <a:pPr algn="r"/>
                       <a:r>
-                        <a:rPr sz="1150" b="0">
+                        <a:rPr sz="1000" b="0">
                           <a:solidFill>
                             <a:srgbClr val="16213E"/>
                           </a:solidFill>
@@ -10986,7 +12942,7 @@
                       </a:r>
                     </a:p>
                   </a:txBody>
-                  <a:tcPr marL="64008" marR="64008" marT="18288" marB="18288" anchor="ctr">
+                  <a:tcPr marL="54864" marR="54864" marT="18288" marB="18288" anchor="ctr">
                     <a:solidFill>
                       <a:srgbClr val="FFFFFF"/>
                     </a:solidFill>
@@ -10999,7 +12955,7 @@
                     <a:p>
                       <a:pPr algn="r"/>
                       <a:r>
-                        <a:rPr sz="1150" b="0">
+                        <a:rPr sz="1000" b="0">
                           <a:solidFill>
                             <a:srgbClr val="16213E"/>
                           </a:solidFill>
@@ -11009,7 +12965,7 @@
                       </a:r>
                     </a:p>
                   </a:txBody>
-                  <a:tcPr marL="64008" marR="64008" marT="18288" marB="18288" anchor="ctr">
+                  <a:tcPr marL="54864" marR="54864" marT="18288" marB="18288" anchor="ctr">
                     <a:solidFill>
                       <a:srgbClr val="FFFFFF"/>
                     </a:solidFill>
@@ -11022,7 +12978,7 @@
                     <a:p>
                       <a:pPr algn="r"/>
                       <a:r>
-                        <a:rPr sz="1150" b="0">
+                        <a:rPr sz="1000" b="0">
                           <a:solidFill>
                             <a:srgbClr val="16213E"/>
                           </a:solidFill>
@@ -11032,32 +12988,101 @@
                       </a:r>
                     </a:p>
                   </a:txBody>
-                  <a:tcPr marL="64008" marR="64008" marT="18288" marB="18288" anchor="ctr">
+                  <a:tcPr marL="54864" marR="54864" marT="18288" marB="18288" anchor="ctr">
                     <a:solidFill>
                       <a:srgbClr val="FFFFFF"/>
                     </a:solidFill>
                   </a:tcPr>
                 </a:tc>
+                <a:tc>
+                  <a:txBody>
+                    <a:bodyPr wrap="square"/>
+                    <a:lstStyle/>
+                    <a:p>
+                      <a:pPr algn="r"/>
+                      <a:r>
+                        <a:rPr sz="1000" b="0">
+                          <a:solidFill>
+                            <a:srgbClr val="16213E"/>
+                          </a:solidFill>
+                          <a:latin typeface="Microsoft YaHei"/>
+                        </a:rPr>
+                        <a:t>2049</a:t>
+                      </a:r>
+                    </a:p>
+                  </a:txBody>
+                  <a:tcPr marL="54864" marR="54864" marT="18288" marB="18288" anchor="ctr">
+                    <a:solidFill>
+                      <a:srgbClr val="FFFFFF"/>
+                    </a:solidFill>
+                  </a:tcPr>
+                </a:tc>
+                <a:tc>
+                  <a:txBody>
+                    <a:bodyPr wrap="square"/>
+                    <a:lstStyle/>
+                    <a:p>
+                      <a:pPr algn="r"/>
+                      <a:r>
+                        <a:rPr sz="1000" b="0">
+                          <a:solidFill>
+                            <a:srgbClr val="16213E"/>
+                          </a:solidFill>
+                          <a:latin typeface="Microsoft YaHei"/>
+                        </a:rPr>
+                        <a:t>2459</a:t>
+                      </a:r>
+                    </a:p>
+                  </a:txBody>
+                  <a:tcPr marL="54864" marR="54864" marT="18288" marB="18288" anchor="ctr">
+                    <a:solidFill>
+                      <a:srgbClr val="FFFFFF"/>
+                    </a:solidFill>
+                  </a:tcPr>
+                </a:tc>
+                <a:tc>
+                  <a:txBody>
+                    <a:bodyPr wrap="square"/>
+                    <a:lstStyle/>
+                    <a:p>
+                      <a:pPr algn="r"/>
+                      <a:r>
+                        <a:rPr sz="1000" b="0">
+                          <a:solidFill>
+                            <a:srgbClr val="16213E"/>
+                          </a:solidFill>
+                          <a:latin typeface="Microsoft YaHei"/>
+                        </a:rPr>
+                        <a:t>2950</a:t>
+                      </a:r>
+                    </a:p>
+                  </a:txBody>
+                  <a:tcPr marL="54864" marR="54864" marT="18288" marB="18288" anchor="ctr">
+                    <a:solidFill>
+                      <a:srgbClr val="FFFFFF"/>
+                    </a:solidFill>
+                  </a:tcPr>
+                </a:tc>
               </a:tr>
-              <a:tr h="493776">
-                <a:tc>
-                  <a:txBody>
-                    <a:bodyPr wrap="square"/>
-                    <a:lstStyle/>
-                    <a:p>
-                      <a:pPr algn="l"/>
-                      <a:r>
-                        <a:rPr sz="1150" b="0">
-                          <a:solidFill>
-                            <a:srgbClr val="16213E"/>
-                          </a:solidFill>
-                          <a:latin typeface="Microsoft YaHei"/>
-                        </a:rPr>
-                        <a:t>营收增速</a:t>
-                      </a:r>
-                    </a:p>
-                  </a:txBody>
-                  <a:tcPr marL="64008" marR="64008" marT="18288" marB="18288" anchor="ctr">
+              <a:tr h="475488">
+                <a:tc>
+                  <a:txBody>
+                    <a:bodyPr wrap="square"/>
+                    <a:lstStyle/>
+                    <a:p>
+                      <a:pPr algn="l"/>
+                      <a:r>
+                        <a:rPr sz="1000" b="0">
+                          <a:solidFill>
+                            <a:srgbClr val="16213E"/>
+                          </a:solidFill>
+                          <a:latin typeface="Microsoft YaHei"/>
+                        </a:rPr>
+                        <a:t>增速</a:t>
+                      </a:r>
+                    </a:p>
+                  </a:txBody>
+                  <a:tcPr marL="54864" marR="54864" marT="18288" marB="18288" anchor="ctr">
                     <a:solidFill>
                       <a:srgbClr val="E9EBEF"/>
                     </a:solidFill>
@@ -11070,7 +13095,7 @@
                     <a:p>
                       <a:pPr algn="r"/>
                       <a:r>
-                        <a:rPr sz="1150" b="0">
+                        <a:rPr sz="1000" b="0">
                           <a:solidFill>
                             <a:srgbClr val="16213E"/>
                           </a:solidFill>
@@ -11080,7 +13105,7 @@
                       </a:r>
                     </a:p>
                   </a:txBody>
-                  <a:tcPr marL="64008" marR="64008" marT="18288" marB="18288" anchor="ctr">
+                  <a:tcPr marL="54864" marR="54864" marT="18288" marB="18288" anchor="ctr">
                     <a:solidFill>
                       <a:srgbClr val="E9EBEF"/>
                     </a:solidFill>
@@ -11093,7 +13118,7 @@
                     <a:p>
                       <a:pPr algn="r"/>
                       <a:r>
-                        <a:rPr sz="1150" b="0">
+                        <a:rPr sz="1000" b="0">
                           <a:solidFill>
                             <a:srgbClr val="16213E"/>
                           </a:solidFill>
@@ -11103,7 +13128,7 @@
                       </a:r>
                     </a:p>
                   </a:txBody>
-                  <a:tcPr marL="64008" marR="64008" marT="18288" marB="18288" anchor="ctr">
+                  <a:tcPr marL="54864" marR="54864" marT="18288" marB="18288" anchor="ctr">
                     <a:solidFill>
                       <a:srgbClr val="E9EBEF"/>
                     </a:solidFill>
@@ -11116,7 +13141,7 @@
                     <a:p>
                       <a:pPr algn="r"/>
                       <a:r>
-                        <a:rPr sz="1150" b="0">
+                        <a:rPr sz="1000" b="0">
                           <a:solidFill>
                             <a:srgbClr val="16213E"/>
                           </a:solidFill>
@@ -11126,7 +13151,7 @@
                       </a:r>
                     </a:p>
                   </a:txBody>
-                  <a:tcPr marL="64008" marR="64008" marT="18288" marB="18288" anchor="ctr">
+                  <a:tcPr marL="54864" marR="54864" marT="18288" marB="18288" anchor="ctr">
                     <a:solidFill>
                       <a:srgbClr val="E9EBEF"/>
                     </a:solidFill>
@@ -11139,7 +13164,7 @@
                     <a:p>
                       <a:pPr algn="r"/>
                       <a:r>
-                        <a:rPr sz="1150" b="0">
+                        <a:rPr sz="1000" b="0">
                           <a:solidFill>
                             <a:srgbClr val="16213E"/>
                           </a:solidFill>
@@ -11149,7 +13174,7 @@
                       </a:r>
                     </a:p>
                   </a:txBody>
-                  <a:tcPr marL="64008" marR="64008" marT="18288" marB="18288" anchor="ctr">
+                  <a:tcPr marL="54864" marR="54864" marT="18288" marB="18288" anchor="ctr">
                     <a:solidFill>
                       <a:srgbClr val="E9EBEF"/>
                     </a:solidFill>
@@ -11162,7 +13187,7 @@
                     <a:p>
                       <a:pPr algn="r"/>
                       <a:r>
-                        <a:rPr sz="1150" b="0">
+                        <a:rPr sz="1000" b="0">
                           <a:solidFill>
                             <a:srgbClr val="16213E"/>
                           </a:solidFill>
@@ -11172,7 +13197,7 @@
                       </a:r>
                     </a:p>
                   </a:txBody>
-                  <a:tcPr marL="64008" marR="64008" marT="18288" marB="18288" anchor="ctr">
+                  <a:tcPr marL="54864" marR="54864" marT="18288" marB="18288" anchor="ctr">
                     <a:solidFill>
                       <a:srgbClr val="E9EBEF"/>
                     </a:solidFill>
@@ -11185,7 +13210,7 @@
                     <a:p>
                       <a:pPr algn="r"/>
                       <a:r>
-                        <a:rPr sz="1150" b="0">
+                        <a:rPr sz="1000" b="0">
                           <a:solidFill>
                             <a:srgbClr val="16213E"/>
                           </a:solidFill>
@@ -11195,7 +13220,7 @@
                       </a:r>
                     </a:p>
                   </a:txBody>
-                  <a:tcPr marL="64008" marR="64008" marT="18288" marB="18288" anchor="ctr">
+                  <a:tcPr marL="54864" marR="54864" marT="18288" marB="18288" anchor="ctr">
                     <a:solidFill>
                       <a:srgbClr val="E9EBEF"/>
                     </a:solidFill>
@@ -11208,7 +13233,7 @@
                     <a:p>
                       <a:pPr algn="r"/>
                       <a:r>
-                        <a:rPr sz="1150" b="0">
+                        <a:rPr sz="1000" b="0">
                           <a:solidFill>
                             <a:srgbClr val="16213E"/>
                           </a:solidFill>
@@ -11218,22 +13243,91 @@
                       </a:r>
                     </a:p>
                   </a:txBody>
-                  <a:tcPr marL="64008" marR="64008" marT="18288" marB="18288" anchor="ctr">
+                  <a:tcPr marL="54864" marR="54864" marT="18288" marB="18288" anchor="ctr">
                     <a:solidFill>
                       <a:srgbClr val="E9EBEF"/>
                     </a:solidFill>
                   </a:tcPr>
                 </a:tc>
+                <a:tc>
+                  <a:txBody>
+                    <a:bodyPr wrap="square"/>
+                    <a:lstStyle/>
+                    <a:p>
+                      <a:pPr algn="r"/>
+                      <a:r>
+                        <a:rPr sz="1000" b="0">
+                          <a:solidFill>
+                            <a:srgbClr val="16213E"/>
+                          </a:solidFill>
+                          <a:latin typeface="Microsoft YaHei"/>
+                        </a:rPr>
+                        <a:t>+25%</a:t>
+                      </a:r>
+                    </a:p>
+                  </a:txBody>
+                  <a:tcPr marL="54864" marR="54864" marT="18288" marB="18288" anchor="ctr">
+                    <a:solidFill>
+                      <a:srgbClr val="E9EBEF"/>
+                    </a:solidFill>
+                  </a:tcPr>
+                </a:tc>
+                <a:tc>
+                  <a:txBody>
+                    <a:bodyPr wrap="square"/>
+                    <a:lstStyle/>
+                    <a:p>
+                      <a:pPr algn="r"/>
+                      <a:r>
+                        <a:rPr sz="1000" b="0">
+                          <a:solidFill>
+                            <a:srgbClr val="16213E"/>
+                          </a:solidFill>
+                          <a:latin typeface="Microsoft YaHei"/>
+                        </a:rPr>
+                        <a:t>+20%</a:t>
+                      </a:r>
+                    </a:p>
+                  </a:txBody>
+                  <a:tcPr marL="54864" marR="54864" marT="18288" marB="18288" anchor="ctr">
+                    <a:solidFill>
+                      <a:srgbClr val="E9EBEF"/>
+                    </a:solidFill>
+                  </a:tcPr>
+                </a:tc>
+                <a:tc>
+                  <a:txBody>
+                    <a:bodyPr wrap="square"/>
+                    <a:lstStyle/>
+                    <a:p>
+                      <a:pPr algn="r"/>
+                      <a:r>
+                        <a:rPr sz="1000" b="0">
+                          <a:solidFill>
+                            <a:srgbClr val="16213E"/>
+                          </a:solidFill>
+                          <a:latin typeface="Microsoft YaHei"/>
+                        </a:rPr>
+                        <a:t>+20%</a:t>
+                      </a:r>
+                    </a:p>
+                  </a:txBody>
+                  <a:tcPr marL="54864" marR="54864" marT="18288" marB="18288" anchor="ctr">
+                    <a:solidFill>
+                      <a:srgbClr val="E9EBEF"/>
+                    </a:solidFill>
+                  </a:tcPr>
+                </a:tc>
               </a:tr>
-              <a:tr h="493776">
-                <a:tc>
-                  <a:txBody>
-                    <a:bodyPr wrap="square"/>
-                    <a:lstStyle/>
-                    <a:p>
-                      <a:pPr algn="l"/>
-                      <a:r>
-                        <a:rPr sz="1150" b="0">
+              <a:tr h="475488">
+                <a:tc>
+                  <a:txBody>
+                    <a:bodyPr wrap="square"/>
+                    <a:lstStyle/>
+                    <a:p>
+                      <a:pPr algn="l"/>
+                      <a:r>
+                        <a:rPr sz="1000" b="0">
                           <a:solidFill>
                             <a:srgbClr val="16213E"/>
                           </a:solidFill>
@@ -11243,7 +13337,7 @@
                       </a:r>
                     </a:p>
                   </a:txBody>
-                  <a:tcPr marL="64008" marR="64008" marT="18288" marB="18288" anchor="ctr">
+                  <a:tcPr marL="54864" marR="54864" marT="18288" marB="18288" anchor="ctr">
                     <a:solidFill>
                       <a:srgbClr val="FFFFFF"/>
                     </a:solidFill>
@@ -11256,7 +13350,7 @@
                     <a:p>
                       <a:pPr algn="r"/>
                       <a:r>
-                        <a:rPr sz="1150" b="0">
+                        <a:rPr sz="1000" b="0">
                           <a:solidFill>
                             <a:srgbClr val="16213E"/>
                           </a:solidFill>
@@ -11266,7 +13360,7 @@
                       </a:r>
                     </a:p>
                   </a:txBody>
-                  <a:tcPr marL="64008" marR="64008" marT="18288" marB="18288" anchor="ctr">
+                  <a:tcPr marL="54864" marR="54864" marT="18288" marB="18288" anchor="ctr">
                     <a:solidFill>
                       <a:srgbClr val="FFFFFF"/>
                     </a:solidFill>
@@ -11279,7 +13373,7 @@
                     <a:p>
                       <a:pPr algn="r"/>
                       <a:r>
-                        <a:rPr sz="1150" b="0">
+                        <a:rPr sz="1000" b="0">
                           <a:solidFill>
                             <a:srgbClr val="16213E"/>
                           </a:solidFill>
@@ -11289,7 +13383,7 @@
                       </a:r>
                     </a:p>
                   </a:txBody>
-                  <a:tcPr marL="64008" marR="64008" marT="18288" marB="18288" anchor="ctr">
+                  <a:tcPr marL="54864" marR="54864" marT="18288" marB="18288" anchor="ctr">
                     <a:solidFill>
                       <a:srgbClr val="FFFFFF"/>
                     </a:solidFill>
@@ -11302,7 +13396,7 @@
                     <a:p>
                       <a:pPr algn="r"/>
                       <a:r>
-                        <a:rPr sz="1150" b="0">
+                        <a:rPr sz="1000" b="0">
                           <a:solidFill>
                             <a:srgbClr val="16213E"/>
                           </a:solidFill>
@@ -11312,7 +13406,7 @@
                       </a:r>
                     </a:p>
                   </a:txBody>
-                  <a:tcPr marL="64008" marR="64008" marT="18288" marB="18288" anchor="ctr">
+                  <a:tcPr marL="54864" marR="54864" marT="18288" marB="18288" anchor="ctr">
                     <a:solidFill>
                       <a:srgbClr val="FFFFFF"/>
                     </a:solidFill>
@@ -11325,7 +13419,7 @@
                     <a:p>
                       <a:pPr algn="r"/>
                       <a:r>
-                        <a:rPr sz="1150" b="0">
+                        <a:rPr sz="1000" b="0">
                           <a:solidFill>
                             <a:srgbClr val="16213E"/>
                           </a:solidFill>
@@ -11335,7 +13429,7 @@
                       </a:r>
                     </a:p>
                   </a:txBody>
-                  <a:tcPr marL="64008" marR="64008" marT="18288" marB="18288" anchor="ctr">
+                  <a:tcPr marL="54864" marR="54864" marT="18288" marB="18288" anchor="ctr">
                     <a:solidFill>
                       <a:srgbClr val="FFFFFF"/>
                     </a:solidFill>
@@ -11348,17 +13442,17 @@
                     <a:p>
                       <a:pPr algn="r"/>
                       <a:r>
-                        <a:rPr sz="1150" b="0">
-                          <a:solidFill>
-                            <a:srgbClr val="16213E"/>
-                          </a:solidFill>
-                          <a:latin typeface="Microsoft YaHei"/>
-                        </a:rPr>
-                        <a:t>+8%</a:t>
-                      </a:r>
-                    </a:p>
-                  </a:txBody>
-                  <a:tcPr marL="64008" marR="64008" marT="18288" marB="18288" anchor="ctr">
+                        <a:rPr sz="1000" b="0">
+                          <a:solidFill>
+                            <a:srgbClr val="16213E"/>
+                          </a:solidFill>
+                          <a:latin typeface="Microsoft YaHei"/>
+                        </a:rPr>
+                        <a:t>8%</a:t>
+                      </a:r>
+                    </a:p>
+                  </a:txBody>
+                  <a:tcPr marL="54864" marR="54864" marT="18288" marB="18288" anchor="ctr">
                     <a:solidFill>
                       <a:srgbClr val="FFFFFF"/>
                     </a:solidFill>
@@ -11371,17 +13465,17 @@
                     <a:p>
                       <a:pPr algn="r"/>
                       <a:r>
-                        <a:rPr sz="1150" b="0">
-                          <a:solidFill>
-                            <a:srgbClr val="16213E"/>
-                          </a:solidFill>
-                          <a:latin typeface="Microsoft YaHei"/>
-                        </a:rPr>
-                        <a:t>+15%</a:t>
-                      </a:r>
-                    </a:p>
-                  </a:txBody>
-                  <a:tcPr marL="64008" marR="64008" marT="18288" marB="18288" anchor="ctr">
+                        <a:rPr sz="1000" b="0">
+                          <a:solidFill>
+                            <a:srgbClr val="16213E"/>
+                          </a:solidFill>
+                          <a:latin typeface="Microsoft YaHei"/>
+                        </a:rPr>
+                        <a:t>15%</a:t>
+                      </a:r>
+                    </a:p>
+                  </a:txBody>
+                  <a:tcPr marL="54864" marR="54864" marT="18288" marB="18288" anchor="ctr">
                     <a:solidFill>
                       <a:srgbClr val="FFFFFF"/>
                     </a:solidFill>
@@ -11394,42 +13488,111 @@
                     <a:p>
                       <a:pPr algn="r"/>
                       <a:r>
-                        <a:rPr sz="1150" b="0">
-                          <a:solidFill>
-                            <a:srgbClr val="16213E"/>
-                          </a:solidFill>
-                          <a:latin typeface="Microsoft YaHei"/>
-                        </a:rPr>
-                        <a:t>+20%</a:t>
-                      </a:r>
-                    </a:p>
-                  </a:txBody>
-                  <a:tcPr marL="64008" marR="64008" marT="18288" marB="18288" anchor="ctr">
+                        <a:rPr sz="1000" b="0">
+                          <a:solidFill>
+                            <a:srgbClr val="16213E"/>
+                          </a:solidFill>
+                          <a:latin typeface="Microsoft YaHei"/>
+                        </a:rPr>
+                        <a:t>20%</a:t>
+                      </a:r>
+                    </a:p>
+                  </a:txBody>
+                  <a:tcPr marL="54864" marR="54864" marT="18288" marB="18288" anchor="ctr">
                     <a:solidFill>
                       <a:srgbClr val="FFFFFF"/>
                     </a:solidFill>
                   </a:tcPr>
                 </a:tc>
+                <a:tc>
+                  <a:txBody>
+                    <a:bodyPr wrap="square"/>
+                    <a:lstStyle/>
+                    <a:p>
+                      <a:pPr algn="r"/>
+                      <a:r>
+                        <a:rPr sz="1000" b="0">
+                          <a:solidFill>
+                            <a:srgbClr val="16213E"/>
+                          </a:solidFill>
+                          <a:latin typeface="Microsoft YaHei"/>
+                        </a:rPr>
+                        <a:t>23%</a:t>
+                      </a:r>
+                    </a:p>
+                  </a:txBody>
+                  <a:tcPr marL="54864" marR="54864" marT="18288" marB="18288" anchor="ctr">
+                    <a:solidFill>
+                      <a:srgbClr val="FFFFFF"/>
+                    </a:solidFill>
+                  </a:tcPr>
+                </a:tc>
+                <a:tc>
+                  <a:txBody>
+                    <a:bodyPr wrap="square"/>
+                    <a:lstStyle/>
+                    <a:p>
+                      <a:pPr algn="r"/>
+                      <a:r>
+                        <a:rPr sz="1000" b="0">
+                          <a:solidFill>
+                            <a:srgbClr val="16213E"/>
+                          </a:solidFill>
+                          <a:latin typeface="Microsoft YaHei"/>
+                        </a:rPr>
+                        <a:t>25%</a:t>
+                      </a:r>
+                    </a:p>
+                  </a:txBody>
+                  <a:tcPr marL="54864" marR="54864" marT="18288" marB="18288" anchor="ctr">
+                    <a:solidFill>
+                      <a:srgbClr val="FFFFFF"/>
+                    </a:solidFill>
+                  </a:tcPr>
+                </a:tc>
+                <a:tc>
+                  <a:txBody>
+                    <a:bodyPr wrap="square"/>
+                    <a:lstStyle/>
+                    <a:p>
+                      <a:pPr algn="r"/>
+                      <a:r>
+                        <a:rPr sz="1000" b="0">
+                          <a:solidFill>
+                            <a:srgbClr val="16213E"/>
+                          </a:solidFill>
+                          <a:latin typeface="Microsoft YaHei"/>
+                        </a:rPr>
+                        <a:t>26%</a:t>
+                      </a:r>
+                    </a:p>
+                  </a:txBody>
+                  <a:tcPr marL="54864" marR="54864" marT="18288" marB="18288" anchor="ctr">
+                    <a:solidFill>
+                      <a:srgbClr val="FFFFFF"/>
+                    </a:solidFill>
+                  </a:tcPr>
+                </a:tc>
               </a:tr>
-              <a:tr h="493776">
-                <a:tc>
-                  <a:txBody>
-                    <a:bodyPr wrap="square"/>
-                    <a:lstStyle/>
-                    <a:p>
-                      <a:pPr algn="l"/>
-                      <a:r>
-                        <a:rPr sz="1150" b="0">
-                          <a:solidFill>
-                            <a:srgbClr val="16213E"/>
-                          </a:solidFill>
-                          <a:latin typeface="Microsoft YaHei"/>
-                        </a:rPr>
-                        <a:t>自由现金流 (FCF)</a:t>
-                      </a:r>
-                    </a:p>
-                  </a:txBody>
-                  <a:tcPr marL="64008" marR="64008" marT="18288" marB="18288" anchor="ctr">
+              <a:tr h="475488">
+                <a:tc>
+                  <a:txBody>
+                    <a:bodyPr wrap="square"/>
+                    <a:lstStyle/>
+                    <a:p>
+                      <a:pPr algn="l"/>
+                      <a:r>
+                        <a:rPr sz="1000" b="0">
+                          <a:solidFill>
+                            <a:srgbClr val="16213E"/>
+                          </a:solidFill>
+                          <a:latin typeface="Microsoft YaHei"/>
+                        </a:rPr>
+                        <a:t>自由现金流</a:t>
+                      </a:r>
+                    </a:p>
+                  </a:txBody>
+                  <a:tcPr marL="54864" marR="54864" marT="18288" marB="18288" anchor="ctr">
                     <a:solidFill>
                       <a:srgbClr val="E9EBEF"/>
                     </a:solidFill>
@@ -11442,7 +13605,7 @@
                     <a:p>
                       <a:pPr algn="r"/>
                       <a:r>
-                        <a:rPr sz="1150" b="0">
+                        <a:rPr sz="1000" b="0">
                           <a:solidFill>
                             <a:srgbClr val="16213E"/>
                           </a:solidFill>
@@ -11452,7 +13615,7 @@
                       </a:r>
                     </a:p>
                   </a:txBody>
-                  <a:tcPr marL="64008" marR="64008" marT="18288" marB="18288" anchor="ctr">
+                  <a:tcPr marL="54864" marR="54864" marT="18288" marB="18288" anchor="ctr">
                     <a:solidFill>
                       <a:srgbClr val="E9EBEF"/>
                     </a:solidFill>
@@ -11465,7 +13628,7 @@
                     <a:p>
                       <a:pPr algn="r"/>
                       <a:r>
-                        <a:rPr sz="1150" b="0">
+                        <a:rPr sz="1000" b="0">
                           <a:solidFill>
                             <a:srgbClr val="16213E"/>
                           </a:solidFill>
@@ -11475,7 +13638,7 @@
                       </a:r>
                     </a:p>
                   </a:txBody>
-                  <a:tcPr marL="64008" marR="64008" marT="18288" marB="18288" anchor="ctr">
+                  <a:tcPr marL="54864" marR="54864" marT="18288" marB="18288" anchor="ctr">
                     <a:solidFill>
                       <a:srgbClr val="E9EBEF"/>
                     </a:solidFill>
@@ -11488,7 +13651,7 @@
                     <a:p>
                       <a:pPr algn="r"/>
                       <a:r>
-                        <a:rPr sz="1150" b="0">
+                        <a:rPr sz="1000" b="0">
                           <a:solidFill>
                             <a:srgbClr val="16213E"/>
                           </a:solidFill>
@@ -11498,7 +13661,7 @@
                       </a:r>
                     </a:p>
                   </a:txBody>
-                  <a:tcPr marL="64008" marR="64008" marT="18288" marB="18288" anchor="ctr">
+                  <a:tcPr marL="54864" marR="54864" marT="18288" marB="18288" anchor="ctr">
                     <a:solidFill>
                       <a:srgbClr val="E9EBEF"/>
                     </a:solidFill>
@@ -11511,17 +13674,17 @@
                     <a:p>
                       <a:pPr algn="r"/>
                       <a:r>
-                        <a:rPr sz="1150" b="0">
-                          <a:solidFill>
-                            <a:srgbClr val="16213E"/>
-                          </a:solidFill>
-                          <a:latin typeface="Microsoft YaHei"/>
-                        </a:rPr>
-                        <a:t>0</a:t>
-                      </a:r>
-                    </a:p>
-                  </a:txBody>
-                  <a:tcPr marL="64008" marR="64008" marT="18288" marB="18288" anchor="ctr">
+                        <a:rPr sz="1000" b="0">
+                          <a:solidFill>
+                            <a:srgbClr val="16213E"/>
+                          </a:solidFill>
+                          <a:latin typeface="Microsoft YaHei"/>
+                        </a:rPr>
+                        <a:t>+0</a:t>
+                      </a:r>
+                    </a:p>
+                  </a:txBody>
+                  <a:tcPr marL="54864" marR="54864" marT="18288" marB="18288" anchor="ctr">
                     <a:solidFill>
                       <a:srgbClr val="E9EBEF"/>
                     </a:solidFill>
@@ -11534,7 +13697,7 @@
                     <a:p>
                       <a:pPr algn="r"/>
                       <a:r>
-                        <a:rPr sz="1150" b="0">
+                        <a:rPr sz="1000" b="0">
                           <a:solidFill>
                             <a:srgbClr val="16213E"/>
                           </a:solidFill>
@@ -11544,7 +13707,7 @@
                       </a:r>
                     </a:p>
                   </a:txBody>
-                  <a:tcPr marL="64008" marR="64008" marT="18288" marB="18288" anchor="ctr">
+                  <a:tcPr marL="54864" marR="54864" marT="18288" marB="18288" anchor="ctr">
                     <a:solidFill>
                       <a:srgbClr val="E9EBEF"/>
                     </a:solidFill>
@@ -11557,7 +13720,7 @@
                     <a:p>
                       <a:pPr algn="r"/>
                       <a:r>
-                        <a:rPr sz="1150" b="0">
+                        <a:rPr sz="1000" b="0">
                           <a:solidFill>
                             <a:srgbClr val="16213E"/>
                           </a:solidFill>
@@ -11567,7 +13730,7 @@
                       </a:r>
                     </a:p>
                   </a:txBody>
-                  <a:tcPr marL="64008" marR="64008" marT="18288" marB="18288" anchor="ctr">
+                  <a:tcPr marL="54864" marR="54864" marT="18288" marB="18288" anchor="ctr">
                     <a:solidFill>
                       <a:srgbClr val="E9EBEF"/>
                     </a:solidFill>
@@ -11580,7 +13743,7 @@
                     <a:p>
                       <a:pPr algn="r"/>
                       <a:r>
-                        <a:rPr sz="1150" b="0">
+                        <a:rPr sz="1000" b="0">
                           <a:solidFill>
                             <a:srgbClr val="16213E"/>
                           </a:solidFill>
@@ -11590,7 +13753,76 @@
                       </a:r>
                     </a:p>
                   </a:txBody>
-                  <a:tcPr marL="64008" marR="64008" marT="18288" marB="18288" anchor="ctr">
+                  <a:tcPr marL="54864" marR="54864" marT="18288" marB="18288" anchor="ctr">
+                    <a:solidFill>
+                      <a:srgbClr val="E9EBEF"/>
+                    </a:solidFill>
+                  </a:tcPr>
+                </a:tc>
+                <a:tc>
+                  <a:txBody>
+                    <a:bodyPr wrap="square"/>
+                    <a:lstStyle/>
+                    <a:p>
+                      <a:pPr algn="r"/>
+                      <a:r>
+                        <a:rPr sz="1000" b="0">
+                          <a:solidFill>
+                            <a:srgbClr val="16213E"/>
+                          </a:solidFill>
+                          <a:latin typeface="Microsoft YaHei"/>
+                        </a:rPr>
+                        <a:t>+401</a:t>
+                      </a:r>
+                    </a:p>
+                  </a:txBody>
+                  <a:tcPr marL="54864" marR="54864" marT="18288" marB="18288" anchor="ctr">
+                    <a:solidFill>
+                      <a:srgbClr val="E9EBEF"/>
+                    </a:solidFill>
+                  </a:tcPr>
+                </a:tc>
+                <a:tc>
+                  <a:txBody>
+                    <a:bodyPr wrap="square"/>
+                    <a:lstStyle/>
+                    <a:p>
+                      <a:pPr algn="r"/>
+                      <a:r>
+                        <a:rPr sz="1000" b="0">
+                          <a:solidFill>
+                            <a:srgbClr val="16213E"/>
+                          </a:solidFill>
+                          <a:latin typeface="Microsoft YaHei"/>
+                        </a:rPr>
+                        <a:t>+523</a:t>
+                      </a:r>
+                    </a:p>
+                  </a:txBody>
+                  <a:tcPr marL="54864" marR="54864" marT="18288" marB="18288" anchor="ctr">
+                    <a:solidFill>
+                      <a:srgbClr val="E9EBEF"/>
+                    </a:solidFill>
+                  </a:tcPr>
+                </a:tc>
+                <a:tc>
+                  <a:txBody>
+                    <a:bodyPr wrap="square"/>
+                    <a:lstStyle/>
+                    <a:p>
+                      <a:pPr algn="r"/>
+                      <a:r>
+                        <a:rPr sz="1000" b="0">
+                          <a:solidFill>
+                            <a:srgbClr val="16213E"/>
+                          </a:solidFill>
+                          <a:latin typeface="Microsoft YaHei"/>
+                        </a:rPr>
+                        <a:t>+652</a:t>
+                      </a:r>
+                    </a:p>
+                  </a:txBody>
+                  <a:tcPr marL="54864" marR="54864" marT="18288" marB="18288" anchor="ctr">
                     <a:solidFill>
                       <a:srgbClr val="E9EBEF"/>
                     </a:solidFill>
@@ -11625,7 +13857,7 @@
           <a:p>
             <a:pPr algn="l">
               <a:spcAft>
-                <a:spcPts val="800"/>
+                <a:spcPts val="700"/>
               </a:spcAft>
             </a:pPr>
             <a:r>
@@ -11641,7 +13873,7 @@
           <a:p>
             <a:pPr algn="l">
               <a:spcAft>
-                <a:spcPts val="800"/>
+                <a:spcPts val="700"/>
               </a:spcAft>
             </a:pPr>
             <a:r>
@@ -11651,13 +13883,13 @@
                 </a:solidFill>
                 <a:latin typeface="Microsoft YaHei"/>
               </a:rPr>
-              <a:t>• 利润率路径：从 2025 深度为负，随规模/自研算力摊薄，2029 盈亏平衡、2032 达 20% 经营利润率</a:t>
+              <a:t>• 利润率路径：2026 深度为负 → 2029 盈亏平衡 → 2035 达 26% 经营利润率（对标成熟平台型软件）</a:t>
             </a:r>
           </a:p>
           <a:p>
             <a:pPr algn="l">
               <a:spcAft>
-                <a:spcPts val="800"/>
+                <a:spcPts val="700"/>
               </a:spcAft>
             </a:pPr>
             <a:r>
@@ -11667,7 +13899,7 @@
                 </a:solidFill>
                 <a:latin typeface="Microsoft YaHei"/>
               </a:rPr>
-              <a:t>• 终值：2032 FCF 永续增长 g=4%，WACC=15%，税率 15%（盈利后）</a:t>
+              <a:t>• 终值：以 2035 FCF 永续增长 g=4%、WACC=15%、盈利后税率 15% 计算</a:t>
             </a:r>
           </a:p>
         </p:txBody>
@@ -11680,7 +13912,7 @@
         </p:nvSpPr>
         <p:spPr>
           <a:xfrm>
-            <a:off x="457200" y="6437376"/>
+            <a:off x="457200" y="6455664"/>
             <a:ext cx="11338560" cy="365760"/>
           </a:xfrm>
           <a:prstGeom prst="rect">
@@ -11702,7 +13934,7 @@
                 </a:solidFill>
                 <a:latin typeface="Microsoft YaHei"/>
               </a:rPr>
-              <a:t>全部为演示性假设 [E]，非公司指引；早期 AI 公司预测误差极大</a:t>
+              <a:t>全部为演示性假设 [E]；早期 AI 公司 10 年预测误差极大，仅用于展示估值框架</a:t>
             </a:r>
           </a:p>
         </p:txBody>
@@ -11776,7 +14008,7 @@
         </p:nvSpPr>
         <p:spPr>
           <a:xfrm>
-            <a:off x="457200" y="237744"/>
+            <a:off x="457200" y="219456"/>
             <a:ext cx="11338560" cy="914400"/>
           </a:xfrm>
           <a:prstGeom prst="rect">
@@ -11792,13 +14024,13 @@
           <a:p>
             <a:pPr algn="l"/>
             <a:r>
-              <a:rPr sz="2600" b="1">
+              <a:rPr sz="2500" b="1">
                 <a:solidFill>
                   <a:srgbClr val="16213E"/>
                 </a:solidFill>
                 <a:latin typeface="Microsoft YaHei"/>
               </a:rPr>
-              <a:t>【DCF】结论：基准 DCF 仅得 ≈US$0.7B 企业价值，远低于 ~US$5.9B 市值</a:t>
+              <a:t>【DCF】结论：10 年 DCF 股权价值 ≈US$2.4B，仍只到 ~US$5.9B 市值的约 40%</a:t>
             </a:r>
           </a:p>
         </p:txBody>
@@ -11811,8 +14043,8 @@
         </p:nvSpPr>
         <p:spPr>
           <a:xfrm>
-            <a:off x="10058400" y="274320"/>
-            <a:ext cx="1828800" cy="411480"/>
+            <a:off x="10104120" y="274320"/>
+            <a:ext cx="1783080" cy="384048"/>
           </a:xfrm>
           <a:prstGeom prst="rect">
             <a:avLst/>
@@ -11865,7 +14097,7 @@
         </p:nvGraphicFramePr>
         <p:xfrm>
           <a:off x="457200" y="1645920"/>
-          <a:ext cx="5120640" cy="2011680"/>
+          <a:ext cx="5120640" cy="2103120"/>
         </p:xfrm>
         <a:graphic>
           <a:graphicData uri="http://schemas.openxmlformats.org/drawingml/2006/table">
@@ -11877,7 +14109,7 @@
                 <a:gridCol w="3108960"/>
                 <a:gridCol w="2011680"/>
               </a:tblGrid>
-              <a:tr h="335280">
+              <a:tr h="350520">
                 <a:tc>
                   <a:txBody>
                     <a:bodyPr wrap="square"/>
@@ -11895,7 +14127,7 @@
                       </a:r>
                     </a:p>
                   </a:txBody>
-                  <a:tcPr marL="64008" marR="64008" marT="18288" marB="18288" anchor="ctr">
+                  <a:tcPr marL="54864" marR="54864" marT="18288" marB="18288" anchor="ctr">
                     <a:solidFill>
                       <a:srgbClr val="16213E"/>
                     </a:solidFill>
@@ -11918,14 +14150,14 @@
                       </a:r>
                     </a:p>
                   </a:txBody>
-                  <a:tcPr marL="64008" marR="64008" marT="18288" marB="18288" anchor="ctr">
+                  <a:tcPr marL="54864" marR="54864" marT="18288" marB="18288" anchor="ctr">
                     <a:solidFill>
                       <a:srgbClr val="16213E"/>
                     </a:solidFill>
                   </a:tcPr>
                 </a:tc>
               </a:tr>
-              <a:tr h="335280">
+              <a:tr h="350520">
                 <a:tc>
                   <a:txBody>
                     <a:bodyPr wrap="square"/>
@@ -11943,7 +14175,7 @@
                       </a:r>
                     </a:p>
                   </a:txBody>
-                  <a:tcPr marL="64008" marR="64008" marT="18288" marB="18288" anchor="ctr">
+                  <a:tcPr marL="54864" marR="54864" marT="18288" marB="18288" anchor="ctr">
                     <a:solidFill>
                       <a:srgbClr val="FFFFFF"/>
                     </a:solidFill>
@@ -11962,18 +14194,18 @@
                           </a:solidFill>
                           <a:latin typeface="Microsoft YaHei"/>
                         </a:rPr>
-                        <a:t>-271</a:t>
-                      </a:r>
-                    </a:p>
-                  </a:txBody>
-                  <a:tcPr marL="64008" marR="64008" marT="18288" marB="18288" anchor="ctr">
+                        <a:t>+170</a:t>
+                      </a:r>
+                    </a:p>
+                  </a:txBody>
+                  <a:tcPr marL="54864" marR="54864" marT="18288" marB="18288" anchor="ctr">
                     <a:solidFill>
                       <a:srgbClr val="FFFFFF"/>
                     </a:solidFill>
                   </a:tcPr>
                 </a:tc>
               </a:tr>
-              <a:tr h="335280">
+              <a:tr h="350520">
                 <a:tc>
                   <a:txBody>
                     <a:bodyPr wrap="square"/>
@@ -11991,7 +14223,7 @@
                       </a:r>
                     </a:p>
                   </a:txBody>
-                  <a:tcPr marL="64008" marR="64008" marT="18288" marB="18288" anchor="ctr">
+                  <a:tcPr marL="54864" marR="54864" marT="18288" marB="18288" anchor="ctr">
                     <a:solidFill>
                       <a:srgbClr val="E9EBEF"/>
                     </a:solidFill>
@@ -12010,18 +14242,18 @@
                           </a:solidFill>
                           <a:latin typeface="Microsoft YaHei"/>
                         </a:rPr>
-                        <a:t>+992</a:t>
-                      </a:r>
-                    </a:p>
-                  </a:txBody>
-                  <a:tcPr marL="64008" marR="64008" marT="18288" marB="18288" anchor="ctr">
+                        <a:t>+1524</a:t>
+                      </a:r>
+                    </a:p>
+                  </a:txBody>
+                  <a:tcPr marL="54864" marR="54864" marT="18288" marB="18288" anchor="ctr">
                     <a:solidFill>
                       <a:srgbClr val="E9EBEF"/>
                     </a:solidFill>
                   </a:tcPr>
                 </a:tc>
               </a:tr>
-              <a:tr h="335280">
+              <a:tr h="350520">
                 <a:tc>
                   <a:txBody>
                     <a:bodyPr wrap="square"/>
@@ -12039,7 +14271,7 @@
                       </a:r>
                     </a:p>
                   </a:txBody>
-                  <a:tcPr marL="64008" marR="64008" marT="18288" marB="18288" anchor="ctr">
+                  <a:tcPr marL="54864" marR="54864" marT="18288" marB="18288" anchor="ctr">
                     <a:solidFill>
                       <a:srgbClr val="FFFFFF"/>
                     </a:solidFill>
@@ -12058,18 +14290,18 @@
                           </a:solidFill>
                           <a:latin typeface="Microsoft YaHei"/>
                         </a:rPr>
-                        <a:t>≈ 721</a:t>
-                      </a:r>
-                    </a:p>
-                  </a:txBody>
-                  <a:tcPr marL="64008" marR="64008" marT="18288" marB="18288" anchor="ctr">
+                        <a:t>≈ 1694</a:t>
+                      </a:r>
+                    </a:p>
+                  </a:txBody>
+                  <a:tcPr marL="54864" marR="54864" marT="18288" marB="18288" anchor="ctr">
                     <a:solidFill>
                       <a:srgbClr val="FFFFFF"/>
                     </a:solidFill>
                   </a:tcPr>
                 </a:tc>
               </a:tr>
-              <a:tr h="335280">
+              <a:tr h="350520">
                 <a:tc>
                   <a:txBody>
                     <a:bodyPr wrap="square"/>
@@ -12083,11 +14315,11 @@
                           </a:solidFill>
                           <a:latin typeface="Microsoft YaHei"/>
                         </a:rPr>
-                        <a:t>+ 净现金 (IPO募资等)</a:t>
-                      </a:r>
-                    </a:p>
-                  </a:txBody>
-                  <a:tcPr marL="64008" marR="64008" marT="18288" marB="18288" anchor="ctr">
+                        <a:t>+ 净现金 [E]</a:t>
+                      </a:r>
+                    </a:p>
+                  </a:txBody>
+                  <a:tcPr marL="54864" marR="54864" marT="18288" marB="18288" anchor="ctr">
                     <a:solidFill>
                       <a:srgbClr val="E9EBEF"/>
                     </a:solidFill>
@@ -12106,18 +14338,18 @@
                           </a:solidFill>
                           <a:latin typeface="Microsoft YaHei"/>
                         </a:rPr>
-                        <a:t>≈ 700 [E]</a:t>
-                      </a:r>
-                    </a:p>
-                  </a:txBody>
-                  <a:tcPr marL="64008" marR="64008" marT="18288" marB="18288" anchor="ctr">
+                        <a:t>≈ 700</a:t>
+                      </a:r>
+                    </a:p>
+                  </a:txBody>
+                  <a:tcPr marL="54864" marR="54864" marT="18288" marB="18288" anchor="ctr">
                     <a:solidFill>
                       <a:srgbClr val="E9EBEF"/>
                     </a:solidFill>
                   </a:tcPr>
                 </a:tc>
               </a:tr>
-              <a:tr h="335280">
+              <a:tr h="350520">
                 <a:tc>
                   <a:txBody>
                     <a:bodyPr wrap="square"/>
@@ -12135,7 +14367,7 @@
                       </a:r>
                     </a:p>
                   </a:txBody>
-                  <a:tcPr marL="64008" marR="64008" marT="18288" marB="18288" anchor="ctr">
+                  <a:tcPr marL="54864" marR="54864" marT="18288" marB="18288" anchor="ctr">
                     <a:solidFill>
                       <a:srgbClr val="FFFFFF"/>
                     </a:solidFill>
@@ -12154,11 +14386,11 @@
                           </a:solidFill>
                           <a:latin typeface="Microsoft YaHei"/>
                         </a:rPr>
-                        <a:t>≈ 1,421</a:t>
-                      </a:r>
-                    </a:p>
-                  </a:txBody>
-                  <a:tcPr marL="64008" marR="64008" marT="18288" marB="18288" anchor="ctr">
+                        <a:t>≈ 2394</a:t>
+                      </a:r>
+                    </a:p>
+                  </a:txBody>
+                  <a:tcPr marL="54864" marR="54864" marT="18288" marB="18288" anchor="ctr">
                     <a:solidFill>
                       <a:srgbClr val="FFFFFF"/>
                     </a:solidFill>
@@ -12177,8 +14409,8 @@
         </p:nvSpPr>
         <p:spPr>
           <a:xfrm>
-            <a:off x="457200" y="3840480"/>
-            <a:ext cx="5120640" cy="457200"/>
+            <a:off x="457200" y="3886200"/>
+            <a:ext cx="5120640" cy="365760"/>
           </a:xfrm>
           <a:prstGeom prst="rect">
             <a:avLst/>
@@ -12193,7 +14425,7 @@
           <a:p>
             <a:pPr algn="l"/>
             <a:r>
-              <a:rPr sz="1300" b="1">
+              <a:rPr sz="1250" b="1">
                 <a:solidFill>
                   <a:srgbClr val="16213E"/>
                 </a:solidFill>
@@ -12236,7 +14468,7 @@
                     <a:p>
                       <a:pPr algn="l"/>
                       <a:r>
-                        <a:rPr sz="1150" b="1">
+                        <a:rPr sz="1100" b="1">
                           <a:solidFill>
                             <a:srgbClr val="FFFFFF"/>
                           </a:solidFill>
@@ -12246,7 +14478,7 @@
                       </a:r>
                     </a:p>
                   </a:txBody>
-                  <a:tcPr marL="64008" marR="64008" marT="18288" marB="18288" anchor="ctr">
+                  <a:tcPr marL="54864" marR="54864" marT="18288" marB="18288" anchor="ctr">
                     <a:solidFill>
                       <a:srgbClr val="16213E"/>
                     </a:solidFill>
@@ -12259,7 +14491,7 @@
                     <a:p>
                       <a:pPr algn="l"/>
                       <a:r>
-                        <a:rPr sz="1150" b="1">
+                        <a:rPr sz="1100" b="1">
                           <a:solidFill>
                             <a:srgbClr val="FFFFFF"/>
                           </a:solidFill>
@@ -12269,7 +14501,7 @@
                       </a:r>
                     </a:p>
                   </a:txBody>
-                  <a:tcPr marL="64008" marR="64008" marT="18288" marB="18288" anchor="ctr">
+                  <a:tcPr marL="54864" marR="54864" marT="18288" marB="18288" anchor="ctr">
                     <a:solidFill>
                       <a:srgbClr val="16213E"/>
                     </a:solidFill>
@@ -12282,7 +14514,7 @@
                     <a:p>
                       <a:pPr algn="l"/>
                       <a:r>
-                        <a:rPr sz="1150" b="1">
+                        <a:rPr sz="1100" b="1">
                           <a:solidFill>
                             <a:srgbClr val="FFFFFF"/>
                           </a:solidFill>
@@ -12292,7 +14524,7 @@
                       </a:r>
                     </a:p>
                   </a:txBody>
-                  <a:tcPr marL="64008" marR="64008" marT="18288" marB="18288" anchor="ctr">
+                  <a:tcPr marL="54864" marR="54864" marT="18288" marB="18288" anchor="ctr">
                     <a:solidFill>
                       <a:srgbClr val="16213E"/>
                     </a:solidFill>
@@ -12305,7 +14537,7 @@
                     <a:p>
                       <a:pPr algn="l"/>
                       <a:r>
-                        <a:rPr sz="1150" b="1">
+                        <a:rPr sz="1100" b="1">
                           <a:solidFill>
                             <a:srgbClr val="FFFFFF"/>
                           </a:solidFill>
@@ -12315,7 +14547,7 @@
                       </a:r>
                     </a:p>
                   </a:txBody>
-                  <a:tcPr marL="64008" marR="64008" marT="18288" marB="18288" anchor="ctr">
+                  <a:tcPr marL="54864" marR="54864" marT="18288" marB="18288" anchor="ctr">
                     <a:solidFill>
                       <a:srgbClr val="16213E"/>
                     </a:solidFill>
@@ -12330,7 +14562,7 @@
                     <a:p>
                       <a:pPr algn="l"/>
                       <a:r>
-                        <a:rPr sz="1150" b="0">
+                        <a:rPr sz="1100" b="0">
                           <a:solidFill>
                             <a:srgbClr val="16213E"/>
                           </a:solidFill>
@@ -12340,7 +14572,7 @@
                       </a:r>
                     </a:p>
                   </a:txBody>
-                  <a:tcPr marL="64008" marR="64008" marT="18288" marB="18288" anchor="ctr">
+                  <a:tcPr marL="54864" marR="54864" marT="18288" marB="18288" anchor="ctr">
                     <a:solidFill>
                       <a:srgbClr val="FFFFFF"/>
                     </a:solidFill>
@@ -12353,17 +14585,17 @@
                     <a:p>
                       <a:pPr algn="r"/>
                       <a:r>
-                        <a:rPr sz="1150" b="0">
-                          <a:solidFill>
-                            <a:srgbClr val="16213E"/>
-                          </a:solidFill>
-                          <a:latin typeface="Microsoft YaHei"/>
-                        </a:rPr>
-                        <a:t>980</a:t>
-                      </a:r>
-                    </a:p>
-                  </a:txBody>
-                  <a:tcPr marL="64008" marR="64008" marT="18288" marB="18288" anchor="ctr">
+                        <a:rPr sz="1100" b="0">
+                          <a:solidFill>
+                            <a:srgbClr val="16213E"/>
+                          </a:solidFill>
+                          <a:latin typeface="Microsoft YaHei"/>
+                        </a:rPr>
+                        <a:t>2235</a:t>
+                      </a:r>
+                    </a:p>
+                  </a:txBody>
+                  <a:tcPr marL="54864" marR="54864" marT="18288" marB="18288" anchor="ctr">
                     <a:solidFill>
                       <a:srgbClr val="FFFFFF"/>
                     </a:solidFill>
@@ -12376,17 +14608,17 @@
                     <a:p>
                       <a:pPr algn="r"/>
                       <a:r>
-                        <a:rPr sz="1150" b="0">
-                          <a:solidFill>
-                            <a:srgbClr val="16213E"/>
-                          </a:solidFill>
-                          <a:latin typeface="Microsoft YaHei"/>
-                        </a:rPr>
-                        <a:t>1180</a:t>
-                      </a:r>
-                    </a:p>
-                  </a:txBody>
-                  <a:tcPr marL="64008" marR="64008" marT="18288" marB="18288" anchor="ctr">
+                        <a:rPr sz="1100" b="0">
+                          <a:solidFill>
+                            <a:srgbClr val="16213E"/>
+                          </a:solidFill>
+                          <a:latin typeface="Microsoft YaHei"/>
+                        </a:rPr>
+                        <a:t>2476</a:t>
+                      </a:r>
+                    </a:p>
+                  </a:txBody>
+                  <a:tcPr marL="54864" marR="54864" marT="18288" marB="18288" anchor="ctr">
                     <a:solidFill>
                       <a:srgbClr val="FFFFFF"/>
                     </a:solidFill>
@@ -12399,17 +14631,17 @@
                     <a:p>
                       <a:pPr algn="r"/>
                       <a:r>
-                        <a:rPr sz="1150" b="0">
-                          <a:solidFill>
-                            <a:srgbClr val="16213E"/>
-                          </a:solidFill>
-                          <a:latin typeface="Microsoft YaHei"/>
-                        </a:rPr>
-                        <a:t>1460</a:t>
-                      </a:r>
-                    </a:p>
-                  </a:txBody>
-                  <a:tcPr marL="64008" marR="64008" marT="18288" marB="18288" anchor="ctr">
+                        <a:rPr sz="1100" b="0">
+                          <a:solidFill>
+                            <a:srgbClr val="16213E"/>
+                          </a:solidFill>
+                          <a:latin typeface="Microsoft YaHei"/>
+                        </a:rPr>
+                        <a:t>2778</a:t>
+                      </a:r>
+                    </a:p>
+                  </a:txBody>
+                  <a:tcPr marL="54864" marR="54864" marT="18288" marB="18288" anchor="ctr">
                     <a:solidFill>
                       <a:srgbClr val="FFFFFF"/>
                     </a:solidFill>
@@ -12424,7 +14656,7 @@
                     <a:p>
                       <a:pPr algn="l"/>
                       <a:r>
-                        <a:rPr sz="1150" b="0">
+                        <a:rPr sz="1100" b="0">
                           <a:solidFill>
                             <a:srgbClr val="16213E"/>
                           </a:solidFill>
@@ -12434,7 +14666,7 @@
                       </a:r>
                     </a:p>
                   </a:txBody>
-                  <a:tcPr marL="64008" marR="64008" marT="18288" marB="18288" anchor="ctr">
+                  <a:tcPr marL="54864" marR="54864" marT="18288" marB="18288" anchor="ctr">
                     <a:solidFill>
                       <a:srgbClr val="E9EBEF"/>
                     </a:solidFill>
@@ -12447,17 +14679,17 @@
                     <a:p>
                       <a:pPr algn="r"/>
                       <a:r>
-                        <a:rPr sz="1150" b="0">
-                          <a:solidFill>
-                            <a:srgbClr val="16213E"/>
-                          </a:solidFill>
-                          <a:latin typeface="Microsoft YaHei"/>
-                        </a:rPr>
-                        <a:t>600</a:t>
-                      </a:r>
-                    </a:p>
-                  </a:txBody>
-                  <a:tcPr marL="64008" marR="64008" marT="18288" marB="18288" anchor="ctr">
+                        <a:rPr sz="1100" b="0">
+                          <a:solidFill>
+                            <a:srgbClr val="16213E"/>
+                          </a:solidFill>
+                          <a:latin typeface="Microsoft YaHei"/>
+                        </a:rPr>
+                        <a:t>1554</a:t>
+                      </a:r>
+                    </a:p>
+                  </a:txBody>
+                  <a:tcPr marL="54864" marR="54864" marT="18288" marB="18288" anchor="ctr">
                     <a:solidFill>
                       <a:srgbClr val="E9EBEF"/>
                     </a:solidFill>
@@ -12470,17 +14702,17 @@
                     <a:p>
                       <a:pPr algn="r"/>
                       <a:r>
-                        <a:rPr sz="1150" b="0">
-                          <a:solidFill>
-                            <a:srgbClr val="16213E"/>
-                          </a:solidFill>
-                          <a:latin typeface="Microsoft YaHei"/>
-                        </a:rPr>
-                        <a:t>721</a:t>
-                      </a:r>
-                    </a:p>
-                  </a:txBody>
-                  <a:tcPr marL="64008" marR="64008" marT="18288" marB="18288" anchor="ctr">
+                        <a:rPr sz="1100" b="0">
+                          <a:solidFill>
+                            <a:srgbClr val="16213E"/>
+                          </a:solidFill>
+                          <a:latin typeface="Microsoft YaHei"/>
+                        </a:rPr>
+                        <a:t>1694</a:t>
+                      </a:r>
+                    </a:p>
+                  </a:txBody>
+                  <a:tcPr marL="54864" marR="54864" marT="18288" marB="18288" anchor="ctr">
                     <a:solidFill>
                       <a:srgbClr val="E9EBEF"/>
                     </a:solidFill>
@@ -12493,17 +14725,17 @@
                     <a:p>
                       <a:pPr algn="r"/>
                       <a:r>
-                        <a:rPr sz="1150" b="0">
-                          <a:solidFill>
-                            <a:srgbClr val="16213E"/>
-                          </a:solidFill>
-                          <a:latin typeface="Microsoft YaHei"/>
-                        </a:rPr>
-                        <a:t>880</a:t>
-                      </a:r>
-                    </a:p>
-                  </a:txBody>
-                  <a:tcPr marL="64008" marR="64008" marT="18288" marB="18288" anchor="ctr">
+                        <a:rPr sz="1100" b="0">
+                          <a:solidFill>
+                            <a:srgbClr val="16213E"/>
+                          </a:solidFill>
+                          <a:latin typeface="Microsoft YaHei"/>
+                        </a:rPr>
+                        <a:t>1863</a:t>
+                      </a:r>
+                    </a:p>
+                  </a:txBody>
+                  <a:tcPr marL="54864" marR="54864" marT="18288" marB="18288" anchor="ctr">
                     <a:solidFill>
                       <a:srgbClr val="E9EBEF"/>
                     </a:solidFill>
@@ -12518,7 +14750,7 @@
                     <a:p>
                       <a:pPr algn="l"/>
                       <a:r>
-                        <a:rPr sz="1150" b="0">
+                        <a:rPr sz="1100" b="0">
                           <a:solidFill>
                             <a:srgbClr val="16213E"/>
                           </a:solidFill>
@@ -12528,7 +14760,7 @@
                       </a:r>
                     </a:p>
                   </a:txBody>
-                  <a:tcPr marL="64008" marR="64008" marT="18288" marB="18288" anchor="ctr">
+                  <a:tcPr marL="54864" marR="54864" marT="18288" marB="18288" anchor="ctr">
                     <a:solidFill>
                       <a:srgbClr val="FFFFFF"/>
                     </a:solidFill>
@@ -12541,17 +14773,17 @@
                     <a:p>
                       <a:pPr algn="r"/>
                       <a:r>
-                        <a:rPr sz="1150" b="0">
-                          <a:solidFill>
-                            <a:srgbClr val="16213E"/>
-                          </a:solidFill>
-                          <a:latin typeface="Microsoft YaHei"/>
-                        </a:rPr>
-                        <a:t>340</a:t>
-                      </a:r>
-                    </a:p>
-                  </a:txBody>
-                  <a:tcPr marL="64008" marR="64008" marT="18288" marB="18288" anchor="ctr">
+                        <a:rPr sz="1100" b="0">
+                          <a:solidFill>
+                            <a:srgbClr val="16213E"/>
+                          </a:solidFill>
+                          <a:latin typeface="Microsoft YaHei"/>
+                        </a:rPr>
+                        <a:t>1097</a:t>
+                      </a:r>
+                    </a:p>
+                  </a:txBody>
+                  <a:tcPr marL="54864" marR="54864" marT="18288" marB="18288" anchor="ctr">
                     <a:solidFill>
                       <a:srgbClr val="FFFFFF"/>
                     </a:solidFill>
@@ -12564,17 +14796,17 @@
                     <a:p>
                       <a:pPr algn="r"/>
                       <a:r>
-                        <a:rPr sz="1150" b="0">
-                          <a:solidFill>
-                            <a:srgbClr val="16213E"/>
-                          </a:solidFill>
-                          <a:latin typeface="Microsoft YaHei"/>
-                        </a:rPr>
-                        <a:t>430</a:t>
-                      </a:r>
-                    </a:p>
-                  </a:txBody>
-                  <a:tcPr marL="64008" marR="64008" marT="18288" marB="18288" anchor="ctr">
+                        <a:rPr sz="1100" b="0">
+                          <a:solidFill>
+                            <a:srgbClr val="16213E"/>
+                          </a:solidFill>
+                          <a:latin typeface="Microsoft YaHei"/>
+                        </a:rPr>
+                        <a:t>1184</a:t>
+                      </a:r>
+                    </a:p>
+                  </a:txBody>
+                  <a:tcPr marL="54864" marR="54864" marT="18288" marB="18288" anchor="ctr">
                     <a:solidFill>
                       <a:srgbClr val="FFFFFF"/>
                     </a:solidFill>
@@ -12587,17 +14819,17 @@
                     <a:p>
                       <a:pPr algn="r"/>
                       <a:r>
-                        <a:rPr sz="1150" b="0">
-                          <a:solidFill>
-                            <a:srgbClr val="16213E"/>
-                          </a:solidFill>
-                          <a:latin typeface="Microsoft YaHei"/>
-                        </a:rPr>
-                        <a:t>540</a:t>
-                      </a:r>
-                    </a:p>
-                  </a:txBody>
-                  <a:tcPr marL="64008" marR="64008" marT="18288" marB="18288" anchor="ctr">
+                        <a:rPr sz="1100" b="0">
+                          <a:solidFill>
+                            <a:srgbClr val="16213E"/>
+                          </a:solidFill>
+                          <a:latin typeface="Microsoft YaHei"/>
+                        </a:rPr>
+                        <a:t>1286</a:t>
+                      </a:r>
+                    </a:p>
+                  </a:txBody>
+                  <a:tcPr marL="54864" marR="54864" marT="18288" marB="18288" anchor="ctr">
                     <a:solidFill>
                       <a:srgbClr val="FFFFFF"/>
                     </a:solidFill>
@@ -12632,7 +14864,7 @@
           <a:p>
             <a:pPr algn="l">
               <a:spcAft>
-                <a:spcPts val="800"/>
+                <a:spcPts val="700"/>
               </a:spcAft>
             </a:pPr>
             <a:r>
@@ -12642,13 +14874,13 @@
                 </a:solidFill>
                 <a:latin typeface="Microsoft YaHei"/>
               </a:rPr>
-              <a:t>怎么读这个结果</a:t>
+              <a:t>把显性期从 7 年拉到 10 年后</a:t>
             </a:r>
           </a:p>
           <a:p>
             <a:pPr algn="l">
               <a:spcAft>
-                <a:spcPts val="800"/>
+                <a:spcPts val="700"/>
               </a:spcAft>
             </a:pPr>
             <a:r>
@@ -12658,13 +14890,13 @@
                 </a:solidFill>
                 <a:latin typeface="Microsoft YaHei"/>
               </a:rPr>
-              <a:t>• 即便用相当乐观的 7 年高增长 + 2032 转 20% 利润率，基准 DCF 股权价值也只有 ≈US$1.4B，仅市值的约 1/4。</a:t>
+              <a:t>• 企业价值从 ~$0.7B 升到 ≈$1.7B，股权价值 ≈$2.4B——确实更接近，但仍只有市值约 40%。</a:t>
             </a:r>
           </a:p>
           <a:p>
             <a:pPr algn="l">
               <a:spcAft>
-                <a:spcPts val="800"/>
+                <a:spcPts val="700"/>
               </a:spcAft>
             </a:pPr>
             <a:r>
@@ -12674,13 +14906,13 @@
                 </a:solidFill>
                 <a:latin typeface="Microsoft YaHei"/>
               </a:rPr>
-              <a:t>• 原因：近端 FCF 深度为负，价值几乎全靠终值；而终值又被高 WACC 折得很薄。</a:t>
+              <a:t>• 多出来的价值几乎全来自 2030 年后的盈利年份与更高终值，前 4 年 FCF 依旧为负。</a:t>
             </a:r>
           </a:p>
           <a:p>
             <a:pPr algn="l">
               <a:spcAft>
-                <a:spcPts val="800"/>
+                <a:spcPts val="700"/>
               </a:spcAft>
             </a:pPr>
             <a:r>
@@ -12690,13 +14922,13 @@
                 </a:solidFill>
                 <a:latin typeface="Microsoft YaHei"/>
               </a:rPr>
-              <a:t>• 结论：传统 DCF 无法解释市场定价 → MiniMax 不是“现金流标的”，而是“长期期权”。</a:t>
+              <a:t>• 即便最乐观格 (WACC 13% × g 5%) 也才 ~$2.8B EV，仍低于市值。</a:t>
             </a:r>
           </a:p>
           <a:p>
             <a:pPr algn="l">
               <a:spcAft>
-                <a:spcPts val="800"/>
+                <a:spcPts val="700"/>
               </a:spcAft>
             </a:pPr>
             <a:r>
@@ -12706,7 +14938,7 @@
                 </a:solidFill>
                 <a:latin typeface="Microsoft YaHei"/>
               </a:rPr>
-              <a:t>• 这不代表市场错——而是说估值锚点应换成下一页的“反推法”与倍数法。</a:t>
+              <a:t>• 结论不变：现金流折现解释不了市场定价，MiniMax 是“长期期权”而非“现金流标的”。</a:t>
             </a:r>
           </a:p>
         </p:txBody>
@@ -12719,7 +14951,7 @@
         </p:nvSpPr>
         <p:spPr>
           <a:xfrm>
-            <a:off x="457200" y="6437376"/>
+            <a:off x="457200" y="6455664"/>
             <a:ext cx="11338560" cy="365760"/>
           </a:xfrm>
           <a:prstGeom prst="rect">
@@ -12815,7 +15047,7 @@
         </p:nvSpPr>
         <p:spPr>
           <a:xfrm>
-            <a:off x="457200" y="237744"/>
+            <a:off x="457200" y="219456"/>
             <a:ext cx="11338560" cy="914400"/>
           </a:xfrm>
           <a:prstGeom prst="rect">
@@ -12831,7 +15063,7 @@
           <a:p>
             <a:pPr algn="l"/>
             <a:r>
-              <a:rPr sz="2600" b="1">
+              <a:rPr sz="2500" b="1">
                 <a:solidFill>
                   <a:srgbClr val="16213E"/>
                 </a:solidFill>
@@ -12850,8 +15082,8 @@
         </p:nvSpPr>
         <p:spPr>
           <a:xfrm>
-            <a:off x="10058400" y="274320"/>
-            <a:ext cx="1828800" cy="411480"/>
+            <a:off x="10104120" y="274320"/>
+            <a:ext cx="1783080" cy="384048"/>
           </a:xfrm>
           <a:prstGeom prst="rect">
             <a:avLst/>
@@ -12918,7 +15150,7 @@
           <a:p>
             <a:pPr algn="l">
               <a:spcAft>
-                <a:spcPts val="800"/>
+                <a:spcPts val="700"/>
               </a:spcAft>
             </a:pPr>
             <a:r>
@@ -12934,7 +15166,7 @@
           <a:p>
             <a:pPr algn="l">
               <a:spcAft>
-                <a:spcPts val="800"/>
+                <a:spcPts val="700"/>
               </a:spcAft>
             </a:pPr>
             <a:r>
@@ -12944,13 +15176,13 @@
                 </a:solidFill>
                 <a:latin typeface="Microsoft YaHei"/>
               </a:rPr>
-              <a:t>• 营收到 2032 年达 ~US$3.5-4B（即 7 年 ~45%+ 复合增速不掉档）</a:t>
+              <a:t>• 营收到 2035 远超本模型的 ~$3B（需更陡的长尾增长）</a:t>
             </a:r>
           </a:p>
           <a:p>
             <a:pPr algn="l">
               <a:spcAft>
-                <a:spcPts val="800"/>
+                <a:spcPts val="700"/>
               </a:spcAft>
             </a:pPr>
             <a:r>
@@ -12960,13 +15192,13 @@
                 </a:solidFill>
                 <a:latin typeface="Microsoft YaHei"/>
               </a:rPr>
-              <a:t>• 且 2032 经营利润率升至 ~25-30%（远超当前为负）</a:t>
+              <a:t>• 或终值利润率升到 30%+、WACC 降到 ~12%</a:t>
             </a:r>
           </a:p>
           <a:p>
             <a:pPr algn="l">
               <a:spcAft>
-                <a:spcPts val="800"/>
+                <a:spcPts val="700"/>
               </a:spcAft>
             </a:pPr>
             <a:r>
@@ -12976,20 +15208,20 @@
                 </a:solidFill>
                 <a:latin typeface="Microsoft YaHei"/>
               </a:rPr>
-              <a:t>• 即“再造一个区域级 AI 平台”的成功路径，容错率极低</a:t>
+              <a:t>• 即“再造一个区域级多模态 AI 平台”，容错率极低</a:t>
             </a:r>
           </a:p>
           <a:p>
             <a:pPr algn="l">
               <a:spcAft>
-                <a:spcPts val="800"/>
+                <a:spcPts val="700"/>
               </a:spcAft>
             </a:pPr>
           </a:p>
           <a:p>
             <a:pPr algn="l">
               <a:spcAft>
-                <a:spcPts val="800"/>
+                <a:spcPts val="700"/>
               </a:spcAft>
             </a:pPr>
             <a:r>
@@ -13044,7 +15276,7 @@
                       </a:r>
                     </a:p>
                   </a:txBody>
-                  <a:tcPr marL="64008" marR="64008" marT="18288" marB="18288" anchor="ctr">
+                  <a:tcPr marL="54864" marR="54864" marT="18288" marB="18288" anchor="ctr">
                     <a:solidFill>
                       <a:srgbClr val="16213E"/>
                     </a:solidFill>
@@ -13067,7 +15299,7 @@
                       </a:r>
                     </a:p>
                   </a:txBody>
-                  <a:tcPr marL="64008" marR="64008" marT="18288" marB="18288" anchor="ctr">
+                  <a:tcPr marL="54864" marR="54864" marT="18288" marB="18288" anchor="ctr">
                     <a:solidFill>
                       <a:srgbClr val="16213E"/>
                     </a:solidFill>
@@ -13092,7 +15324,7 @@
                       </a:r>
                     </a:p>
                   </a:txBody>
-                  <a:tcPr marL="64008" marR="64008" marT="18288" marB="18288" anchor="ctr">
+                  <a:tcPr marL="54864" marR="54864" marT="18288" marB="18288" anchor="ctr">
                     <a:solidFill>
                       <a:srgbClr val="FFFFFF"/>
                     </a:solidFill>
@@ -13115,7 +15347,7 @@
                       </a:r>
                     </a:p>
                   </a:txBody>
-                  <a:tcPr marL="64008" marR="64008" marT="18288" marB="18288" anchor="ctr">
+                  <a:tcPr marL="54864" marR="54864" marT="18288" marB="18288" anchor="ctr">
                     <a:solidFill>
                       <a:srgbClr val="FFFFFF"/>
                     </a:solidFill>
@@ -13140,7 +15372,7 @@
                       </a:r>
                     </a:p>
                   </a:txBody>
-                  <a:tcPr marL="64008" marR="64008" marT="18288" marB="18288" anchor="ctr">
+                  <a:tcPr marL="54864" marR="54864" marT="18288" marB="18288" anchor="ctr">
                     <a:solidFill>
                       <a:srgbClr val="E9EBEF"/>
                     </a:solidFill>
@@ -13163,7 +15395,7 @@
                       </a:r>
                     </a:p>
                   </a:txBody>
-                  <a:tcPr marL="64008" marR="64008" marT="18288" marB="18288" anchor="ctr">
+                  <a:tcPr marL="54864" marR="54864" marT="18288" marB="18288" anchor="ctr">
                     <a:solidFill>
                       <a:srgbClr val="E9EBEF"/>
                     </a:solidFill>
@@ -13188,7 +15420,7 @@
                       </a:r>
                     </a:p>
                   </a:txBody>
-                  <a:tcPr marL="64008" marR="64008" marT="18288" marB="18288" anchor="ctr">
+                  <a:tcPr marL="54864" marR="54864" marT="18288" marB="18288" anchor="ctr">
                     <a:solidFill>
                       <a:srgbClr val="FFFFFF"/>
                     </a:solidFill>
@@ -13211,7 +15443,7 @@
                       </a:r>
                     </a:p>
                   </a:txBody>
-                  <a:tcPr marL="64008" marR="64008" marT="18288" marB="18288" anchor="ctr">
+                  <a:tcPr marL="54864" marR="54864" marT="18288" marB="18288" anchor="ctr">
                     <a:solidFill>
                       <a:srgbClr val="FFFFFF"/>
                     </a:solidFill>
@@ -13236,7 +15468,7 @@
                       </a:r>
                     </a:p>
                   </a:txBody>
-                  <a:tcPr marL="64008" marR="64008" marT="18288" marB="18288" anchor="ctr">
+                  <a:tcPr marL="54864" marR="54864" marT="18288" marB="18288" anchor="ctr">
                     <a:solidFill>
                       <a:srgbClr val="E9EBEF"/>
                     </a:solidFill>
@@ -13259,7 +15491,7 @@
                       </a:r>
                     </a:p>
                   </a:txBody>
-                  <a:tcPr marL="64008" marR="64008" marT="18288" marB="18288" anchor="ctr">
+                  <a:tcPr marL="54864" marR="54864" marT="18288" marB="18288" anchor="ctr">
                     <a:solidFill>
                       <a:srgbClr val="E9EBEF"/>
                     </a:solidFill>
@@ -13284,7 +15516,7 @@
                       </a:r>
                     </a:p>
                   </a:txBody>
-                  <a:tcPr marL="64008" marR="64008" marT="18288" marB="18288" anchor="ctr">
+                  <a:tcPr marL="54864" marR="54864" marT="18288" marB="18288" anchor="ctr">
                     <a:solidFill>
                       <a:srgbClr val="FFFFFF"/>
                     </a:solidFill>
@@ -13307,7 +15539,7 @@
                       </a:r>
                     </a:p>
                   </a:txBody>
-                  <a:tcPr marL="64008" marR="64008" marT="18288" marB="18288" anchor="ctr">
+                  <a:tcPr marL="54864" marR="54864" marT="18288" marB="18288" anchor="ctr">
                     <a:solidFill>
                       <a:srgbClr val="FFFFFF"/>
                     </a:solidFill>
@@ -13342,7 +15574,7 @@
           <a:p>
             <a:pPr algn="l">
               <a:spcAft>
-                <a:spcPts val="800"/>
+                <a:spcPts val="700"/>
               </a:spcAft>
             </a:pPr>
             <a:r>
@@ -13365,7 +15597,7 @@
         </p:nvSpPr>
         <p:spPr>
           <a:xfrm>
-            <a:off x="457200" y="6437376"/>
+            <a:off x="457200" y="6455664"/>
             <a:ext cx="11338560" cy="365760"/>
           </a:xfrm>
           <a:prstGeom prst="rect">
@@ -13387,7 +15619,7 @@
                 </a:solidFill>
                 <a:latin typeface="Microsoft YaHei"/>
               </a:rPr>
-              <a:t>反推与倍数均为演示性 [E]；旨在说明“定价逻辑”，非精确目标价</a:t>
+              <a:t>反推与倍数均为演示性 [E]；旨在说明定价逻辑，非精确目标价</a:t>
             </a:r>
           </a:p>
         </p:txBody>

--- a/MiniMax_前瞻_DCF_竞争格局.pptx
+++ b/MiniMax_前瞻_DCF_竞争格局.pptx
@@ -23,6 +23,7 @@
     <p:sldId id="271" r:id="rId22"/>
     <p:sldId id="272" r:id="rId23"/>
     <p:sldId id="273" r:id="rId24"/>
+    <p:sldId id="274" r:id="rId25"/>
   </p:sldIdLst>
   <p:sldSz cx="12191695" cy="6858000" type="screen4x3"/>
   <p:notesSz cx="6858000" cy="9144000"/>
@@ -773,6 +774,154 @@
 </c:chartSpace>
 </file>
 
+<file path=ppt/charts/chart4.xml><?xml version="1.0" encoding="utf-8"?>
+<c:chartSpace xmlns:c="http://schemas.openxmlformats.org/drawingml/2006/chart" xmlns:a="http://schemas.openxmlformats.org/drawingml/2006/main" xmlns:r="http://schemas.openxmlformats.org/officeDocument/2006/relationships">
+  <c:date1904 val="0"/>
+  <c:chart>
+    <c:autoTitleDeleted val="0"/>
+    <c:plotArea>
+      <c:barChart>
+        <c:barDir val="col"/>
+        <c:grouping val="clustered"/>
+        <c:ser>
+          <c:idx val="0"/>
+          <c:order val="0"/>
+          <c:tx>
+            <c:strRef>
+              <c:f>Sheet1!$B$1</c:f>
+              <c:strCache>
+                <c:ptCount val="1"/>
+                <c:pt idx="0">
+                  <c:v>2025 营收 (US$M)</c:v>
+                </c:pt>
+              </c:strCache>
+            </c:strRef>
+          </c:tx>
+          <c:spPr>
+            <a:solidFill>
+              <a:srgbClr val="5D6D9E"/>
+            </a:solidFill>
+          </c:spPr>
+          <c:dPt>
+            <c:idx val="1"/>
+            <c:spPr>
+              <a:solidFill>
+                <a:srgbClr val="2E86C1"/>
+              </a:solidFill>
+            </c:spPr>
+          </c:dPt>
+          <c:cat>
+            <c:strRef>
+              <c:f>Sheet1!$A$2:$A$5</c:f>
+              <c:strCache>
+                <c:ptCount val="4"/>
+                <c:pt idx="0">
+                  <c:v>智谱 (25E)</c:v>
+                </c:pt>
+                <c:pt idx="1">
+                  <c:v>MiniMax (25A)</c:v>
+                </c:pt>
+                <c:pt idx="2">
+                  <c:v>Kimi (25)</c:v>
+                </c:pt>
+                <c:pt idx="3">
+                  <c:v>阶跃 (25)</c:v>
+                </c:pt>
+              </c:strCache>
+            </c:strRef>
+          </c:cat>
+          <c:val>
+            <c:numRef>
+              <c:f>Sheet1!$B$2:$B$5</c:f>
+              <c:numCache>
+                <c:formatCode>General</c:formatCode>
+                <c:ptCount val="4"/>
+                <c:pt idx="0">
+                  <c:v>97</c:v>
+                </c:pt>
+                <c:pt idx="1">
+                  <c:v>79</c:v>
+                </c:pt>
+                <c:pt idx="2">
+                  <c:v>69</c:v>
+                </c:pt>
+                <c:pt idx="3">
+                  <c:v>69</c:v>
+                </c:pt>
+              </c:numCache>
+            </c:numRef>
+          </c:val>
+        </c:ser>
+        <c:dLbls>
+          <c:numFmt formatCode="0" sourceLinked="0"/>
+          <c:txPr>
+            <a:bodyPr/>
+            <a:lstStyle/>
+            <a:p>
+              <a:pPr>
+                <a:defRPr sz="1200" b="1"/>
+              </a:pPr>
+            </a:p>
+          </c:txPr>
+          <c:showLegendKey val="0"/>
+          <c:showVal val="1"/>
+          <c:showCatName val="0"/>
+          <c:showSerName val="0"/>
+          <c:showPercent val="0"/>
+          <c:showBubbleSize val="0"/>
+          <c:showLeaderLines val="1"/>
+        </c:dLbls>
+        <c:axId val="-2068027336"/>
+        <c:axId val="-2113994440"/>
+      </c:barChart>
+      <c:catAx>
+        <c:axId val="-2068027336"/>
+        <c:scaling>
+          <c:orientation val="minMax"/>
+        </c:scaling>
+        <c:delete val="0"/>
+        <c:axPos val="b"/>
+        <c:majorTickMark val="out"/>
+        <c:minorTickMark val="none"/>
+        <c:tickLblPos val="nextTo"/>
+        <c:crossAx val="-2113994440"/>
+        <c:crosses val="autoZero"/>
+        <c:auto val="1"/>
+        <c:lblAlgn val="ctr"/>
+        <c:lblOffset val="100"/>
+        <c:noMultiLvlLbl val="0"/>
+      </c:catAx>
+      <c:valAx>
+        <c:axId val="-2113994440"/>
+        <c:scaling/>
+        <c:delete val="0"/>
+        <c:axPos val="l"/>
+        <c:majorGridlines/>
+        <c:majorTickMark val="out"/>
+        <c:minorTickMark val="none"/>
+        <c:tickLblPos val="nextTo"/>
+        <c:crossAx val="-2068027336"/>
+        <c:crosses val="autoZero"/>
+      </c:valAx>
+    </c:plotArea>
+    <c:dispBlanksAs val="gap"/>
+  </c:chart>
+  <c:txPr>
+    <a:bodyPr/>
+    <a:lstStyle/>
+    <a:p>
+      <a:pPr>
+        <a:defRPr sz="1800"/>
+      </a:pPr>
+      <a:endParaRPr lang="en-US"/>
+    </a:p>
+  </c:txPr>
+  <c:externalData r:id="rId1">
+    <c:autoUpdate val="0"/>
+  </c:externalData>
+</c:chartSpace>
+</file>
+
 <file path=ppt/slideLayouts/slideLayout1.xml><?xml version="1.0" encoding="utf-8"?>
 <p:sldLayout xmlns:a="http://schemas.openxmlformats.org/drawingml/2006/main" xmlns:r="http://schemas.openxmlformats.org/officeDocument/2006/relationships" xmlns:p="http://schemas.openxmlformats.org/presentationml/2006/main" type="title" preserve="1">
   <p:cSld name="Title Slide">
@@ -7315,14 +7464,78 @@
                 </a:solidFill>
                 <a:latin typeface="Microsoft YaHei"/>
               </a:rPr>
-              <a:t>两条 IPO 路线对照：MiniMax 的 To C 出海 vs 智谱的 To B 政企</a:t>
+              <a:t>【竞争格局】营收规模对齐（统一折算 US$M）：四家体量接近，差距在增速与估值</a:t>
+            </a:r>
+          </a:p>
+          <a:p>
+            <a:pPr algn="l"/>
+            <a:r>
+              <a:rPr sz="1350" b="0">
+                <a:solidFill>
+                  <a:srgbClr val="6B707B"/>
+                </a:solidFill>
+                <a:latin typeface="Microsoft YaHei"/>
+              </a:rPr>
+              <a:t>2025 营收，按 ¥7.2/US$ 折算</a:t>
+            </a:r>
+          </a:p>
+        </p:txBody>
+      </p:sp>
+      <p:sp>
+        <p:nvSpPr>
+          <p:cNvPr id="4" name="Rectangle 3"/>
+          <p:cNvSpPr/>
+          <p:nvPr/>
+        </p:nvSpPr>
+        <p:spPr>
+          <a:xfrm>
+            <a:off x="10104120" y="274320"/>
+            <a:ext cx="1783080" cy="384048"/>
+          </a:xfrm>
+          <a:prstGeom prst="rect">
+            <a:avLst/>
+          </a:prstGeom>
+          <a:solidFill>
+            <a:srgbClr val="5D6D9E"/>
+          </a:solidFill>
+          <a:ln>
+            <a:noFill/>
+          </a:ln>
+        </p:spPr>
+        <p:style>
+          <a:lnRef idx="1">
+            <a:schemeClr val="accent1"/>
+          </a:lnRef>
+          <a:fillRef idx="3">
+            <a:schemeClr val="accent1"/>
+          </a:fillRef>
+          <a:effectRef idx="2">
+            <a:schemeClr val="accent1"/>
+          </a:effectRef>
+          <a:fontRef idx="minor">
+            <a:schemeClr val="lt1"/>
+          </a:fontRef>
+        </p:style>
+        <p:txBody>
+          <a:bodyPr rtlCol="0" anchor="ctr"/>
+          <a:lstStyle/>
+          <a:p>
+            <a:pPr algn="ctr"/>
+            <a:r>
+              <a:rPr sz="1200" b="1">
+                <a:solidFill>
+                  <a:srgbClr val="FFFFFF"/>
+                </a:solidFill>
+                <a:latin typeface="Microsoft YaHei"/>
+              </a:rPr>
+              <a:t>③ 竞争格局</a:t>
             </a:r>
           </a:p>
         </p:txBody>
       </p:sp>
       <p:graphicFrame>
         <p:nvGraphicFramePr>
-          <p:cNvPr id="4" name="Table 3"/>
+          <p:cNvPr id="5" name="Chart 4"/>
           <p:cNvGraphicFramePr>
             <a:graphicFrameLocks noGrp="1"/>
           </p:cNvGraphicFramePr>
@@ -7330,665 +7543,120 @@
         </p:nvGraphicFramePr>
         <p:xfrm>
           <a:off x="457200" y="1691640"/>
-          <a:ext cx="11247120" cy="4206240"/>
+          <a:ext cx="6035040" cy="4206240"/>
         </p:xfrm>
         <a:graphic>
-          <a:graphicData uri="http://schemas.openxmlformats.org/drawingml/2006/table">
-            <a:tbl>
-              <a:tblPr firstRow="1" bandRow="1">
-                <a:tableStyleId>{5C22544A-7EE6-4342-B048-85BDC9FD1C3A}</a:tableStyleId>
-              </a:tblPr>
-              <a:tblGrid>
-                <a:gridCol w="2103120"/>
-                <a:gridCol w="4572000"/>
-                <a:gridCol w="4572000"/>
-              </a:tblGrid>
-              <a:tr h="467360">
-                <a:tc>
-                  <a:txBody>
-                    <a:bodyPr wrap="square"/>
-                    <a:lstStyle/>
-                    <a:p>
-                      <a:pPr algn="l"/>
-                      <a:r>
-                        <a:rPr sz="1250" b="1">
-                          <a:solidFill>
-                            <a:srgbClr val="FFFFFF"/>
-                          </a:solidFill>
-                          <a:latin typeface="Microsoft YaHei"/>
-                        </a:rPr>
-                        <a:t>维度</a:t>
-                      </a:r>
-                    </a:p>
-                  </a:txBody>
-                  <a:tcPr marL="54864" marR="54864" marT="18288" marB="18288" anchor="ctr">
-                    <a:solidFill>
-                      <a:srgbClr val="16213E"/>
-                    </a:solidFill>
-                  </a:tcPr>
-                </a:tc>
-                <a:tc>
-                  <a:txBody>
-                    <a:bodyPr wrap="square"/>
-                    <a:lstStyle/>
-                    <a:p>
-                      <a:pPr algn="l"/>
-                      <a:r>
-                        <a:rPr sz="1250" b="1">
-                          <a:solidFill>
-                            <a:srgbClr val="FFFFFF"/>
-                          </a:solidFill>
-                          <a:latin typeface="Microsoft YaHei"/>
-                        </a:rPr>
-                        <a:t>MiniMax (00100.HK)</a:t>
-                      </a:r>
-                    </a:p>
-                  </a:txBody>
-                  <a:tcPr marL="54864" marR="54864" marT="18288" marB="18288" anchor="ctr">
-                    <a:solidFill>
-                      <a:srgbClr val="16213E"/>
-                    </a:solidFill>
-                  </a:tcPr>
-                </a:tc>
-                <a:tc>
-                  <a:txBody>
-                    <a:bodyPr wrap="square"/>
-                    <a:lstStyle/>
-                    <a:p>
-                      <a:pPr algn="l"/>
-                      <a:r>
-                        <a:rPr sz="1250" b="1">
-                          <a:solidFill>
-                            <a:srgbClr val="FFFFFF"/>
-                          </a:solidFill>
-                          <a:latin typeface="Microsoft YaHei"/>
-                        </a:rPr>
-                        <a:t>智谱 AI</a:t>
-                      </a:r>
-                    </a:p>
-                  </a:txBody>
-                  <a:tcPr marL="54864" marR="54864" marT="18288" marB="18288" anchor="ctr">
-                    <a:solidFill>
-                      <a:srgbClr val="16213E"/>
-                    </a:solidFill>
-                  </a:tcPr>
-                </a:tc>
-              </a:tr>
-              <a:tr h="467360">
-                <a:tc>
-                  <a:txBody>
-                    <a:bodyPr wrap="square"/>
-                    <a:lstStyle/>
-                    <a:p>
-                      <a:pPr algn="l"/>
-                      <a:r>
-                        <a:rPr sz="1250" b="0">
-                          <a:solidFill>
-                            <a:srgbClr val="16213E"/>
-                          </a:solidFill>
-                          <a:latin typeface="Microsoft YaHei"/>
-                        </a:rPr>
-                        <a:t>客户结构</a:t>
-                      </a:r>
-                    </a:p>
-                  </a:txBody>
-                  <a:tcPr marL="54864" marR="54864" marT="18288" marB="18288" anchor="ctr">
-                    <a:solidFill>
-                      <a:srgbClr val="FFFFFF"/>
-                    </a:solidFill>
-                  </a:tcPr>
-                </a:tc>
-                <a:tc>
-                  <a:txBody>
-                    <a:bodyPr wrap="square"/>
-                    <a:lstStyle/>
-                    <a:p>
-                      <a:pPr algn="l"/>
-                      <a:r>
-                        <a:rPr sz="1250" b="0">
-                          <a:solidFill>
-                            <a:srgbClr val="16213E"/>
-                          </a:solidFill>
-                          <a:latin typeface="Microsoft YaHei"/>
-                        </a:rPr>
-                        <a:t>To C 为主 (~70% 消费级)</a:t>
-                      </a:r>
-                    </a:p>
-                  </a:txBody>
-                  <a:tcPr marL="54864" marR="54864" marT="18288" marB="18288" anchor="ctr">
-                    <a:solidFill>
-                      <a:srgbClr val="FFFFFF"/>
-                    </a:solidFill>
-                  </a:tcPr>
-                </a:tc>
-                <a:tc>
-                  <a:txBody>
-                    <a:bodyPr wrap="square"/>
-                    <a:lstStyle/>
-                    <a:p>
-                      <a:pPr algn="l"/>
-                      <a:r>
-                        <a:rPr sz="1250" b="0">
-                          <a:solidFill>
-                            <a:srgbClr val="16213E"/>
-                          </a:solidFill>
-                          <a:latin typeface="Microsoft YaHei"/>
-                        </a:rPr>
-                        <a:t>To B 为主 (84% 本地化部署)</a:t>
-                      </a:r>
-                    </a:p>
-                  </a:txBody>
-                  <a:tcPr marL="54864" marR="54864" marT="18288" marB="18288" anchor="ctr">
-                    <a:solidFill>
-                      <a:srgbClr val="FFFFFF"/>
-                    </a:solidFill>
-                  </a:tcPr>
-                </a:tc>
-              </a:tr>
-              <a:tr h="467360">
-                <a:tc>
-                  <a:txBody>
-                    <a:bodyPr wrap="square"/>
-                    <a:lstStyle/>
-                    <a:p>
-                      <a:pPr algn="l"/>
-                      <a:r>
-                        <a:rPr sz="1250" b="0">
-                          <a:solidFill>
-                            <a:srgbClr val="16213E"/>
-                          </a:solidFill>
-                          <a:latin typeface="Microsoft YaHei"/>
-                        </a:rPr>
-                        <a:t>市场重心</a:t>
-                      </a:r>
-                    </a:p>
-                  </a:txBody>
-                  <a:tcPr marL="54864" marR="54864" marT="18288" marB="18288" anchor="ctr">
-                    <a:solidFill>
-                      <a:srgbClr val="E9EBEF"/>
-                    </a:solidFill>
-                  </a:tcPr>
-                </a:tc>
-                <a:tc>
-                  <a:txBody>
-                    <a:bodyPr wrap="square"/>
-                    <a:lstStyle/>
-                    <a:p>
-                      <a:pPr algn="l"/>
-                      <a:r>
-                        <a:rPr sz="1250" b="0">
-                          <a:solidFill>
-                            <a:srgbClr val="16213E"/>
-                          </a:solidFill>
-                          <a:latin typeface="Microsoft YaHei"/>
-                        </a:rPr>
-                        <a:t>海外优先 (73% 海外收入)</a:t>
-                      </a:r>
-                    </a:p>
-                  </a:txBody>
-                  <a:tcPr marL="54864" marR="54864" marT="18288" marB="18288" anchor="ctr">
-                    <a:solidFill>
-                      <a:srgbClr val="E9EBEF"/>
-                    </a:solidFill>
-                  </a:tcPr>
-                </a:tc>
-                <a:tc>
-                  <a:txBody>
-                    <a:bodyPr wrap="square"/>
-                    <a:lstStyle/>
-                    <a:p>
-                      <a:pPr algn="l"/>
-                      <a:r>
-                        <a:rPr sz="1250" b="0">
-                          <a:solidFill>
-                            <a:srgbClr val="16213E"/>
-                          </a:solidFill>
-                          <a:latin typeface="Microsoft YaHei"/>
-                        </a:rPr>
-                        <a:t>国内政企 / 国资体系</a:t>
-                      </a:r>
-                    </a:p>
-                  </a:txBody>
-                  <a:tcPr marL="54864" marR="54864" marT="18288" marB="18288" anchor="ctr">
-                    <a:solidFill>
-                      <a:srgbClr val="E9EBEF"/>
-                    </a:solidFill>
-                  </a:tcPr>
-                </a:tc>
-              </a:tr>
-              <a:tr h="467360">
-                <a:tc>
-                  <a:txBody>
-                    <a:bodyPr wrap="square"/>
-                    <a:lstStyle/>
-                    <a:p>
-                      <a:pPr algn="l"/>
-                      <a:r>
-                        <a:rPr sz="1250" b="0">
-                          <a:solidFill>
-                            <a:srgbClr val="16213E"/>
-                          </a:solidFill>
-                          <a:latin typeface="Microsoft YaHei"/>
-                        </a:rPr>
-                        <a:t>营收 (2024)</a:t>
-                      </a:r>
-                    </a:p>
-                  </a:txBody>
-                  <a:tcPr marL="54864" marR="54864" marT="18288" marB="18288" anchor="ctr">
-                    <a:solidFill>
-                      <a:srgbClr val="FFFFFF"/>
-                    </a:solidFill>
-                  </a:tcPr>
-                </a:tc>
-                <a:tc>
-                  <a:txBody>
-                    <a:bodyPr wrap="square"/>
-                    <a:lstStyle/>
-                    <a:p>
-                      <a:pPr algn="l"/>
-                      <a:r>
-                        <a:rPr sz="1250" b="0">
-                          <a:solidFill>
-                            <a:srgbClr val="16213E"/>
-                          </a:solidFill>
-                          <a:latin typeface="Microsoft YaHei"/>
-                        </a:rPr>
-                        <a:t>$30.5M (~¥2.2亿)</a:t>
-                      </a:r>
-                    </a:p>
-                  </a:txBody>
-                  <a:tcPr marL="54864" marR="54864" marT="18288" marB="18288" anchor="ctr">
-                    <a:solidFill>
-                      <a:srgbClr val="FFFFFF"/>
-                    </a:solidFill>
-                  </a:tcPr>
-                </a:tc>
-                <a:tc>
-                  <a:txBody>
-                    <a:bodyPr wrap="square"/>
-                    <a:lstStyle/>
-                    <a:p>
-                      <a:pPr algn="l"/>
-                      <a:r>
-                        <a:rPr sz="1250" b="0">
-                          <a:solidFill>
-                            <a:srgbClr val="16213E"/>
-                          </a:solidFill>
-                          <a:latin typeface="Microsoft YaHei"/>
-                        </a:rPr>
-                        <a:t>¥3.12 亿</a:t>
-                      </a:r>
-                    </a:p>
-                  </a:txBody>
-                  <a:tcPr marL="54864" marR="54864" marT="18288" marB="18288" anchor="ctr">
-                    <a:solidFill>
-                      <a:srgbClr val="FFFFFF"/>
-                    </a:solidFill>
-                  </a:tcPr>
-                </a:tc>
-              </a:tr>
-              <a:tr h="467360">
-                <a:tc>
-                  <a:txBody>
-                    <a:bodyPr wrap="square"/>
-                    <a:lstStyle/>
-                    <a:p>
-                      <a:pPr algn="l"/>
-                      <a:r>
-                        <a:rPr sz="1250" b="0">
-                          <a:solidFill>
-                            <a:srgbClr val="16213E"/>
-                          </a:solidFill>
-                          <a:latin typeface="Microsoft YaHei"/>
-                        </a:rPr>
-                        <a:t>营收增速</a:t>
-                      </a:r>
-                    </a:p>
-                  </a:txBody>
-                  <a:tcPr marL="54864" marR="54864" marT="18288" marB="18288" anchor="ctr">
-                    <a:solidFill>
-                      <a:srgbClr val="E9EBEF"/>
-                    </a:solidFill>
-                  </a:tcPr>
-                </a:tc>
-                <a:tc>
-                  <a:txBody>
-                    <a:bodyPr wrap="square"/>
-                    <a:lstStyle/>
-                    <a:p>
-                      <a:pPr algn="l"/>
-                      <a:r>
-                        <a:rPr sz="1250" b="0">
-                          <a:solidFill>
-                            <a:srgbClr val="16213E"/>
-                          </a:solidFill>
-                          <a:latin typeface="Microsoft YaHei"/>
-                        </a:rPr>
-                        <a:t>2025 +159%</a:t>
-                      </a:r>
-                    </a:p>
-                  </a:txBody>
-                  <a:tcPr marL="54864" marR="54864" marT="18288" marB="18288" anchor="ctr">
-                    <a:solidFill>
-                      <a:srgbClr val="E9EBEF"/>
-                    </a:solidFill>
-                  </a:tcPr>
-                </a:tc>
-                <a:tc>
-                  <a:txBody>
-                    <a:bodyPr wrap="square"/>
-                    <a:lstStyle/>
-                    <a:p>
-                      <a:pPr algn="l"/>
-                      <a:r>
-                        <a:rPr sz="1250" b="0">
-                          <a:solidFill>
-                            <a:srgbClr val="16213E"/>
-                          </a:solidFill>
-                          <a:latin typeface="Microsoft YaHei"/>
-                        </a:rPr>
-                        <a:t>三年 CAGR ~130%</a:t>
-                      </a:r>
-                    </a:p>
-                  </a:txBody>
-                  <a:tcPr marL="54864" marR="54864" marT="18288" marB="18288" anchor="ctr">
-                    <a:solidFill>
-                      <a:srgbClr val="E9EBEF"/>
-                    </a:solidFill>
-                  </a:tcPr>
-                </a:tc>
-              </a:tr>
-              <a:tr h="467360">
-                <a:tc>
-                  <a:txBody>
-                    <a:bodyPr wrap="square"/>
-                    <a:lstStyle/>
-                    <a:p>
-                      <a:pPr algn="l"/>
-                      <a:r>
-                        <a:rPr sz="1250" b="0">
-                          <a:solidFill>
-                            <a:srgbClr val="16213E"/>
-                          </a:solidFill>
-                          <a:latin typeface="Microsoft YaHei"/>
-                        </a:rPr>
-                        <a:t>估值</a:t>
-                      </a:r>
-                    </a:p>
-                  </a:txBody>
-                  <a:tcPr marL="54864" marR="54864" marT="18288" marB="18288" anchor="ctr">
-                    <a:solidFill>
-                      <a:srgbClr val="FFFFFF"/>
-                    </a:solidFill>
-                  </a:tcPr>
-                </a:tc>
-                <a:tc>
-                  <a:txBody>
-                    <a:bodyPr wrap="square"/>
-                    <a:lstStyle/>
-                    <a:p>
-                      <a:pPr algn="l"/>
-                      <a:r>
-                        <a:rPr sz="1250" b="0">
-                          <a:solidFill>
-                            <a:srgbClr val="16213E"/>
-                          </a:solidFill>
-                          <a:latin typeface="Microsoft YaHei"/>
-                        </a:rPr>
-                        <a:t>≈ US$5.9B (上市市值)</a:t>
-                      </a:r>
-                    </a:p>
-                  </a:txBody>
-                  <a:tcPr marL="54864" marR="54864" marT="18288" marB="18288" anchor="ctr">
-                    <a:solidFill>
-                      <a:srgbClr val="FFFFFF"/>
-                    </a:solidFill>
-                  </a:tcPr>
-                </a:tc>
-                <a:tc>
-                  <a:txBody>
-                    <a:bodyPr wrap="square"/>
-                    <a:lstStyle/>
-                    <a:p>
-                      <a:pPr algn="l"/>
-                      <a:r>
-                        <a:rPr sz="1250" b="0">
-                          <a:solidFill>
-                            <a:srgbClr val="16213E"/>
-                          </a:solidFill>
-                          <a:latin typeface="Microsoft YaHei"/>
-                        </a:rPr>
-                        <a:t>≈ ¥244 亿 (~$3.4B)</a:t>
-                      </a:r>
-                    </a:p>
-                  </a:txBody>
-                  <a:tcPr marL="54864" marR="54864" marT="18288" marB="18288" anchor="ctr">
-                    <a:solidFill>
-                      <a:srgbClr val="FFFFFF"/>
-                    </a:solidFill>
-                  </a:tcPr>
-                </a:tc>
-              </a:tr>
-              <a:tr h="467360">
-                <a:tc>
-                  <a:txBody>
-                    <a:bodyPr wrap="square"/>
-                    <a:lstStyle/>
-                    <a:p>
-                      <a:pPr algn="l"/>
-                      <a:r>
-                        <a:rPr sz="1250" b="0">
-                          <a:solidFill>
-                            <a:srgbClr val="16213E"/>
-                          </a:solidFill>
-                          <a:latin typeface="Microsoft YaHei"/>
-                        </a:rPr>
-                        <a:t>上市进度</a:t>
-                      </a:r>
-                    </a:p>
-                  </a:txBody>
-                  <a:tcPr marL="54864" marR="54864" marT="18288" marB="18288" anchor="ctr">
-                    <a:solidFill>
-                      <a:srgbClr val="E9EBEF"/>
-                    </a:solidFill>
-                  </a:tcPr>
-                </a:tc>
-                <a:tc>
-                  <a:txBody>
-                    <a:bodyPr wrap="square"/>
-                    <a:lstStyle/>
-                    <a:p>
-                      <a:pPr algn="l"/>
-                      <a:r>
-                        <a:rPr sz="1250" b="0">
-                          <a:solidFill>
-                            <a:srgbClr val="16213E"/>
-                          </a:solidFill>
-                          <a:latin typeface="Microsoft YaHei"/>
-                        </a:rPr>
-                        <a:t>已上市 2026-01-09</a:t>
-                      </a:r>
-                    </a:p>
-                  </a:txBody>
-                  <a:tcPr marL="54864" marR="54864" marT="18288" marB="18288" anchor="ctr">
-                    <a:solidFill>
-                      <a:srgbClr val="E9EBEF"/>
-                    </a:solidFill>
-                  </a:tcPr>
-                </a:tc>
-                <a:tc>
-                  <a:txBody>
-                    <a:bodyPr wrap="square"/>
-                    <a:lstStyle/>
-                    <a:p>
-                      <a:pPr algn="l"/>
-                      <a:r>
-                        <a:rPr sz="1250" b="0">
-                          <a:solidFill>
-                            <a:srgbClr val="16213E"/>
-                          </a:solidFill>
-                          <a:latin typeface="Microsoft YaHei"/>
-                        </a:rPr>
-                        <a:t>通过聆讯，冲“第一股”</a:t>
-                      </a:r>
-                    </a:p>
-                  </a:txBody>
-                  <a:tcPr marL="54864" marR="54864" marT="18288" marB="18288" anchor="ctr">
-                    <a:solidFill>
-                      <a:srgbClr val="E9EBEF"/>
-                    </a:solidFill>
-                  </a:tcPr>
-                </a:tc>
-              </a:tr>
-              <a:tr h="467360">
-                <a:tc>
-                  <a:txBody>
-                    <a:bodyPr wrap="square"/>
-                    <a:lstStyle/>
-                    <a:p>
-                      <a:pPr algn="l"/>
-                      <a:r>
-                        <a:rPr sz="1250" b="0">
-                          <a:solidFill>
-                            <a:srgbClr val="16213E"/>
-                          </a:solidFill>
-                          <a:latin typeface="Microsoft YaHei"/>
-                        </a:rPr>
-                        <a:t>代表模型</a:t>
-                      </a:r>
-                    </a:p>
-                  </a:txBody>
-                  <a:tcPr marL="54864" marR="54864" marT="18288" marB="18288" anchor="ctr">
-                    <a:solidFill>
-                      <a:srgbClr val="FFFFFF"/>
-                    </a:solidFill>
-                  </a:tcPr>
-                </a:tc>
-                <a:tc>
-                  <a:txBody>
-                    <a:bodyPr wrap="square"/>
-                    <a:lstStyle/>
-                    <a:p>
-                      <a:pPr algn="l"/>
-                      <a:r>
-                        <a:rPr sz="1250" b="0">
-                          <a:solidFill>
-                            <a:srgbClr val="16213E"/>
-                          </a:solidFill>
-                          <a:latin typeface="Microsoft YaHei"/>
-                        </a:rPr>
-                        <a:t>多模态(海螺视频/语音)</a:t>
-                      </a:r>
-                    </a:p>
-                  </a:txBody>
-                  <a:tcPr marL="54864" marR="54864" marT="18288" marB="18288" anchor="ctr">
-                    <a:solidFill>
-                      <a:srgbClr val="FFFFFF"/>
-                    </a:solidFill>
-                  </a:tcPr>
-                </a:tc>
-                <a:tc>
-                  <a:txBody>
-                    <a:bodyPr wrap="square"/>
-                    <a:lstStyle/>
-                    <a:p>
-                      <a:pPr algn="l"/>
-                      <a:r>
-                        <a:rPr sz="1250" b="0">
-                          <a:solidFill>
-                            <a:srgbClr val="16213E"/>
-                          </a:solidFill>
-                          <a:latin typeface="Microsoft YaHei"/>
-                        </a:rPr>
-                        <a:t>GLM 系(通用+推理)</a:t>
-                      </a:r>
-                    </a:p>
-                  </a:txBody>
-                  <a:tcPr marL="54864" marR="54864" marT="18288" marB="18288" anchor="ctr">
-                    <a:solidFill>
-                      <a:srgbClr val="FFFFFF"/>
-                    </a:solidFill>
-                  </a:tcPr>
-                </a:tc>
-              </a:tr>
-              <a:tr h="467360">
-                <a:tc>
-                  <a:txBody>
-                    <a:bodyPr wrap="square"/>
-                    <a:lstStyle/>
-                    <a:p>
-                      <a:pPr algn="l"/>
-                      <a:r>
-                        <a:rPr sz="1250" b="0">
-                          <a:solidFill>
-                            <a:srgbClr val="16213E"/>
-                          </a:solidFill>
-                          <a:latin typeface="Microsoft YaHei"/>
-                        </a:rPr>
-                        <a:t>核心风险</a:t>
-                      </a:r>
-                    </a:p>
-                  </a:txBody>
-                  <a:tcPr marL="54864" marR="54864" marT="18288" marB="18288" anchor="ctr">
-                    <a:solidFill>
-                      <a:srgbClr val="E9EBEF"/>
-                    </a:solidFill>
-                  </a:tcPr>
-                </a:tc>
-                <a:tc>
-                  <a:txBody>
-                    <a:bodyPr wrap="square"/>
-                    <a:lstStyle/>
-                    <a:p>
-                      <a:pPr algn="l"/>
-                      <a:r>
-                        <a:rPr sz="1250" b="0">
-                          <a:solidFill>
-                            <a:srgbClr val="16213E"/>
-                          </a:solidFill>
-                          <a:latin typeface="Microsoft YaHei"/>
-                        </a:rPr>
-                        <a:t>C端获客成本 / 海外合规</a:t>
-                      </a:r>
-                    </a:p>
-                  </a:txBody>
-                  <a:tcPr marL="54864" marR="54864" marT="18288" marB="18288" anchor="ctr">
-                    <a:solidFill>
-                      <a:srgbClr val="E9EBEF"/>
-                    </a:solidFill>
-                  </a:tcPr>
-                </a:tc>
-                <a:tc>
-                  <a:txBody>
-                    <a:bodyPr wrap="square"/>
-                    <a:lstStyle/>
-                    <a:p>
-                      <a:pPr algn="l"/>
-                      <a:r>
-                        <a:rPr sz="1250" b="0">
-                          <a:solidFill>
-                            <a:srgbClr val="16213E"/>
-                          </a:solidFill>
-                          <a:latin typeface="Microsoft YaHei"/>
-                        </a:rPr>
-                        <a:t>项目制毛利 / 回款 / G端依赖</a:t>
-                      </a:r>
-                    </a:p>
-                  </a:txBody>
-                  <a:tcPr marL="54864" marR="54864" marT="18288" marB="18288" anchor="ctr">
-                    <a:solidFill>
-                      <a:srgbClr val="E9EBEF"/>
-                    </a:solidFill>
-                  </a:tcPr>
-                </a:tc>
-              </a:tr>
-            </a:tbl>
+          <a:graphicData uri="http://schemas.openxmlformats.org/drawingml/2006/chart">
+            <c:chart xmlns:c="http://schemas.openxmlformats.org/drawingml/2006/chart" r:id="rId2"/>
           </a:graphicData>
         </a:graphic>
       </p:graphicFrame>
       <p:sp>
         <p:nvSpPr>
-          <p:cNvPr id="5" name="TextBox 4"/>
+          <p:cNvPr id="6" name="TextBox 5"/>
+          <p:cNvSpPr txBox="1"/>
+          <p:nvPr/>
+        </p:nvSpPr>
+        <p:spPr>
+          <a:xfrm>
+            <a:off x="6766560" y="1737360"/>
+            <a:ext cx="5029200" cy="4297680"/>
+          </a:xfrm>
+          <a:prstGeom prst="rect">
+            <a:avLst/>
+          </a:prstGeom>
+          <a:noFill/>
+        </p:spPr>
+        <p:txBody>
+          <a:bodyPr wrap="square">
+            <a:spAutoFit/>
+          </a:bodyPr>
+          <a:lstStyle/>
+          <a:p>
+            <a:pPr algn="l">
+              <a:spcAft>
+                <a:spcPts val="700"/>
+              </a:spcAft>
+            </a:pPr>
+            <a:r>
+              <a:rPr sz="1600" b="1">
+                <a:solidFill>
+                  <a:srgbClr val="16213E"/>
+                </a:solidFill>
+                <a:latin typeface="Microsoft YaHei"/>
+              </a:rPr>
+              <a:t>读图要点</a:t>
+            </a:r>
+          </a:p>
+          <a:p>
+            <a:pPr algn="l">
+              <a:spcAft>
+                <a:spcPts val="700"/>
+              </a:spcAft>
+            </a:pPr>
+            <a:r>
+              <a:rPr sz="1400" b="0">
+                <a:solidFill>
+                  <a:srgbClr val="6B707B"/>
+                </a:solidFill>
+                <a:latin typeface="Microsoft YaHei"/>
+              </a:rPr>
+              <a:t>• 2025 营收四家都在 ~$70-100M 区间，绝对体量其实接近（智谱略高、MiniMax 次之）</a:t>
+            </a:r>
+          </a:p>
+          <a:p>
+            <a:pPr algn="l">
+              <a:spcAft>
+                <a:spcPts val="700"/>
+              </a:spcAft>
+            </a:pPr>
+            <a:r>
+              <a:rPr sz="1400" b="0">
+                <a:solidFill>
+                  <a:srgbClr val="6B707B"/>
+                </a:solidFill>
+                <a:latin typeface="Microsoft YaHei"/>
+              </a:rPr>
+              <a:t>• 口径差异大：MiniMax/Kimi/阶跃偏 C 端规模，智谱偏 To B 项目制收入</a:t>
+            </a:r>
+          </a:p>
+          <a:p>
+            <a:pPr algn="l">
+              <a:spcAft>
+                <a:spcPts val="700"/>
+              </a:spcAft>
+            </a:pPr>
+            <a:r>
+              <a:rPr sz="1400" b="0">
+                <a:solidFill>
+                  <a:srgbClr val="6B707B"/>
+                </a:solidFill>
+                <a:latin typeface="Microsoft YaHei"/>
+              </a:rPr>
+              <a:t>• 2026E 增速分化：Kimi &gt;¥20亿(~$278M)、阶跃 ~¥12亿(~$167M)、MiniMax 基准 ~$174M → Kimi 提速最猛</a:t>
+            </a:r>
+          </a:p>
+          <a:p>
+            <a:pPr algn="l">
+              <a:spcAft>
+                <a:spcPts val="700"/>
+              </a:spcAft>
+            </a:pPr>
+            <a:r>
+              <a:rPr sz="1400" b="0">
+                <a:solidFill>
+                  <a:srgbClr val="6B707B"/>
+                </a:solidFill>
+                <a:latin typeface="Microsoft YaHei"/>
+              </a:rPr>
+              <a:t>• 估值与营收倒挂：Kimi 估值($18-30B 报道)远超营收体量 → 市场押的是 Agent 故事</a:t>
+            </a:r>
+          </a:p>
+        </p:txBody>
+      </p:sp>
+      <p:sp>
+        <p:nvSpPr>
+          <p:cNvPr id="7" name="TextBox 6"/>
           <p:cNvSpPr txBox="1"/>
           <p:nvPr/>
         </p:nvSpPr>
@@ -8016,7 +7684,7 @@
                 </a:solidFill>
                 <a:latin typeface="Microsoft YaHei"/>
               </a:rPr>
-              <a:t>来源：MiniMax 招股书；智谱招股书（量子位/智东西解读）。两者口径与币种不同，仅作模式对照</a:t>
+              <a:t>折算率 ¥7.2/US$。MiniMax 为 2025 实际；智谱按 ~130% 增速外推 [E]；Kimi/阶跃为公司/报道口径。跨家口径不完全可比</a:t>
             </a:r>
           </a:p>
         </p:txBody>
@@ -8112,308 +7780,680 @@
                 </a:solidFill>
                 <a:latin typeface="Microsoft YaHei"/>
               </a:rPr>
-              <a:t>综合：护城河在“多模态+出海产品力”，软肋在“流量+盈利”</a:t>
+              <a:t>两条 IPO 路线对照：MiniMax 的 To C 出海 vs 智谱的 To B 政企</a:t>
             </a:r>
           </a:p>
         </p:txBody>
       </p:sp>
-      <p:sp>
-        <p:nvSpPr>
-          <p:cNvPr id="4" name="Rectangle 3"/>
-          <p:cNvSpPr/>
+      <p:graphicFrame>
+        <p:nvGraphicFramePr>
+          <p:cNvPr id="4" name="Table 3"/>
+          <p:cNvGraphicFramePr>
+            <a:graphicFrameLocks noGrp="1"/>
+          </p:cNvGraphicFramePr>
           <p:nvPr/>
-        </p:nvSpPr>
-        <p:spPr>
-          <a:xfrm>
-            <a:off x="457200" y="1600200"/>
-            <a:ext cx="5486400" cy="438912"/>
-          </a:xfrm>
-          <a:prstGeom prst="rect">
-            <a:avLst/>
-          </a:prstGeom>
-          <a:solidFill>
-            <a:srgbClr val="16213E"/>
-          </a:solidFill>
-          <a:ln>
-            <a:noFill/>
-          </a:ln>
-        </p:spPr>
-        <p:style>
-          <a:lnRef idx="1">
-            <a:schemeClr val="accent1"/>
-          </a:lnRef>
-          <a:fillRef idx="3">
-            <a:schemeClr val="accent1"/>
-          </a:fillRef>
-          <a:effectRef idx="2">
-            <a:schemeClr val="accent1"/>
-          </a:effectRef>
-          <a:fontRef idx="minor">
-            <a:schemeClr val="lt1"/>
-          </a:fontRef>
-        </p:style>
-        <p:txBody>
-          <a:bodyPr rtlCol="0" anchor="ctr"/>
-          <a:lstStyle/>
-          <a:p>
-            <a:pPr algn="ctr"/>
-            <a:r>
-              <a:rPr sz="1500" b="1">
-                <a:solidFill>
-                  <a:srgbClr val="FFFFFF"/>
-                </a:solidFill>
-                <a:latin typeface="Microsoft YaHei"/>
-              </a:rPr>
-              <a:t>护城河（可持续优势）</a:t>
-            </a:r>
-          </a:p>
-        </p:txBody>
-      </p:sp>
+        </p:nvGraphicFramePr>
+        <p:xfrm>
+          <a:off x="457200" y="1691640"/>
+          <a:ext cx="11247120" cy="4206240"/>
+        </p:xfrm>
+        <a:graphic>
+          <a:graphicData uri="http://schemas.openxmlformats.org/drawingml/2006/table">
+            <a:tbl>
+              <a:tblPr firstRow="1" bandRow="1">
+                <a:tableStyleId>{5C22544A-7EE6-4342-B048-85BDC9FD1C3A}</a:tableStyleId>
+              </a:tblPr>
+              <a:tblGrid>
+                <a:gridCol w="2103120"/>
+                <a:gridCol w="4572000"/>
+                <a:gridCol w="4572000"/>
+              </a:tblGrid>
+              <a:tr h="467360">
+                <a:tc>
+                  <a:txBody>
+                    <a:bodyPr wrap="square"/>
+                    <a:lstStyle/>
+                    <a:p>
+                      <a:pPr algn="l"/>
+                      <a:r>
+                        <a:rPr sz="1250" b="1">
+                          <a:solidFill>
+                            <a:srgbClr val="FFFFFF"/>
+                          </a:solidFill>
+                          <a:latin typeface="Microsoft YaHei"/>
+                        </a:rPr>
+                        <a:t>维度</a:t>
+                      </a:r>
+                    </a:p>
+                  </a:txBody>
+                  <a:tcPr marL="54864" marR="54864" marT="18288" marB="18288" anchor="ctr">
+                    <a:solidFill>
+                      <a:srgbClr val="16213E"/>
+                    </a:solidFill>
+                  </a:tcPr>
+                </a:tc>
+                <a:tc>
+                  <a:txBody>
+                    <a:bodyPr wrap="square"/>
+                    <a:lstStyle/>
+                    <a:p>
+                      <a:pPr algn="l"/>
+                      <a:r>
+                        <a:rPr sz="1250" b="1">
+                          <a:solidFill>
+                            <a:srgbClr val="FFFFFF"/>
+                          </a:solidFill>
+                          <a:latin typeface="Microsoft YaHei"/>
+                        </a:rPr>
+                        <a:t>MiniMax (00100.HK)</a:t>
+                      </a:r>
+                    </a:p>
+                  </a:txBody>
+                  <a:tcPr marL="54864" marR="54864" marT="18288" marB="18288" anchor="ctr">
+                    <a:solidFill>
+                      <a:srgbClr val="16213E"/>
+                    </a:solidFill>
+                  </a:tcPr>
+                </a:tc>
+                <a:tc>
+                  <a:txBody>
+                    <a:bodyPr wrap="square"/>
+                    <a:lstStyle/>
+                    <a:p>
+                      <a:pPr algn="l"/>
+                      <a:r>
+                        <a:rPr sz="1250" b="1">
+                          <a:solidFill>
+                            <a:srgbClr val="FFFFFF"/>
+                          </a:solidFill>
+                          <a:latin typeface="Microsoft YaHei"/>
+                        </a:rPr>
+                        <a:t>智谱 AI</a:t>
+                      </a:r>
+                    </a:p>
+                  </a:txBody>
+                  <a:tcPr marL="54864" marR="54864" marT="18288" marB="18288" anchor="ctr">
+                    <a:solidFill>
+                      <a:srgbClr val="16213E"/>
+                    </a:solidFill>
+                  </a:tcPr>
+                </a:tc>
+              </a:tr>
+              <a:tr h="467360">
+                <a:tc>
+                  <a:txBody>
+                    <a:bodyPr wrap="square"/>
+                    <a:lstStyle/>
+                    <a:p>
+                      <a:pPr algn="l"/>
+                      <a:r>
+                        <a:rPr sz="1250" b="0">
+                          <a:solidFill>
+                            <a:srgbClr val="16213E"/>
+                          </a:solidFill>
+                          <a:latin typeface="Microsoft YaHei"/>
+                        </a:rPr>
+                        <a:t>客户结构</a:t>
+                      </a:r>
+                    </a:p>
+                  </a:txBody>
+                  <a:tcPr marL="54864" marR="54864" marT="18288" marB="18288" anchor="ctr">
+                    <a:solidFill>
+                      <a:srgbClr val="FFFFFF"/>
+                    </a:solidFill>
+                  </a:tcPr>
+                </a:tc>
+                <a:tc>
+                  <a:txBody>
+                    <a:bodyPr wrap="square"/>
+                    <a:lstStyle/>
+                    <a:p>
+                      <a:pPr algn="l"/>
+                      <a:r>
+                        <a:rPr sz="1250" b="0">
+                          <a:solidFill>
+                            <a:srgbClr val="16213E"/>
+                          </a:solidFill>
+                          <a:latin typeface="Microsoft YaHei"/>
+                        </a:rPr>
+                        <a:t>To C 为主 (~70% 消费级)</a:t>
+                      </a:r>
+                    </a:p>
+                  </a:txBody>
+                  <a:tcPr marL="54864" marR="54864" marT="18288" marB="18288" anchor="ctr">
+                    <a:solidFill>
+                      <a:srgbClr val="FFFFFF"/>
+                    </a:solidFill>
+                  </a:tcPr>
+                </a:tc>
+                <a:tc>
+                  <a:txBody>
+                    <a:bodyPr wrap="square"/>
+                    <a:lstStyle/>
+                    <a:p>
+                      <a:pPr algn="l"/>
+                      <a:r>
+                        <a:rPr sz="1250" b="0">
+                          <a:solidFill>
+                            <a:srgbClr val="16213E"/>
+                          </a:solidFill>
+                          <a:latin typeface="Microsoft YaHei"/>
+                        </a:rPr>
+                        <a:t>To B 为主 (84% 本地化部署)</a:t>
+                      </a:r>
+                    </a:p>
+                  </a:txBody>
+                  <a:tcPr marL="54864" marR="54864" marT="18288" marB="18288" anchor="ctr">
+                    <a:solidFill>
+                      <a:srgbClr val="FFFFFF"/>
+                    </a:solidFill>
+                  </a:tcPr>
+                </a:tc>
+              </a:tr>
+              <a:tr h="467360">
+                <a:tc>
+                  <a:txBody>
+                    <a:bodyPr wrap="square"/>
+                    <a:lstStyle/>
+                    <a:p>
+                      <a:pPr algn="l"/>
+                      <a:r>
+                        <a:rPr sz="1250" b="0">
+                          <a:solidFill>
+                            <a:srgbClr val="16213E"/>
+                          </a:solidFill>
+                          <a:latin typeface="Microsoft YaHei"/>
+                        </a:rPr>
+                        <a:t>市场重心</a:t>
+                      </a:r>
+                    </a:p>
+                  </a:txBody>
+                  <a:tcPr marL="54864" marR="54864" marT="18288" marB="18288" anchor="ctr">
+                    <a:solidFill>
+                      <a:srgbClr val="E9EBEF"/>
+                    </a:solidFill>
+                  </a:tcPr>
+                </a:tc>
+                <a:tc>
+                  <a:txBody>
+                    <a:bodyPr wrap="square"/>
+                    <a:lstStyle/>
+                    <a:p>
+                      <a:pPr algn="l"/>
+                      <a:r>
+                        <a:rPr sz="1250" b="0">
+                          <a:solidFill>
+                            <a:srgbClr val="16213E"/>
+                          </a:solidFill>
+                          <a:latin typeface="Microsoft YaHei"/>
+                        </a:rPr>
+                        <a:t>海外优先 (73% 海外收入)</a:t>
+                      </a:r>
+                    </a:p>
+                  </a:txBody>
+                  <a:tcPr marL="54864" marR="54864" marT="18288" marB="18288" anchor="ctr">
+                    <a:solidFill>
+                      <a:srgbClr val="E9EBEF"/>
+                    </a:solidFill>
+                  </a:tcPr>
+                </a:tc>
+                <a:tc>
+                  <a:txBody>
+                    <a:bodyPr wrap="square"/>
+                    <a:lstStyle/>
+                    <a:p>
+                      <a:pPr algn="l"/>
+                      <a:r>
+                        <a:rPr sz="1250" b="0">
+                          <a:solidFill>
+                            <a:srgbClr val="16213E"/>
+                          </a:solidFill>
+                          <a:latin typeface="Microsoft YaHei"/>
+                        </a:rPr>
+                        <a:t>国内政企 / 国资体系</a:t>
+                      </a:r>
+                    </a:p>
+                  </a:txBody>
+                  <a:tcPr marL="54864" marR="54864" marT="18288" marB="18288" anchor="ctr">
+                    <a:solidFill>
+                      <a:srgbClr val="E9EBEF"/>
+                    </a:solidFill>
+                  </a:tcPr>
+                </a:tc>
+              </a:tr>
+              <a:tr h="467360">
+                <a:tc>
+                  <a:txBody>
+                    <a:bodyPr wrap="square"/>
+                    <a:lstStyle/>
+                    <a:p>
+                      <a:pPr algn="l"/>
+                      <a:r>
+                        <a:rPr sz="1250" b="0">
+                          <a:solidFill>
+                            <a:srgbClr val="16213E"/>
+                          </a:solidFill>
+                          <a:latin typeface="Microsoft YaHei"/>
+                        </a:rPr>
+                        <a:t>营收 (2024)</a:t>
+                      </a:r>
+                    </a:p>
+                  </a:txBody>
+                  <a:tcPr marL="54864" marR="54864" marT="18288" marB="18288" anchor="ctr">
+                    <a:solidFill>
+                      <a:srgbClr val="FFFFFF"/>
+                    </a:solidFill>
+                  </a:tcPr>
+                </a:tc>
+                <a:tc>
+                  <a:txBody>
+                    <a:bodyPr wrap="square"/>
+                    <a:lstStyle/>
+                    <a:p>
+                      <a:pPr algn="l"/>
+                      <a:r>
+                        <a:rPr sz="1250" b="0">
+                          <a:solidFill>
+                            <a:srgbClr val="16213E"/>
+                          </a:solidFill>
+                          <a:latin typeface="Microsoft YaHei"/>
+                        </a:rPr>
+                        <a:t>$30.5M (~¥2.2亿)</a:t>
+                      </a:r>
+                    </a:p>
+                  </a:txBody>
+                  <a:tcPr marL="54864" marR="54864" marT="18288" marB="18288" anchor="ctr">
+                    <a:solidFill>
+                      <a:srgbClr val="FFFFFF"/>
+                    </a:solidFill>
+                  </a:tcPr>
+                </a:tc>
+                <a:tc>
+                  <a:txBody>
+                    <a:bodyPr wrap="square"/>
+                    <a:lstStyle/>
+                    <a:p>
+                      <a:pPr algn="l"/>
+                      <a:r>
+                        <a:rPr sz="1250" b="0">
+                          <a:solidFill>
+                            <a:srgbClr val="16213E"/>
+                          </a:solidFill>
+                          <a:latin typeface="Microsoft YaHei"/>
+                        </a:rPr>
+                        <a:t>¥3.12 亿</a:t>
+                      </a:r>
+                    </a:p>
+                  </a:txBody>
+                  <a:tcPr marL="54864" marR="54864" marT="18288" marB="18288" anchor="ctr">
+                    <a:solidFill>
+                      <a:srgbClr val="FFFFFF"/>
+                    </a:solidFill>
+                  </a:tcPr>
+                </a:tc>
+              </a:tr>
+              <a:tr h="467360">
+                <a:tc>
+                  <a:txBody>
+                    <a:bodyPr wrap="square"/>
+                    <a:lstStyle/>
+                    <a:p>
+                      <a:pPr algn="l"/>
+                      <a:r>
+                        <a:rPr sz="1250" b="0">
+                          <a:solidFill>
+                            <a:srgbClr val="16213E"/>
+                          </a:solidFill>
+                          <a:latin typeface="Microsoft YaHei"/>
+                        </a:rPr>
+                        <a:t>营收增速</a:t>
+                      </a:r>
+                    </a:p>
+                  </a:txBody>
+                  <a:tcPr marL="54864" marR="54864" marT="18288" marB="18288" anchor="ctr">
+                    <a:solidFill>
+                      <a:srgbClr val="E9EBEF"/>
+                    </a:solidFill>
+                  </a:tcPr>
+                </a:tc>
+                <a:tc>
+                  <a:txBody>
+                    <a:bodyPr wrap="square"/>
+                    <a:lstStyle/>
+                    <a:p>
+                      <a:pPr algn="l"/>
+                      <a:r>
+                        <a:rPr sz="1250" b="0">
+                          <a:solidFill>
+                            <a:srgbClr val="16213E"/>
+                          </a:solidFill>
+                          <a:latin typeface="Microsoft YaHei"/>
+                        </a:rPr>
+                        <a:t>2025 +159%</a:t>
+                      </a:r>
+                    </a:p>
+                  </a:txBody>
+                  <a:tcPr marL="54864" marR="54864" marT="18288" marB="18288" anchor="ctr">
+                    <a:solidFill>
+                      <a:srgbClr val="E9EBEF"/>
+                    </a:solidFill>
+                  </a:tcPr>
+                </a:tc>
+                <a:tc>
+                  <a:txBody>
+                    <a:bodyPr wrap="square"/>
+                    <a:lstStyle/>
+                    <a:p>
+                      <a:pPr algn="l"/>
+                      <a:r>
+                        <a:rPr sz="1250" b="0">
+                          <a:solidFill>
+                            <a:srgbClr val="16213E"/>
+                          </a:solidFill>
+                          <a:latin typeface="Microsoft YaHei"/>
+                        </a:rPr>
+                        <a:t>三年 CAGR ~130%</a:t>
+                      </a:r>
+                    </a:p>
+                  </a:txBody>
+                  <a:tcPr marL="54864" marR="54864" marT="18288" marB="18288" anchor="ctr">
+                    <a:solidFill>
+                      <a:srgbClr val="E9EBEF"/>
+                    </a:solidFill>
+                  </a:tcPr>
+                </a:tc>
+              </a:tr>
+              <a:tr h="467360">
+                <a:tc>
+                  <a:txBody>
+                    <a:bodyPr wrap="square"/>
+                    <a:lstStyle/>
+                    <a:p>
+                      <a:pPr algn="l"/>
+                      <a:r>
+                        <a:rPr sz="1250" b="0">
+                          <a:solidFill>
+                            <a:srgbClr val="16213E"/>
+                          </a:solidFill>
+                          <a:latin typeface="Microsoft YaHei"/>
+                        </a:rPr>
+                        <a:t>估值</a:t>
+                      </a:r>
+                    </a:p>
+                  </a:txBody>
+                  <a:tcPr marL="54864" marR="54864" marT="18288" marB="18288" anchor="ctr">
+                    <a:solidFill>
+                      <a:srgbClr val="FFFFFF"/>
+                    </a:solidFill>
+                  </a:tcPr>
+                </a:tc>
+                <a:tc>
+                  <a:txBody>
+                    <a:bodyPr wrap="square"/>
+                    <a:lstStyle/>
+                    <a:p>
+                      <a:pPr algn="l"/>
+                      <a:r>
+                        <a:rPr sz="1250" b="0">
+                          <a:solidFill>
+                            <a:srgbClr val="16213E"/>
+                          </a:solidFill>
+                          <a:latin typeface="Microsoft YaHei"/>
+                        </a:rPr>
+                        <a:t>≈ US$5.9B (上市市值)</a:t>
+                      </a:r>
+                    </a:p>
+                  </a:txBody>
+                  <a:tcPr marL="54864" marR="54864" marT="18288" marB="18288" anchor="ctr">
+                    <a:solidFill>
+                      <a:srgbClr val="FFFFFF"/>
+                    </a:solidFill>
+                  </a:tcPr>
+                </a:tc>
+                <a:tc>
+                  <a:txBody>
+                    <a:bodyPr wrap="square"/>
+                    <a:lstStyle/>
+                    <a:p>
+                      <a:pPr algn="l"/>
+                      <a:r>
+                        <a:rPr sz="1250" b="0">
+                          <a:solidFill>
+                            <a:srgbClr val="16213E"/>
+                          </a:solidFill>
+                          <a:latin typeface="Microsoft YaHei"/>
+                        </a:rPr>
+                        <a:t>≈ ¥244 亿 (~$3.4B)</a:t>
+                      </a:r>
+                    </a:p>
+                  </a:txBody>
+                  <a:tcPr marL="54864" marR="54864" marT="18288" marB="18288" anchor="ctr">
+                    <a:solidFill>
+                      <a:srgbClr val="FFFFFF"/>
+                    </a:solidFill>
+                  </a:tcPr>
+                </a:tc>
+              </a:tr>
+              <a:tr h="467360">
+                <a:tc>
+                  <a:txBody>
+                    <a:bodyPr wrap="square"/>
+                    <a:lstStyle/>
+                    <a:p>
+                      <a:pPr algn="l"/>
+                      <a:r>
+                        <a:rPr sz="1250" b="0">
+                          <a:solidFill>
+                            <a:srgbClr val="16213E"/>
+                          </a:solidFill>
+                          <a:latin typeface="Microsoft YaHei"/>
+                        </a:rPr>
+                        <a:t>上市进度</a:t>
+                      </a:r>
+                    </a:p>
+                  </a:txBody>
+                  <a:tcPr marL="54864" marR="54864" marT="18288" marB="18288" anchor="ctr">
+                    <a:solidFill>
+                      <a:srgbClr val="E9EBEF"/>
+                    </a:solidFill>
+                  </a:tcPr>
+                </a:tc>
+                <a:tc>
+                  <a:txBody>
+                    <a:bodyPr wrap="square"/>
+                    <a:lstStyle/>
+                    <a:p>
+                      <a:pPr algn="l"/>
+                      <a:r>
+                        <a:rPr sz="1250" b="0">
+                          <a:solidFill>
+                            <a:srgbClr val="16213E"/>
+                          </a:solidFill>
+                          <a:latin typeface="Microsoft YaHei"/>
+                        </a:rPr>
+                        <a:t>已上市 2026-01-09</a:t>
+                      </a:r>
+                    </a:p>
+                  </a:txBody>
+                  <a:tcPr marL="54864" marR="54864" marT="18288" marB="18288" anchor="ctr">
+                    <a:solidFill>
+                      <a:srgbClr val="E9EBEF"/>
+                    </a:solidFill>
+                  </a:tcPr>
+                </a:tc>
+                <a:tc>
+                  <a:txBody>
+                    <a:bodyPr wrap="square"/>
+                    <a:lstStyle/>
+                    <a:p>
+                      <a:pPr algn="l"/>
+                      <a:r>
+                        <a:rPr sz="1250" b="0">
+                          <a:solidFill>
+                            <a:srgbClr val="16213E"/>
+                          </a:solidFill>
+                          <a:latin typeface="Microsoft YaHei"/>
+                        </a:rPr>
+                        <a:t>通过聆讯，冲“第一股”</a:t>
+                      </a:r>
+                    </a:p>
+                  </a:txBody>
+                  <a:tcPr marL="54864" marR="54864" marT="18288" marB="18288" anchor="ctr">
+                    <a:solidFill>
+                      <a:srgbClr val="E9EBEF"/>
+                    </a:solidFill>
+                  </a:tcPr>
+                </a:tc>
+              </a:tr>
+              <a:tr h="467360">
+                <a:tc>
+                  <a:txBody>
+                    <a:bodyPr wrap="square"/>
+                    <a:lstStyle/>
+                    <a:p>
+                      <a:pPr algn="l"/>
+                      <a:r>
+                        <a:rPr sz="1250" b="0">
+                          <a:solidFill>
+                            <a:srgbClr val="16213E"/>
+                          </a:solidFill>
+                          <a:latin typeface="Microsoft YaHei"/>
+                        </a:rPr>
+                        <a:t>代表模型</a:t>
+                      </a:r>
+                    </a:p>
+                  </a:txBody>
+                  <a:tcPr marL="54864" marR="54864" marT="18288" marB="18288" anchor="ctr">
+                    <a:solidFill>
+                      <a:srgbClr val="FFFFFF"/>
+                    </a:solidFill>
+                  </a:tcPr>
+                </a:tc>
+                <a:tc>
+                  <a:txBody>
+                    <a:bodyPr wrap="square"/>
+                    <a:lstStyle/>
+                    <a:p>
+                      <a:pPr algn="l"/>
+                      <a:r>
+                        <a:rPr sz="1250" b="0">
+                          <a:solidFill>
+                            <a:srgbClr val="16213E"/>
+                          </a:solidFill>
+                          <a:latin typeface="Microsoft YaHei"/>
+                        </a:rPr>
+                        <a:t>多模态(海螺视频/语音)</a:t>
+                      </a:r>
+                    </a:p>
+                  </a:txBody>
+                  <a:tcPr marL="54864" marR="54864" marT="18288" marB="18288" anchor="ctr">
+                    <a:solidFill>
+                      <a:srgbClr val="FFFFFF"/>
+                    </a:solidFill>
+                  </a:tcPr>
+                </a:tc>
+                <a:tc>
+                  <a:txBody>
+                    <a:bodyPr wrap="square"/>
+                    <a:lstStyle/>
+                    <a:p>
+                      <a:pPr algn="l"/>
+                      <a:r>
+                        <a:rPr sz="1250" b="0">
+                          <a:solidFill>
+                            <a:srgbClr val="16213E"/>
+                          </a:solidFill>
+                          <a:latin typeface="Microsoft YaHei"/>
+                        </a:rPr>
+                        <a:t>GLM 系(通用+推理)</a:t>
+                      </a:r>
+                    </a:p>
+                  </a:txBody>
+                  <a:tcPr marL="54864" marR="54864" marT="18288" marB="18288" anchor="ctr">
+                    <a:solidFill>
+                      <a:srgbClr val="FFFFFF"/>
+                    </a:solidFill>
+                  </a:tcPr>
+                </a:tc>
+              </a:tr>
+              <a:tr h="467360">
+                <a:tc>
+                  <a:txBody>
+                    <a:bodyPr wrap="square"/>
+                    <a:lstStyle/>
+                    <a:p>
+                      <a:pPr algn="l"/>
+                      <a:r>
+                        <a:rPr sz="1250" b="0">
+                          <a:solidFill>
+                            <a:srgbClr val="16213E"/>
+                          </a:solidFill>
+                          <a:latin typeface="Microsoft YaHei"/>
+                        </a:rPr>
+                        <a:t>核心风险</a:t>
+                      </a:r>
+                    </a:p>
+                  </a:txBody>
+                  <a:tcPr marL="54864" marR="54864" marT="18288" marB="18288" anchor="ctr">
+                    <a:solidFill>
+                      <a:srgbClr val="E9EBEF"/>
+                    </a:solidFill>
+                  </a:tcPr>
+                </a:tc>
+                <a:tc>
+                  <a:txBody>
+                    <a:bodyPr wrap="square"/>
+                    <a:lstStyle/>
+                    <a:p>
+                      <a:pPr algn="l"/>
+                      <a:r>
+                        <a:rPr sz="1250" b="0">
+                          <a:solidFill>
+                            <a:srgbClr val="16213E"/>
+                          </a:solidFill>
+                          <a:latin typeface="Microsoft YaHei"/>
+                        </a:rPr>
+                        <a:t>C端获客成本 / 海外合规</a:t>
+                      </a:r>
+                    </a:p>
+                  </a:txBody>
+                  <a:tcPr marL="54864" marR="54864" marT="18288" marB="18288" anchor="ctr">
+                    <a:solidFill>
+                      <a:srgbClr val="E9EBEF"/>
+                    </a:solidFill>
+                  </a:tcPr>
+                </a:tc>
+                <a:tc>
+                  <a:txBody>
+                    <a:bodyPr wrap="square"/>
+                    <a:lstStyle/>
+                    <a:p>
+                      <a:pPr algn="l"/>
+                      <a:r>
+                        <a:rPr sz="1250" b="0">
+                          <a:solidFill>
+                            <a:srgbClr val="16213E"/>
+                          </a:solidFill>
+                          <a:latin typeface="Microsoft YaHei"/>
+                        </a:rPr>
+                        <a:t>项目制毛利 / 回款 / G端依赖</a:t>
+                      </a:r>
+                    </a:p>
+                  </a:txBody>
+                  <a:tcPr marL="54864" marR="54864" marT="18288" marB="18288" anchor="ctr">
+                    <a:solidFill>
+                      <a:srgbClr val="E9EBEF"/>
+                    </a:solidFill>
+                  </a:tcPr>
+                </a:tc>
+              </a:tr>
+            </a:tbl>
+          </a:graphicData>
+        </a:graphic>
+      </p:graphicFrame>
       <p:sp>
         <p:nvSpPr>
           <p:cNvPr id="5" name="TextBox 4"/>
-          <p:cNvSpPr txBox="1"/>
-          <p:nvPr/>
-        </p:nvSpPr>
-        <p:spPr>
-          <a:xfrm>
-            <a:off x="457200" y="2103120"/>
-            <a:ext cx="5486400" cy="3840480"/>
-          </a:xfrm>
-          <a:prstGeom prst="rect">
-            <a:avLst/>
-          </a:prstGeom>
-          <a:noFill/>
-        </p:spPr>
-        <p:txBody>
-          <a:bodyPr wrap="square">
-            <a:spAutoFit/>
-          </a:bodyPr>
-          <a:lstStyle/>
-          <a:p>
-            <a:pPr algn="l">
-              <a:spcAft>
-                <a:spcPts val="700"/>
-              </a:spcAft>
-            </a:pPr>
-            <a:r>
-              <a:rPr sz="1400" b="0">
-                <a:solidFill>
-                  <a:srgbClr val="6B707B"/>
-                </a:solidFill>
-                <a:latin typeface="Microsoft YaHei"/>
-              </a:rPr>
-              <a:t>• 产品力：海螺/Talkie 在 AI 视频与情感陪伴的海外心智</a:t>
-            </a:r>
-          </a:p>
-          <a:p>
-            <a:pPr algn="l">
-              <a:spcAft>
-                <a:spcPts val="700"/>
-              </a:spcAft>
-            </a:pPr>
-            <a:r>
-              <a:rPr sz="1400" b="0">
-                <a:solidFill>
-                  <a:srgbClr val="6B707B"/>
-                </a:solidFill>
-                <a:latin typeface="Microsoft YaHei"/>
-              </a:rPr>
-              <a:t>• 多模态全栈自研，模型迭代快（M2.5、Hailuo-02）</a:t>
-            </a:r>
-          </a:p>
-          <a:p>
-            <a:pPr algn="l">
-              <a:spcAft>
-                <a:spcPts val="700"/>
-              </a:spcAft>
-            </a:pPr>
-            <a:r>
-              <a:rPr sz="1400" b="0">
-                <a:solidFill>
-                  <a:srgbClr val="6B707B"/>
-                </a:solidFill>
-                <a:latin typeface="Microsoft YaHei"/>
-              </a:rPr>
-              <a:t>• 出海先发：73% 海外收入，绕开国内流量血战</a:t>
-            </a:r>
-          </a:p>
-          <a:p>
-            <a:pPr algn="l">
-              <a:spcAft>
-                <a:spcPts val="700"/>
-              </a:spcAft>
-            </a:pPr>
-            <a:r>
-              <a:rPr sz="1400" b="0">
-                <a:solidFill>
-                  <a:srgbClr val="6B707B"/>
-                </a:solidFill>
-                <a:latin typeface="Microsoft YaHei"/>
-              </a:rPr>
-              <a:t>• 资本/生态：阿里、腾讯、米哈游战略加持</a:t>
-            </a:r>
-          </a:p>
-        </p:txBody>
-      </p:sp>
-      <p:sp>
-        <p:nvSpPr>
-          <p:cNvPr id="6" name="Rectangle 5"/>
-          <p:cNvSpPr/>
-          <p:nvPr/>
-        </p:nvSpPr>
-        <p:spPr>
-          <a:xfrm>
-            <a:off x="6309360" y="1600200"/>
-            <a:ext cx="5486400" cy="438912"/>
-          </a:xfrm>
-          <a:prstGeom prst="rect">
-            <a:avLst/>
-          </a:prstGeom>
-          <a:solidFill>
-            <a:srgbClr val="2E86C1"/>
-          </a:solidFill>
-          <a:ln>
-            <a:noFill/>
-          </a:ln>
-        </p:spPr>
-        <p:style>
-          <a:lnRef idx="1">
-            <a:schemeClr val="accent1"/>
-          </a:lnRef>
-          <a:fillRef idx="3">
-            <a:schemeClr val="accent1"/>
-          </a:fillRef>
-          <a:effectRef idx="2">
-            <a:schemeClr val="accent1"/>
-          </a:effectRef>
-          <a:fontRef idx="minor">
-            <a:schemeClr val="lt1"/>
-          </a:fontRef>
-        </p:style>
-        <p:txBody>
-          <a:bodyPr rtlCol="0" anchor="ctr"/>
-          <a:lstStyle/>
-          <a:p>
-            <a:pPr algn="ctr"/>
-            <a:r>
-              <a:rPr sz="1500" b="1">
-                <a:solidFill>
-                  <a:srgbClr val="FFFFFF"/>
-                </a:solidFill>
-                <a:latin typeface="Microsoft YaHei"/>
-              </a:rPr>
-              <a:t>软肋（结构性风险）</a:t>
-            </a:r>
-          </a:p>
-        </p:txBody>
-      </p:sp>
-      <p:sp>
-        <p:nvSpPr>
-          <p:cNvPr id="7" name="TextBox 6"/>
-          <p:cNvSpPr txBox="1"/>
-          <p:nvPr/>
-        </p:nvSpPr>
-        <p:spPr>
-          <a:xfrm>
-            <a:off x="6309360" y="2103120"/>
-            <a:ext cx="5486400" cy="3840480"/>
-          </a:xfrm>
-          <a:prstGeom prst="rect">
-            <a:avLst/>
-          </a:prstGeom>
-          <a:noFill/>
-        </p:spPr>
-        <p:txBody>
-          <a:bodyPr wrap="square">
-            <a:spAutoFit/>
-          </a:bodyPr>
-          <a:lstStyle/>
-          <a:p>
-            <a:pPr algn="l">
-              <a:spcAft>
-                <a:spcPts val="700"/>
-              </a:spcAft>
-            </a:pPr>
-            <a:r>
-              <a:rPr sz="1400" b="0">
-                <a:solidFill>
-                  <a:srgbClr val="6B707B"/>
-                </a:solidFill>
-                <a:latin typeface="Microsoft YaHei"/>
-              </a:rPr>
-              <a:t>• 持续大额亏损，盈利路径与时点未明</a:t>
-            </a:r>
-          </a:p>
-          <a:p>
-            <a:pPr algn="l">
-              <a:spcAft>
-                <a:spcPts val="700"/>
-              </a:spcAft>
-            </a:pPr>
-            <a:r>
-              <a:rPr sz="1400" b="0">
-                <a:solidFill>
-                  <a:srgbClr val="6B707B"/>
-                </a:solidFill>
-                <a:latin typeface="Microsoft YaHei"/>
-              </a:rPr>
-              <a:t>• 国内流量远逊大厂，C 端获客成本高</a:t>
-            </a:r>
-          </a:p>
-          <a:p>
-            <a:pPr algn="l">
-              <a:spcAft>
-                <a:spcPts val="700"/>
-              </a:spcAft>
-            </a:pPr>
-            <a:r>
-              <a:rPr sz="1400" b="0">
-                <a:solidFill>
-                  <a:srgbClr val="6B707B"/>
-                </a:solidFill>
-                <a:latin typeface="Microsoft YaHei"/>
-              </a:rPr>
-              <a:t>• 估值 75x P/S，容错空间极小</a:t>
-            </a:r>
-          </a:p>
-          <a:p>
-            <a:pPr algn="l">
-              <a:spcAft>
-                <a:spcPts val="700"/>
-              </a:spcAft>
-            </a:pPr>
-            <a:r>
-              <a:rPr sz="1400" b="0">
-                <a:solidFill>
-                  <a:srgbClr val="6B707B"/>
-                </a:solidFill>
-                <a:latin typeface="Microsoft YaHei"/>
-              </a:rPr>
-              <a:t>• 海外合规/地缘 + 开源模型挤压付费意愿</a:t>
-            </a:r>
-          </a:p>
-          <a:p>
-            <a:pPr algn="l">
-              <a:spcAft>
-                <a:spcPts val="700"/>
-              </a:spcAft>
-            </a:pPr>
-            <a:r>
-              <a:rPr sz="1400" b="0">
-                <a:solidFill>
-                  <a:srgbClr val="6B707B"/>
-                </a:solidFill>
-                <a:latin typeface="Microsoft YaHei"/>
-              </a:rPr>
-              <a:t>• 阿里等股东同时是竞品（豆包/Qwen/智谱）</a:t>
-            </a:r>
-          </a:p>
-        </p:txBody>
-      </p:sp>
-      <p:sp>
-        <p:nvSpPr>
-          <p:cNvPr id="8" name="TextBox 7"/>
           <p:cNvSpPr txBox="1"/>
           <p:nvPr/>
         </p:nvSpPr>
@@ -8441,7 +8481,7 @@
                 </a:solidFill>
                 <a:latin typeface="Microsoft YaHei"/>
               </a:rPr>
-              <a:t>综合招股书、券商研报与公开报道的作者判断</a:t>
+              <a:t>来源：MiniMax 招股书；智谱招股书（量子位/智东西解读）。两者口径与币种不同，仅作模式对照</a:t>
             </a:r>
           </a:p>
         </p:txBody>
@@ -8537,6 +8577,431 @@
                 </a:solidFill>
                 <a:latin typeface="Microsoft YaHei"/>
               </a:rPr>
+              <a:t>综合：护城河在“多模态+出海产品力”，软肋在“流量+盈利”</a:t>
+            </a:r>
+          </a:p>
+        </p:txBody>
+      </p:sp>
+      <p:sp>
+        <p:nvSpPr>
+          <p:cNvPr id="4" name="Rectangle 3"/>
+          <p:cNvSpPr/>
+          <p:nvPr/>
+        </p:nvSpPr>
+        <p:spPr>
+          <a:xfrm>
+            <a:off x="457200" y="1600200"/>
+            <a:ext cx="5486400" cy="438912"/>
+          </a:xfrm>
+          <a:prstGeom prst="rect">
+            <a:avLst/>
+          </a:prstGeom>
+          <a:solidFill>
+            <a:srgbClr val="16213E"/>
+          </a:solidFill>
+          <a:ln>
+            <a:noFill/>
+          </a:ln>
+        </p:spPr>
+        <p:style>
+          <a:lnRef idx="1">
+            <a:schemeClr val="accent1"/>
+          </a:lnRef>
+          <a:fillRef idx="3">
+            <a:schemeClr val="accent1"/>
+          </a:fillRef>
+          <a:effectRef idx="2">
+            <a:schemeClr val="accent1"/>
+          </a:effectRef>
+          <a:fontRef idx="minor">
+            <a:schemeClr val="lt1"/>
+          </a:fontRef>
+        </p:style>
+        <p:txBody>
+          <a:bodyPr rtlCol="0" anchor="ctr"/>
+          <a:lstStyle/>
+          <a:p>
+            <a:pPr algn="ctr"/>
+            <a:r>
+              <a:rPr sz="1500" b="1">
+                <a:solidFill>
+                  <a:srgbClr val="FFFFFF"/>
+                </a:solidFill>
+                <a:latin typeface="Microsoft YaHei"/>
+              </a:rPr>
+              <a:t>护城河（可持续优势）</a:t>
+            </a:r>
+          </a:p>
+        </p:txBody>
+      </p:sp>
+      <p:sp>
+        <p:nvSpPr>
+          <p:cNvPr id="5" name="TextBox 4"/>
+          <p:cNvSpPr txBox="1"/>
+          <p:nvPr/>
+        </p:nvSpPr>
+        <p:spPr>
+          <a:xfrm>
+            <a:off x="457200" y="2103120"/>
+            <a:ext cx="5486400" cy="3840480"/>
+          </a:xfrm>
+          <a:prstGeom prst="rect">
+            <a:avLst/>
+          </a:prstGeom>
+          <a:noFill/>
+        </p:spPr>
+        <p:txBody>
+          <a:bodyPr wrap="square">
+            <a:spAutoFit/>
+          </a:bodyPr>
+          <a:lstStyle/>
+          <a:p>
+            <a:pPr algn="l">
+              <a:spcAft>
+                <a:spcPts val="700"/>
+              </a:spcAft>
+            </a:pPr>
+            <a:r>
+              <a:rPr sz="1400" b="0">
+                <a:solidFill>
+                  <a:srgbClr val="6B707B"/>
+                </a:solidFill>
+                <a:latin typeface="Microsoft YaHei"/>
+              </a:rPr>
+              <a:t>• 产品力：海螺/Talkie 在 AI 视频与情感陪伴的海外心智</a:t>
+            </a:r>
+          </a:p>
+          <a:p>
+            <a:pPr algn="l">
+              <a:spcAft>
+                <a:spcPts val="700"/>
+              </a:spcAft>
+            </a:pPr>
+            <a:r>
+              <a:rPr sz="1400" b="0">
+                <a:solidFill>
+                  <a:srgbClr val="6B707B"/>
+                </a:solidFill>
+                <a:latin typeface="Microsoft YaHei"/>
+              </a:rPr>
+              <a:t>• 多模态全栈自研，模型迭代快（M2.5、Hailuo-02）</a:t>
+            </a:r>
+          </a:p>
+          <a:p>
+            <a:pPr algn="l">
+              <a:spcAft>
+                <a:spcPts val="700"/>
+              </a:spcAft>
+            </a:pPr>
+            <a:r>
+              <a:rPr sz="1400" b="0">
+                <a:solidFill>
+                  <a:srgbClr val="6B707B"/>
+                </a:solidFill>
+                <a:latin typeface="Microsoft YaHei"/>
+              </a:rPr>
+              <a:t>• 出海先发：73% 海外收入，绕开国内流量血战</a:t>
+            </a:r>
+          </a:p>
+          <a:p>
+            <a:pPr algn="l">
+              <a:spcAft>
+                <a:spcPts val="700"/>
+              </a:spcAft>
+            </a:pPr>
+            <a:r>
+              <a:rPr sz="1400" b="0">
+                <a:solidFill>
+                  <a:srgbClr val="6B707B"/>
+                </a:solidFill>
+                <a:latin typeface="Microsoft YaHei"/>
+              </a:rPr>
+              <a:t>• 资本/生态：阿里、腾讯、米哈游战略加持</a:t>
+            </a:r>
+          </a:p>
+        </p:txBody>
+      </p:sp>
+      <p:sp>
+        <p:nvSpPr>
+          <p:cNvPr id="6" name="Rectangle 5"/>
+          <p:cNvSpPr/>
+          <p:nvPr/>
+        </p:nvSpPr>
+        <p:spPr>
+          <a:xfrm>
+            <a:off x="6309360" y="1600200"/>
+            <a:ext cx="5486400" cy="438912"/>
+          </a:xfrm>
+          <a:prstGeom prst="rect">
+            <a:avLst/>
+          </a:prstGeom>
+          <a:solidFill>
+            <a:srgbClr val="2E86C1"/>
+          </a:solidFill>
+          <a:ln>
+            <a:noFill/>
+          </a:ln>
+        </p:spPr>
+        <p:style>
+          <a:lnRef idx="1">
+            <a:schemeClr val="accent1"/>
+          </a:lnRef>
+          <a:fillRef idx="3">
+            <a:schemeClr val="accent1"/>
+          </a:fillRef>
+          <a:effectRef idx="2">
+            <a:schemeClr val="accent1"/>
+          </a:effectRef>
+          <a:fontRef idx="minor">
+            <a:schemeClr val="lt1"/>
+          </a:fontRef>
+        </p:style>
+        <p:txBody>
+          <a:bodyPr rtlCol="0" anchor="ctr"/>
+          <a:lstStyle/>
+          <a:p>
+            <a:pPr algn="ctr"/>
+            <a:r>
+              <a:rPr sz="1500" b="1">
+                <a:solidFill>
+                  <a:srgbClr val="FFFFFF"/>
+                </a:solidFill>
+                <a:latin typeface="Microsoft YaHei"/>
+              </a:rPr>
+              <a:t>软肋（结构性风险）</a:t>
+            </a:r>
+          </a:p>
+        </p:txBody>
+      </p:sp>
+      <p:sp>
+        <p:nvSpPr>
+          <p:cNvPr id="7" name="TextBox 6"/>
+          <p:cNvSpPr txBox="1"/>
+          <p:nvPr/>
+        </p:nvSpPr>
+        <p:spPr>
+          <a:xfrm>
+            <a:off x="6309360" y="2103120"/>
+            <a:ext cx="5486400" cy="3840480"/>
+          </a:xfrm>
+          <a:prstGeom prst="rect">
+            <a:avLst/>
+          </a:prstGeom>
+          <a:noFill/>
+        </p:spPr>
+        <p:txBody>
+          <a:bodyPr wrap="square">
+            <a:spAutoFit/>
+          </a:bodyPr>
+          <a:lstStyle/>
+          <a:p>
+            <a:pPr algn="l">
+              <a:spcAft>
+                <a:spcPts val="700"/>
+              </a:spcAft>
+            </a:pPr>
+            <a:r>
+              <a:rPr sz="1400" b="0">
+                <a:solidFill>
+                  <a:srgbClr val="6B707B"/>
+                </a:solidFill>
+                <a:latin typeface="Microsoft YaHei"/>
+              </a:rPr>
+              <a:t>• 持续大额亏损，盈利路径与时点未明</a:t>
+            </a:r>
+          </a:p>
+          <a:p>
+            <a:pPr algn="l">
+              <a:spcAft>
+                <a:spcPts val="700"/>
+              </a:spcAft>
+            </a:pPr>
+            <a:r>
+              <a:rPr sz="1400" b="0">
+                <a:solidFill>
+                  <a:srgbClr val="6B707B"/>
+                </a:solidFill>
+                <a:latin typeface="Microsoft YaHei"/>
+              </a:rPr>
+              <a:t>• 国内流量远逊大厂，C 端获客成本高</a:t>
+            </a:r>
+          </a:p>
+          <a:p>
+            <a:pPr algn="l">
+              <a:spcAft>
+                <a:spcPts val="700"/>
+              </a:spcAft>
+            </a:pPr>
+            <a:r>
+              <a:rPr sz="1400" b="0">
+                <a:solidFill>
+                  <a:srgbClr val="6B707B"/>
+                </a:solidFill>
+                <a:latin typeface="Microsoft YaHei"/>
+              </a:rPr>
+              <a:t>• 估值 75x P/S，容错空间极小</a:t>
+            </a:r>
+          </a:p>
+          <a:p>
+            <a:pPr algn="l">
+              <a:spcAft>
+                <a:spcPts val="700"/>
+              </a:spcAft>
+            </a:pPr>
+            <a:r>
+              <a:rPr sz="1400" b="0">
+                <a:solidFill>
+                  <a:srgbClr val="6B707B"/>
+                </a:solidFill>
+                <a:latin typeface="Microsoft YaHei"/>
+              </a:rPr>
+              <a:t>• 海外合规/地缘 + 开源模型挤压付费意愿</a:t>
+            </a:r>
+          </a:p>
+          <a:p>
+            <a:pPr algn="l">
+              <a:spcAft>
+                <a:spcPts val="700"/>
+              </a:spcAft>
+            </a:pPr>
+            <a:r>
+              <a:rPr sz="1400" b="0">
+                <a:solidFill>
+                  <a:srgbClr val="6B707B"/>
+                </a:solidFill>
+                <a:latin typeface="Microsoft YaHei"/>
+              </a:rPr>
+              <a:t>• 阿里等股东同时是竞品（豆包/Qwen/智谱）</a:t>
+            </a:r>
+          </a:p>
+        </p:txBody>
+      </p:sp>
+      <p:sp>
+        <p:nvSpPr>
+          <p:cNvPr id="8" name="TextBox 7"/>
+          <p:cNvSpPr txBox="1"/>
+          <p:nvPr/>
+        </p:nvSpPr>
+        <p:spPr>
+          <a:xfrm>
+            <a:off x="457200" y="6455664"/>
+            <a:ext cx="11338560" cy="365760"/>
+          </a:xfrm>
+          <a:prstGeom prst="rect">
+            <a:avLst/>
+          </a:prstGeom>
+          <a:noFill/>
+        </p:spPr>
+        <p:txBody>
+          <a:bodyPr wrap="square">
+            <a:spAutoFit/>
+          </a:bodyPr>
+          <a:lstStyle/>
+          <a:p>
+            <a:pPr algn="l"/>
+            <a:r>
+              <a:rPr sz="900" b="0">
+                <a:solidFill>
+                  <a:srgbClr val="6B707B"/>
+                </a:solidFill>
+                <a:latin typeface="Microsoft YaHei"/>
+              </a:rPr>
+              <a:t>综合招股书、券商研报与公开报道的作者判断</a:t>
+            </a:r>
+          </a:p>
+        </p:txBody>
+      </p:sp>
+    </p:spTree>
+  </p:cSld>
+  <p:clrMapOvr>
+    <a:masterClrMapping/>
+  </p:clrMapOvr>
+</p:sld>
+</file>
+
+<file path=ppt/slides/slide18.xml><?xml version="1.0" encoding="utf-8"?>
+<p:sld xmlns:a="http://schemas.openxmlformats.org/drawingml/2006/main" xmlns:p="http://schemas.openxmlformats.org/presentationml/2006/main" xmlns:r="http://schemas.openxmlformats.org/officeDocument/2006/relationships">
+  <p:cSld>
+    <p:spTree>
+      <p:nvGrpSpPr>
+        <p:cNvPr id="1" name=""/>
+        <p:cNvGrpSpPr/>
+        <p:nvPr/>
+      </p:nvGrpSpPr>
+      <p:grpSpPr/>
+      <p:sp>
+        <p:nvSpPr>
+          <p:cNvPr id="2" name="Rectangle 1"/>
+          <p:cNvSpPr/>
+          <p:nvPr/>
+        </p:nvSpPr>
+        <p:spPr>
+          <a:xfrm>
+            <a:off x="0" y="0"/>
+            <a:ext cx="12191695" cy="109728"/>
+          </a:xfrm>
+          <a:prstGeom prst="rect">
+            <a:avLst/>
+          </a:prstGeom>
+          <a:solidFill>
+            <a:srgbClr val="2E86C1"/>
+          </a:solidFill>
+          <a:ln>
+            <a:noFill/>
+          </a:ln>
+        </p:spPr>
+        <p:style>
+          <a:lnRef idx="1">
+            <a:schemeClr val="accent1"/>
+          </a:lnRef>
+          <a:fillRef idx="3">
+            <a:schemeClr val="accent1"/>
+          </a:fillRef>
+          <a:effectRef idx="2">
+            <a:schemeClr val="accent1"/>
+          </a:effectRef>
+          <a:fontRef idx="minor">
+            <a:schemeClr val="lt1"/>
+          </a:fontRef>
+        </p:style>
+        <p:txBody>
+          <a:bodyPr rtlCol="0" anchor="ctr"/>
+          <a:lstStyle/>
+          <a:p>
+            <a:pPr algn="ctr"/>
+          </a:p>
+        </p:txBody>
+      </p:sp>
+      <p:sp>
+        <p:nvSpPr>
+          <p:cNvPr id="3" name="TextBox 2"/>
+          <p:cNvSpPr txBox="1"/>
+          <p:nvPr/>
+        </p:nvSpPr>
+        <p:spPr>
+          <a:xfrm>
+            <a:off x="457200" y="219456"/>
+            <a:ext cx="11338560" cy="914400"/>
+          </a:xfrm>
+          <a:prstGeom prst="rect">
+            <a:avLst/>
+          </a:prstGeom>
+          <a:noFill/>
+        </p:spPr>
+        <p:txBody>
+          <a:bodyPr wrap="square">
+            <a:spAutoFit/>
+          </a:bodyPr>
+          <a:lstStyle/>
+          <a:p>
+            <a:pPr algn="l"/>
+            <a:r>
+              <a:rPr sz="2500" b="1">
+                <a:solidFill>
+                  <a:srgbClr val="16213E"/>
+                </a:solidFill>
+                <a:latin typeface="Microsoft YaHei"/>
+              </a:rPr>
               <a:t>综合结论：一笔“高赔率、高不确定”的 AI 平台期权</a:t>
             </a:r>
           </a:p>
@@ -9060,7 +9525,7 @@
 </p:sld>
 </file>
 
-<file path=ppt/slides/slide18.xml><?xml version="1.0" encoding="utf-8"?>
+<file path=ppt/slides/slide19.xml><?xml version="1.0" encoding="utf-8"?>
 <p:sld xmlns:a="http://schemas.openxmlformats.org/drawingml/2006/main" xmlns:p="http://schemas.openxmlformats.org/presentationml/2006/main" xmlns:r="http://schemas.openxmlformats.org/officeDocument/2006/relationships">
   <p:cSld>
     <p:spTree>
